--- a/FarmLife_企画.pptx
+++ b/FarmLife_企画.pptx
@@ -108,6 +108,11 @@
       </a:defRPr>
     </a:lvl9pPr>
   </p:defaultTextStyle>
+  <p:extLst>
+    <p:ext uri="{EFAFB233-063F-42B5-8137-9DF3F51BA10A}">
+      <p15:sldGuideLst xmlns:p15="http://schemas.microsoft.com/office/powerpoint/2012/main"/>
+    </p:ext>
+  </p:extLst>
 </p:presentation>
 </file>
 
@@ -242,7 +247,7 @@
           <a:p>
             <a:fld id="{14472033-EBEF-4113-884E-480E233F66C8}" type="datetimeFigureOut">
               <a:rPr kumimoji="1" lang="ja-JP" altLang="en-US" smtClean="0"/>
-              <a:t>2026/4/13</a:t>
+              <a:t>2026/4/14</a:t>
             </a:fld>
             <a:endParaRPr kumimoji="1" lang="ja-JP" altLang="en-US"/>
           </a:p>
@@ -444,7 +449,7 @@
           <a:p>
             <a:fld id="{14472033-EBEF-4113-884E-480E233F66C8}" type="datetimeFigureOut">
               <a:rPr kumimoji="1" lang="ja-JP" altLang="en-US" smtClean="0"/>
-              <a:t>2026/4/13</a:t>
+              <a:t>2026/4/14</a:t>
             </a:fld>
             <a:endParaRPr kumimoji="1" lang="ja-JP" altLang="en-US"/>
           </a:p>
@@ -656,7 +661,7 @@
           <a:p>
             <a:fld id="{14472033-EBEF-4113-884E-480E233F66C8}" type="datetimeFigureOut">
               <a:rPr kumimoji="1" lang="ja-JP" altLang="en-US" smtClean="0"/>
-              <a:t>2026/4/13</a:t>
+              <a:t>2026/4/14</a:t>
             </a:fld>
             <a:endParaRPr kumimoji="1" lang="ja-JP" altLang="en-US"/>
           </a:p>
@@ -858,7 +863,7 @@
           <a:p>
             <a:fld id="{14472033-EBEF-4113-884E-480E233F66C8}" type="datetimeFigureOut">
               <a:rPr kumimoji="1" lang="ja-JP" altLang="en-US" smtClean="0"/>
-              <a:t>2026/4/13</a:t>
+              <a:t>2026/4/14</a:t>
             </a:fld>
             <a:endParaRPr kumimoji="1" lang="ja-JP" altLang="en-US"/>
           </a:p>
@@ -1104,7 +1109,7 @@
           <a:p>
             <a:fld id="{14472033-EBEF-4113-884E-480E233F66C8}" type="datetimeFigureOut">
               <a:rPr kumimoji="1" lang="ja-JP" altLang="en-US" smtClean="0"/>
-              <a:t>2026/4/13</a:t>
+              <a:t>2026/4/14</a:t>
             </a:fld>
             <a:endParaRPr kumimoji="1" lang="ja-JP" altLang="en-US"/>
           </a:p>
@@ -1400,7 +1405,7 @@
           <a:p>
             <a:fld id="{14472033-EBEF-4113-884E-480E233F66C8}" type="datetimeFigureOut">
               <a:rPr kumimoji="1" lang="ja-JP" altLang="en-US" smtClean="0"/>
-              <a:t>2026/4/13</a:t>
+              <a:t>2026/4/14</a:t>
             </a:fld>
             <a:endParaRPr kumimoji="1" lang="ja-JP" altLang="en-US"/>
           </a:p>
@@ -1831,7 +1836,7 @@
           <a:p>
             <a:fld id="{14472033-EBEF-4113-884E-480E233F66C8}" type="datetimeFigureOut">
               <a:rPr kumimoji="1" lang="ja-JP" altLang="en-US" smtClean="0"/>
-              <a:t>2026/4/13</a:t>
+              <a:t>2026/4/14</a:t>
             </a:fld>
             <a:endParaRPr kumimoji="1" lang="ja-JP" altLang="en-US"/>
           </a:p>
@@ -1949,7 +1954,7 @@
           <a:p>
             <a:fld id="{14472033-EBEF-4113-884E-480E233F66C8}" type="datetimeFigureOut">
               <a:rPr kumimoji="1" lang="ja-JP" altLang="en-US" smtClean="0"/>
-              <a:t>2026/4/13</a:t>
+              <a:t>2026/4/14</a:t>
             </a:fld>
             <a:endParaRPr kumimoji="1" lang="ja-JP" altLang="en-US"/>
           </a:p>
@@ -2044,7 +2049,7 @@
           <a:p>
             <a:fld id="{14472033-EBEF-4113-884E-480E233F66C8}" type="datetimeFigureOut">
               <a:rPr kumimoji="1" lang="ja-JP" altLang="en-US" smtClean="0"/>
-              <a:t>2026/4/13</a:t>
+              <a:t>2026/4/14</a:t>
             </a:fld>
             <a:endParaRPr kumimoji="1" lang="ja-JP" altLang="en-US"/>
           </a:p>
@@ -2353,7 +2358,7 @@
           <a:p>
             <a:fld id="{14472033-EBEF-4113-884E-480E233F66C8}" type="datetimeFigureOut">
               <a:rPr kumimoji="1" lang="ja-JP" altLang="en-US" smtClean="0"/>
-              <a:t>2026/4/13</a:t>
+              <a:t>2026/4/14</a:t>
             </a:fld>
             <a:endParaRPr kumimoji="1" lang="ja-JP" altLang="en-US"/>
           </a:p>
@@ -2606,7 +2611,7 @@
           <a:p>
             <a:fld id="{14472033-EBEF-4113-884E-480E233F66C8}" type="datetimeFigureOut">
               <a:rPr kumimoji="1" lang="ja-JP" altLang="en-US" smtClean="0"/>
-              <a:t>2026/4/13</a:t>
+              <a:t>2026/4/14</a:t>
             </a:fld>
             <a:endParaRPr kumimoji="1" lang="ja-JP" altLang="en-US"/>
           </a:p>
@@ -2851,7 +2856,7 @@
           <a:p>
             <a:fld id="{14472033-EBEF-4113-884E-480E233F66C8}" type="datetimeFigureOut">
               <a:rPr kumimoji="1" lang="ja-JP" altLang="en-US" smtClean="0"/>
-              <a:t>2026/4/13</a:t>
+              <a:t>2026/4/14</a:t>
             </a:fld>
             <a:endParaRPr kumimoji="1" lang="ja-JP" altLang="en-US"/>
           </a:p>
@@ -3330,6 +3335,36 @@
           </a:p>
         </p:txBody>
       </p:sp>
+      <p:sp>
+        <p:nvSpPr>
+          <p:cNvPr id="4" name="テキスト ボックス 3"/>
+          <p:cNvSpPr txBox="1"/>
+          <p:nvPr/>
+        </p:nvSpPr>
+        <p:spPr>
+          <a:xfrm>
+            <a:off x="9144000" y="6132352"/>
+            <a:ext cx="2684477" cy="369332"/>
+          </a:xfrm>
+          <a:prstGeom prst="rect">
+            <a:avLst/>
+          </a:prstGeom>
+          <a:noFill/>
+        </p:spPr>
+        <p:txBody>
+          <a:bodyPr wrap="square" rtlCol="0">
+            <a:spAutoFit/>
+          </a:bodyPr>
+          <a:lstStyle/>
+          <a:p>
+            <a:r>
+              <a:rPr lang="ja-JP" altLang="en-US" dirty="0" smtClean="0"/>
+              <a:t>河野　拓実</a:t>
+            </a:r>
+            <a:endParaRPr kumimoji="1" lang="ja-JP" altLang="en-US" dirty="0"/>
+          </a:p>
+        </p:txBody>
+      </p:sp>
     </p:spTree>
     <p:extLst>
       <p:ext uri="{BB962C8B-B14F-4D97-AF65-F5344CB8AC3E}">
@@ -3340,6 +3375,13 @@
   <p:clrMapOvr>
     <a:masterClrMapping/>
   </p:clrMapOvr>
+  <p:timing>
+    <p:tnLst>
+      <p:par>
+        <p:cTn id="1" dur="indefinite" restart="never" nodeType="tmRoot"/>
+      </p:par>
+    </p:tnLst>
+  </p:timing>
 </p:sld>
 </file>
 
@@ -3453,6 +3495,13 @@
   <p:clrMapOvr>
     <a:masterClrMapping/>
   </p:clrMapOvr>
+  <p:timing>
+    <p:tnLst>
+      <p:par>
+        <p:cTn id="1" dur="indefinite" restart="never" nodeType="tmRoot"/>
+      </p:par>
+    </p:tnLst>
+  </p:timing>
 </p:sld>
 </file>
 
@@ -3704,11 +3753,11 @@
               <a:t>最大個数　</a:t>
             </a:r>
             <a:r>
-              <a:rPr lang="en-US" altLang="ja-JP" sz="2800" dirty="0" smtClean="0"/>
-              <a:t>25</a:t>
-            </a:r>
-            <a:r>
-              <a:rPr lang="ja-JP" altLang="en-US" sz="2800" dirty="0" smtClean="0"/>
+              <a:rPr lang="en-US" altLang="ja-JP" sz="2800" smtClean="0"/>
+              <a:t>10</a:t>
+            </a:r>
+            <a:r>
+              <a:rPr lang="ja-JP" altLang="en-US" sz="2800" smtClean="0"/>
               <a:t>個</a:t>
             </a:r>
             <a:endParaRPr lang="en-US" altLang="ja-JP" sz="2800" dirty="0" smtClean="0"/>
@@ -3791,7 +3840,7 @@
         <p:spPr/>
         <p:txBody>
           <a:bodyPr>
-            <a:normAutofit lnSpcReduction="10000"/>
+            <a:normAutofit fontScale="92500" lnSpcReduction="10000"/>
           </a:bodyPr>
           <a:lstStyle/>
           <a:p>
@@ -3832,7 +3881,22 @@
           <a:p>
             <a:r>
               <a:rPr lang="ja-JP" altLang="en-US" dirty="0" smtClean="0"/>
-              <a:t>作物追加　ナス、トマト</a:t>
+              <a:t>作物追加　ナス、</a:t>
+            </a:r>
+            <a:r>
+              <a:rPr lang="ja-JP" altLang="en-US" dirty="0" smtClean="0"/>
+              <a:t>トマト</a:t>
+            </a:r>
+            <a:endParaRPr lang="en-US" altLang="ja-JP" dirty="0" smtClean="0"/>
+          </a:p>
+          <a:p>
+            <a:r>
+              <a:rPr lang="ja-JP" altLang="en-US" dirty="0" smtClean="0"/>
+              <a:t>制限時間</a:t>
+            </a:r>
+            <a:r>
+              <a:rPr lang="en-US" altLang="ja-JP" dirty="0" smtClean="0"/>
+              <a:t>+1/s</a:t>
             </a:r>
             <a:endParaRPr lang="en-US" altLang="ja-JP" dirty="0" smtClean="0"/>
           </a:p>
@@ -3858,7 +3922,7 @@
             </a:r>
             <a:r>
               <a:rPr lang="en-US" altLang="ja-JP" dirty="0" smtClean="0"/>
-              <a:t>+10</a:t>
+              <a:t>+5</a:t>
             </a:r>
             <a:r>
               <a:rPr lang="ja-JP" altLang="en-US" dirty="0" smtClean="0"/>

--- a/FarmLife_企画.pptx
+++ b/FarmLife_企画.pptx
@@ -3562,26 +3562,43 @@
           <a:p>
             <a:r>
               <a:rPr lang="ja-JP" altLang="en-US" dirty="0" smtClean="0"/>
-              <a:t>採取パートと強化パートがある</a:t>
+              <a:t>採取パートと強化パートが</a:t>
+            </a:r>
+            <a:r>
+              <a:rPr lang="ja-JP" altLang="en-US" dirty="0" smtClean="0"/>
+              <a:t>ある</a:t>
+            </a:r>
+            <a:endParaRPr lang="en-US" altLang="ja-JP" dirty="0"/>
+          </a:p>
+          <a:p>
+            <a:r>
+              <a:rPr lang="ja-JP" altLang="en-US" dirty="0"/>
+              <a:t>お金</a:t>
+            </a:r>
+            <a:r>
+              <a:rPr lang="ja-JP" altLang="en-US" dirty="0" smtClean="0"/>
+              <a:t>を</a:t>
+            </a:r>
+            <a:r>
+              <a:rPr lang="ja-JP" altLang="en-US" dirty="0" smtClean="0"/>
+              <a:t>得るための</a:t>
+            </a:r>
+            <a:r>
+              <a:rPr lang="ja-JP" altLang="en-US" dirty="0" smtClean="0"/>
+              <a:t>畑</a:t>
+            </a:r>
+            <a:r>
+              <a:rPr lang="ja-JP" altLang="en-US" dirty="0" smtClean="0"/>
+              <a:t>と強化をするための小屋がマップにある</a:t>
             </a:r>
             <a:endParaRPr lang="en-US" altLang="ja-JP" dirty="0" smtClean="0"/>
           </a:p>
           <a:p>
             <a:r>
-              <a:rPr lang="ja-JP" altLang="en-US" dirty="0" smtClean="0"/>
-              <a:t>作物を殴ることで採取し、</a:t>
-            </a:r>
-            <a:endParaRPr lang="en-US" altLang="ja-JP" dirty="0" smtClean="0"/>
-          </a:p>
-          <a:p>
+              <a:rPr kumimoji="1" lang="ja-JP" altLang="en-US" dirty="0" smtClean="0"/>
+              <a:t>強化パートでパークを購入して自分を強化していく。</a:t>
+            </a:r>
             <a:endParaRPr lang="en-US" altLang="ja-JP" dirty="0"/>
-          </a:p>
-          <a:p>
-            <a:r>
-              <a:rPr lang="ja-JP" altLang="en-US" dirty="0" smtClean="0"/>
-              <a:t>採取をするための畑と強化をするための小屋がマップにある</a:t>
-            </a:r>
-            <a:endParaRPr lang="en-US" altLang="ja-JP" dirty="0" smtClean="0"/>
           </a:p>
           <a:p>
             <a:endParaRPr kumimoji="1" lang="en-US" altLang="ja-JP" dirty="0"/>
@@ -3680,8 +3697,31 @@
             </a:r>
             <a:r>
               <a:rPr lang="ja-JP" altLang="en-US" dirty="0" smtClean="0"/>
-              <a:t>のグリッドがあり、各グリッドにランダムな場所に作物が生成される。</a:t>
-            </a:r>
+              <a:t>の</a:t>
+            </a:r>
+            <a:r>
+              <a:rPr lang="ja-JP" altLang="en-US" dirty="0" smtClean="0"/>
+              <a:t>グリッドの畑があり</a:t>
+            </a:r>
+            <a:r>
+              <a:rPr lang="ja-JP" altLang="en-US" dirty="0" smtClean="0"/>
+              <a:t>、</a:t>
+            </a:r>
+            <a:r>
+              <a:rPr lang="ja-JP" altLang="en-US" dirty="0" smtClean="0"/>
+              <a:t>各グリッドのランダム</a:t>
+            </a:r>
+            <a:r>
+              <a:rPr lang="ja-JP" altLang="en-US" dirty="0" smtClean="0"/>
+              <a:t>な場所に作物が生成される</a:t>
+            </a:r>
+            <a:r>
+              <a:rPr lang="ja-JP" altLang="en-US" dirty="0" smtClean="0"/>
+              <a:t>。</a:t>
+            </a:r>
+            <a:endParaRPr lang="en-US" altLang="ja-JP" dirty="0" smtClean="0"/>
+          </a:p>
+          <a:p>
             <a:endParaRPr lang="en-US" altLang="ja-JP" dirty="0" smtClean="0"/>
           </a:p>
           <a:p>
@@ -3724,7 +3764,15 @@
           <a:p>
             <a:r>
               <a:rPr kumimoji="1" lang="ja-JP" altLang="en-US" sz="2800" dirty="0" smtClean="0"/>
-              <a:t>初期の畑のステータス</a:t>
+              <a:t>初期の畑</a:t>
+            </a:r>
+            <a:r>
+              <a:rPr kumimoji="1" lang="ja-JP" altLang="en-US" sz="2800" smtClean="0"/>
+              <a:t>の</a:t>
+            </a:r>
+            <a:r>
+              <a:rPr kumimoji="1" lang="ja-JP" altLang="en-US" sz="2800" smtClean="0"/>
+              <a:t>ステータス（仮）</a:t>
             </a:r>
             <a:endParaRPr kumimoji="1" lang="en-US" altLang="ja-JP" sz="2800" dirty="0" smtClean="0"/>
           </a:p>
@@ -3753,11 +3801,11 @@
               <a:t>最大個数　</a:t>
             </a:r>
             <a:r>
-              <a:rPr lang="en-US" altLang="ja-JP" sz="2800" smtClean="0"/>
+              <a:rPr lang="en-US" altLang="ja-JP" sz="2800" dirty="0" smtClean="0"/>
               <a:t>10</a:t>
             </a:r>
             <a:r>
-              <a:rPr lang="ja-JP" altLang="en-US" sz="2800" smtClean="0"/>
+              <a:rPr lang="ja-JP" altLang="en-US" sz="2800" dirty="0" smtClean="0"/>
               <a:t>個</a:t>
             </a:r>
             <a:endParaRPr lang="en-US" altLang="ja-JP" sz="2800" dirty="0" smtClean="0"/>
@@ -3881,11 +3929,7 @@
           <a:p>
             <a:r>
               <a:rPr lang="ja-JP" altLang="en-US" dirty="0" smtClean="0"/>
-              <a:t>作物追加　ナス、</a:t>
-            </a:r>
-            <a:r>
-              <a:rPr lang="ja-JP" altLang="en-US" dirty="0" smtClean="0"/>
-              <a:t>トマト</a:t>
+              <a:t>作物追加　ナス、トマト</a:t>
             </a:r>
             <a:endParaRPr lang="en-US" altLang="ja-JP" dirty="0" smtClean="0"/>
           </a:p>
@@ -3898,7 +3942,6 @@
               <a:rPr lang="en-US" altLang="ja-JP" dirty="0" smtClean="0"/>
               <a:t>+1/s</a:t>
             </a:r>
-            <a:endParaRPr lang="en-US" altLang="ja-JP" dirty="0" smtClean="0"/>
           </a:p>
           <a:p>
             <a:r>

--- a/FarmLife_企画.pptx
+++ b/FarmLife_企画.pptx
@@ -247,7 +247,7 @@
           <a:p>
             <a:fld id="{14472033-EBEF-4113-884E-480E233F66C8}" type="datetimeFigureOut">
               <a:rPr kumimoji="1" lang="ja-JP" altLang="en-US" smtClean="0"/>
-              <a:t>2026/4/14</a:t>
+              <a:t>2026/4/15</a:t>
             </a:fld>
             <a:endParaRPr kumimoji="1" lang="ja-JP" altLang="en-US"/>
           </a:p>
@@ -449,7 +449,7 @@
           <a:p>
             <a:fld id="{14472033-EBEF-4113-884E-480E233F66C8}" type="datetimeFigureOut">
               <a:rPr kumimoji="1" lang="ja-JP" altLang="en-US" smtClean="0"/>
-              <a:t>2026/4/14</a:t>
+              <a:t>2026/4/15</a:t>
             </a:fld>
             <a:endParaRPr kumimoji="1" lang="ja-JP" altLang="en-US"/>
           </a:p>
@@ -661,7 +661,7 @@
           <a:p>
             <a:fld id="{14472033-EBEF-4113-884E-480E233F66C8}" type="datetimeFigureOut">
               <a:rPr kumimoji="1" lang="ja-JP" altLang="en-US" smtClean="0"/>
-              <a:t>2026/4/14</a:t>
+              <a:t>2026/4/15</a:t>
             </a:fld>
             <a:endParaRPr kumimoji="1" lang="ja-JP" altLang="en-US"/>
           </a:p>
@@ -863,7 +863,7 @@
           <a:p>
             <a:fld id="{14472033-EBEF-4113-884E-480E233F66C8}" type="datetimeFigureOut">
               <a:rPr kumimoji="1" lang="ja-JP" altLang="en-US" smtClean="0"/>
-              <a:t>2026/4/14</a:t>
+              <a:t>2026/4/15</a:t>
             </a:fld>
             <a:endParaRPr kumimoji="1" lang="ja-JP" altLang="en-US"/>
           </a:p>
@@ -1109,7 +1109,7 @@
           <a:p>
             <a:fld id="{14472033-EBEF-4113-884E-480E233F66C8}" type="datetimeFigureOut">
               <a:rPr kumimoji="1" lang="ja-JP" altLang="en-US" smtClean="0"/>
-              <a:t>2026/4/14</a:t>
+              <a:t>2026/4/15</a:t>
             </a:fld>
             <a:endParaRPr kumimoji="1" lang="ja-JP" altLang="en-US"/>
           </a:p>
@@ -1405,7 +1405,7 @@
           <a:p>
             <a:fld id="{14472033-EBEF-4113-884E-480E233F66C8}" type="datetimeFigureOut">
               <a:rPr kumimoji="1" lang="ja-JP" altLang="en-US" smtClean="0"/>
-              <a:t>2026/4/14</a:t>
+              <a:t>2026/4/15</a:t>
             </a:fld>
             <a:endParaRPr kumimoji="1" lang="ja-JP" altLang="en-US"/>
           </a:p>
@@ -1836,7 +1836,7 @@
           <a:p>
             <a:fld id="{14472033-EBEF-4113-884E-480E233F66C8}" type="datetimeFigureOut">
               <a:rPr kumimoji="1" lang="ja-JP" altLang="en-US" smtClean="0"/>
-              <a:t>2026/4/14</a:t>
+              <a:t>2026/4/15</a:t>
             </a:fld>
             <a:endParaRPr kumimoji="1" lang="ja-JP" altLang="en-US"/>
           </a:p>
@@ -1954,7 +1954,7 @@
           <a:p>
             <a:fld id="{14472033-EBEF-4113-884E-480E233F66C8}" type="datetimeFigureOut">
               <a:rPr kumimoji="1" lang="ja-JP" altLang="en-US" smtClean="0"/>
-              <a:t>2026/4/14</a:t>
+              <a:t>2026/4/15</a:t>
             </a:fld>
             <a:endParaRPr kumimoji="1" lang="ja-JP" altLang="en-US"/>
           </a:p>
@@ -2049,7 +2049,7 @@
           <a:p>
             <a:fld id="{14472033-EBEF-4113-884E-480E233F66C8}" type="datetimeFigureOut">
               <a:rPr kumimoji="1" lang="ja-JP" altLang="en-US" smtClean="0"/>
-              <a:t>2026/4/14</a:t>
+              <a:t>2026/4/15</a:t>
             </a:fld>
             <a:endParaRPr kumimoji="1" lang="ja-JP" altLang="en-US"/>
           </a:p>
@@ -2358,7 +2358,7 @@
           <a:p>
             <a:fld id="{14472033-EBEF-4113-884E-480E233F66C8}" type="datetimeFigureOut">
               <a:rPr kumimoji="1" lang="ja-JP" altLang="en-US" smtClean="0"/>
-              <a:t>2026/4/14</a:t>
+              <a:t>2026/4/15</a:t>
             </a:fld>
             <a:endParaRPr kumimoji="1" lang="ja-JP" altLang="en-US"/>
           </a:p>
@@ -2611,7 +2611,7 @@
           <a:p>
             <a:fld id="{14472033-EBEF-4113-884E-480E233F66C8}" type="datetimeFigureOut">
               <a:rPr kumimoji="1" lang="ja-JP" altLang="en-US" smtClean="0"/>
-              <a:t>2026/4/14</a:t>
+              <a:t>2026/4/15</a:t>
             </a:fld>
             <a:endParaRPr kumimoji="1" lang="ja-JP" altLang="en-US"/>
           </a:p>
@@ -2856,7 +2856,7 @@
           <a:p>
             <a:fld id="{14472033-EBEF-4113-884E-480E233F66C8}" type="datetimeFigureOut">
               <a:rPr kumimoji="1" lang="ja-JP" altLang="en-US" smtClean="0"/>
-              <a:t>2026/4/14</a:t>
+              <a:t>2026/4/15</a:t>
             </a:fld>
             <a:endParaRPr kumimoji="1" lang="ja-JP" altLang="en-US"/>
           </a:p>
@@ -3562,11 +3562,7 @@
           <a:p>
             <a:r>
               <a:rPr lang="ja-JP" altLang="en-US" dirty="0" smtClean="0"/>
-              <a:t>採取パートと強化パートが</a:t>
-            </a:r>
-            <a:r>
-              <a:rPr lang="ja-JP" altLang="en-US" dirty="0" smtClean="0"/>
-              <a:t>ある</a:t>
+              <a:t>採取パートと強化パートがある</a:t>
             </a:r>
             <a:endParaRPr lang="en-US" altLang="ja-JP" dirty="0"/>
           </a:p>
@@ -3577,19 +3573,7 @@
             </a:r>
             <a:r>
               <a:rPr lang="ja-JP" altLang="en-US" dirty="0" smtClean="0"/>
-              <a:t>を</a:t>
-            </a:r>
-            <a:r>
-              <a:rPr lang="ja-JP" altLang="en-US" dirty="0" smtClean="0"/>
-              <a:t>得るための</a:t>
-            </a:r>
-            <a:r>
-              <a:rPr lang="ja-JP" altLang="en-US" dirty="0" smtClean="0"/>
-              <a:t>畑</a:t>
-            </a:r>
-            <a:r>
-              <a:rPr lang="ja-JP" altLang="en-US" dirty="0" smtClean="0"/>
-              <a:t>と強化をするための小屋がマップにある</a:t>
+              <a:t>を得るための畑と強化をするための小屋がマップにある</a:t>
             </a:r>
             <a:endParaRPr lang="en-US" altLang="ja-JP" dirty="0" smtClean="0"/>
           </a:p>
@@ -3692,24 +3676,8 @@
           <a:lstStyle/>
           <a:p>
             <a:r>
-              <a:rPr lang="en-US" altLang="ja-JP" dirty="0" smtClean="0"/>
-              <a:t>10×10</a:t>
-            </a:r>
-            <a:r>
               <a:rPr lang="ja-JP" altLang="en-US" dirty="0" smtClean="0"/>
-              <a:t>の</a:t>
-            </a:r>
-            <a:r>
-              <a:rPr lang="ja-JP" altLang="en-US" dirty="0" smtClean="0"/>
-              <a:t>グリッドの畑があり</a:t>
-            </a:r>
-            <a:r>
-              <a:rPr lang="ja-JP" altLang="en-US" dirty="0" smtClean="0"/>
-              <a:t>、</a:t>
-            </a:r>
-            <a:r>
-              <a:rPr lang="ja-JP" altLang="en-US" dirty="0" smtClean="0"/>
-              <a:t>各グリッドのランダム</a:t>
+              <a:t>畑の中のランダム</a:t>
             </a:r>
             <a:r>
               <a:rPr lang="ja-JP" altLang="en-US" dirty="0" smtClean="0"/>
@@ -3719,9 +3687,6 @@
               <a:rPr lang="ja-JP" altLang="en-US" dirty="0" smtClean="0"/>
               <a:t>。</a:t>
             </a:r>
-            <a:endParaRPr lang="en-US" altLang="ja-JP" dirty="0" smtClean="0"/>
-          </a:p>
-          <a:p>
             <a:endParaRPr lang="en-US" altLang="ja-JP" dirty="0" smtClean="0"/>
           </a:p>
           <a:p>
@@ -3748,7 +3713,7 @@
         </p:nvSpPr>
         <p:spPr>
           <a:xfrm>
-            <a:off x="838200" y="4412343"/>
+            <a:off x="838200" y="3858670"/>
             <a:ext cx="4982029" cy="2246769"/>
           </a:xfrm>
           <a:prstGeom prst="rect">
@@ -3764,15 +3729,7 @@
           <a:p>
             <a:r>
               <a:rPr kumimoji="1" lang="ja-JP" altLang="en-US" sz="2800" dirty="0" smtClean="0"/>
-              <a:t>初期の畑</a:t>
-            </a:r>
-            <a:r>
-              <a:rPr kumimoji="1" lang="ja-JP" altLang="en-US" sz="2800" smtClean="0"/>
-              <a:t>の</a:t>
-            </a:r>
-            <a:r>
-              <a:rPr kumimoji="1" lang="ja-JP" altLang="en-US" sz="2800" smtClean="0"/>
-              <a:t>ステータス（仮）</a:t>
+              <a:t>初期の畑のステータス（仮）</a:t>
             </a:r>
             <a:endParaRPr kumimoji="1" lang="en-US" altLang="ja-JP" sz="2800" dirty="0" smtClean="0"/>
           </a:p>

--- a/FarmLife_企画.pptx
+++ b/FarmLife_企画.pptx
@@ -9,7 +9,9 @@
     <p:sldId id="257" r:id="rId3"/>
     <p:sldId id="258" r:id="rId4"/>
     <p:sldId id="259" r:id="rId5"/>
-    <p:sldId id="260" r:id="rId6"/>
+    <p:sldId id="262" r:id="rId6"/>
+    <p:sldId id="260" r:id="rId7"/>
+    <p:sldId id="261" r:id="rId8"/>
   </p:sldIdLst>
   <p:sldSz cx="12192000" cy="6858000"/>
   <p:notesSz cx="6858000" cy="9144000"/>
@@ -247,7 +249,7 @@
           <a:p>
             <a:fld id="{14472033-EBEF-4113-884E-480E233F66C8}" type="datetimeFigureOut">
               <a:rPr kumimoji="1" lang="ja-JP" altLang="en-US" smtClean="0"/>
-              <a:t>2026/4/15</a:t>
+              <a:t>2026/4/17</a:t>
             </a:fld>
             <a:endParaRPr kumimoji="1" lang="ja-JP" altLang="en-US"/>
           </a:p>
@@ -449,7 +451,7 @@
           <a:p>
             <a:fld id="{14472033-EBEF-4113-884E-480E233F66C8}" type="datetimeFigureOut">
               <a:rPr kumimoji="1" lang="ja-JP" altLang="en-US" smtClean="0"/>
-              <a:t>2026/4/15</a:t>
+              <a:t>2026/4/17</a:t>
             </a:fld>
             <a:endParaRPr kumimoji="1" lang="ja-JP" altLang="en-US"/>
           </a:p>
@@ -661,7 +663,7 @@
           <a:p>
             <a:fld id="{14472033-EBEF-4113-884E-480E233F66C8}" type="datetimeFigureOut">
               <a:rPr kumimoji="1" lang="ja-JP" altLang="en-US" smtClean="0"/>
-              <a:t>2026/4/15</a:t>
+              <a:t>2026/4/17</a:t>
             </a:fld>
             <a:endParaRPr kumimoji="1" lang="ja-JP" altLang="en-US"/>
           </a:p>
@@ -863,7 +865,7 @@
           <a:p>
             <a:fld id="{14472033-EBEF-4113-884E-480E233F66C8}" type="datetimeFigureOut">
               <a:rPr kumimoji="1" lang="ja-JP" altLang="en-US" smtClean="0"/>
-              <a:t>2026/4/15</a:t>
+              <a:t>2026/4/17</a:t>
             </a:fld>
             <a:endParaRPr kumimoji="1" lang="ja-JP" altLang="en-US"/>
           </a:p>
@@ -1109,7 +1111,7 @@
           <a:p>
             <a:fld id="{14472033-EBEF-4113-884E-480E233F66C8}" type="datetimeFigureOut">
               <a:rPr kumimoji="1" lang="ja-JP" altLang="en-US" smtClean="0"/>
-              <a:t>2026/4/15</a:t>
+              <a:t>2026/4/17</a:t>
             </a:fld>
             <a:endParaRPr kumimoji="1" lang="ja-JP" altLang="en-US"/>
           </a:p>
@@ -1405,7 +1407,7 @@
           <a:p>
             <a:fld id="{14472033-EBEF-4113-884E-480E233F66C8}" type="datetimeFigureOut">
               <a:rPr kumimoji="1" lang="ja-JP" altLang="en-US" smtClean="0"/>
-              <a:t>2026/4/15</a:t>
+              <a:t>2026/4/17</a:t>
             </a:fld>
             <a:endParaRPr kumimoji="1" lang="ja-JP" altLang="en-US"/>
           </a:p>
@@ -1836,7 +1838,7 @@
           <a:p>
             <a:fld id="{14472033-EBEF-4113-884E-480E233F66C8}" type="datetimeFigureOut">
               <a:rPr kumimoji="1" lang="ja-JP" altLang="en-US" smtClean="0"/>
-              <a:t>2026/4/15</a:t>
+              <a:t>2026/4/17</a:t>
             </a:fld>
             <a:endParaRPr kumimoji="1" lang="ja-JP" altLang="en-US"/>
           </a:p>
@@ -1954,7 +1956,7 @@
           <a:p>
             <a:fld id="{14472033-EBEF-4113-884E-480E233F66C8}" type="datetimeFigureOut">
               <a:rPr kumimoji="1" lang="ja-JP" altLang="en-US" smtClean="0"/>
-              <a:t>2026/4/15</a:t>
+              <a:t>2026/4/17</a:t>
             </a:fld>
             <a:endParaRPr kumimoji="1" lang="ja-JP" altLang="en-US"/>
           </a:p>
@@ -2049,7 +2051,7 @@
           <a:p>
             <a:fld id="{14472033-EBEF-4113-884E-480E233F66C8}" type="datetimeFigureOut">
               <a:rPr kumimoji="1" lang="ja-JP" altLang="en-US" smtClean="0"/>
-              <a:t>2026/4/15</a:t>
+              <a:t>2026/4/17</a:t>
             </a:fld>
             <a:endParaRPr kumimoji="1" lang="ja-JP" altLang="en-US"/>
           </a:p>
@@ -2358,7 +2360,7 @@
           <a:p>
             <a:fld id="{14472033-EBEF-4113-884E-480E233F66C8}" type="datetimeFigureOut">
               <a:rPr kumimoji="1" lang="ja-JP" altLang="en-US" smtClean="0"/>
-              <a:t>2026/4/15</a:t>
+              <a:t>2026/4/17</a:t>
             </a:fld>
             <a:endParaRPr kumimoji="1" lang="ja-JP" altLang="en-US"/>
           </a:p>
@@ -2611,7 +2613,7 @@
           <a:p>
             <a:fld id="{14472033-EBEF-4113-884E-480E233F66C8}" type="datetimeFigureOut">
               <a:rPr kumimoji="1" lang="ja-JP" altLang="en-US" smtClean="0"/>
-              <a:t>2026/4/15</a:t>
+              <a:t>2026/4/17</a:t>
             </a:fld>
             <a:endParaRPr kumimoji="1" lang="ja-JP" altLang="en-US"/>
           </a:p>
@@ -2856,7 +2858,7 @@
           <a:p>
             <a:fld id="{14472033-EBEF-4113-884E-480E233F66C8}" type="datetimeFigureOut">
               <a:rPr kumimoji="1" lang="ja-JP" altLang="en-US" smtClean="0"/>
-              <a:t>2026/4/15</a:t>
+              <a:t>2026/4/17</a:t>
             </a:fld>
             <a:endParaRPr kumimoji="1" lang="ja-JP" altLang="en-US"/>
           </a:p>
@@ -3435,14 +3437,29 @@
             <p:ph idx="1"/>
           </p:nvPr>
         </p:nvSpPr>
-        <p:spPr/>
-        <p:txBody>
-          <a:bodyPr/>
+        <p:spPr>
+          <a:xfrm>
+            <a:off x="838200" y="1526796"/>
+            <a:ext cx="10515600" cy="4666945"/>
+          </a:xfrm>
+        </p:spPr>
+        <p:txBody>
+          <a:bodyPr>
+            <a:normAutofit fontScale="92500" lnSpcReduction="20000"/>
+          </a:bodyPr>
           <a:lstStyle/>
           <a:p>
             <a:r>
               <a:rPr kumimoji="1" lang="ja-JP" altLang="en-US" dirty="0" smtClean="0"/>
-              <a:t>畑に生成される作物を制限時間内に多く採取し、得たお金で強化することでより稼ぎやすくする</a:t>
+              <a:t>畑に生成される作物を制限時間内に多く採取し、得たお金</a:t>
+            </a:r>
+            <a:r>
+              <a:rPr kumimoji="1" lang="ja-JP" altLang="en-US" dirty="0" smtClean="0"/>
+              <a:t>で自身を強化</a:t>
+            </a:r>
+            <a:r>
+              <a:rPr kumimoji="1" lang="ja-JP" altLang="en-US" dirty="0" smtClean="0"/>
+              <a:t>することでより稼ぎやすくする</a:t>
             </a:r>
             <a:r>
               <a:rPr lang="ja-JP" altLang="en-US" dirty="0" smtClean="0"/>
@@ -3451,18 +3468,39 @@
             <a:endParaRPr lang="en-US" altLang="ja-JP" dirty="0" smtClean="0"/>
           </a:p>
           <a:p>
-            <a:r>
-              <a:rPr kumimoji="1" lang="ja-JP" altLang="en-US" dirty="0" smtClean="0"/>
-              <a:t>ゲームのクリアは</a:t>
-            </a:r>
-            <a:r>
-              <a:rPr kumimoji="1" lang="en-US" altLang="ja-JP" dirty="0" smtClean="0"/>
+            <a:endParaRPr lang="en-US" altLang="ja-JP" dirty="0"/>
+          </a:p>
+          <a:p>
+            <a:r>
+              <a:rPr lang="ja-JP" altLang="en-US" dirty="0"/>
+              <a:t>クリア目標</a:t>
+            </a:r>
+            <a:endParaRPr lang="en-US" altLang="ja-JP" dirty="0"/>
+          </a:p>
+          <a:p>
+            <a:r>
+              <a:rPr lang="en-US" altLang="ja-JP" dirty="0"/>
               <a:t>10000</a:t>
             </a:r>
             <a:r>
-              <a:rPr lang="ja-JP" altLang="en-US" dirty="0" smtClean="0"/>
-              <a:t>ゴールド稼ぐこと。</a:t>
-            </a:r>
+              <a:rPr lang="ja-JP" altLang="en-US" dirty="0"/>
+              <a:t>ゴールド稼ぎ</a:t>
+            </a:r>
+            <a:r>
+              <a:rPr lang="ja-JP" altLang="en-US" dirty="0" smtClean="0"/>
+              <a:t>、家を完全修理と</a:t>
+            </a:r>
+            <a:r>
+              <a:rPr lang="ja-JP" altLang="en-US" dirty="0"/>
+              <a:t>いうパークを取得することで</a:t>
+            </a:r>
+            <a:r>
+              <a:rPr lang="ja-JP" altLang="en-US" dirty="0" smtClean="0"/>
+              <a:t>クリア、クリア時点の経過時間、採取した作物の数でスコアが決まりランク付けされる。</a:t>
+            </a:r>
+            <a:endParaRPr lang="en-US" altLang="ja-JP" dirty="0"/>
+          </a:p>
+          <a:p>
             <a:endParaRPr kumimoji="1" lang="en-US" altLang="ja-JP" dirty="0"/>
           </a:p>
           <a:p>
@@ -3479,7 +3517,22 @@
             </a:r>
             <a:r>
               <a:rPr lang="ja-JP" altLang="en-US" dirty="0" smtClean="0"/>
-              <a:t>動き方によってどのくらい稼げるのか変わってくるところ。</a:t>
+              <a:t>動き方によってどのくらい早く稼げるのか変わってくるところ</a:t>
+            </a:r>
+            <a:r>
+              <a:rPr lang="ja-JP" altLang="en-US" dirty="0" smtClean="0"/>
+              <a:t>。</a:t>
+            </a:r>
+            <a:endParaRPr lang="en-US" altLang="ja-JP" dirty="0" smtClean="0"/>
+          </a:p>
+          <a:p>
+            <a:r>
+              <a:rPr kumimoji="1" lang="ja-JP" altLang="en-US" dirty="0" smtClean="0"/>
+              <a:t>採取するための鍬に耐久力があり、持っている鍬によって採取できる作物が</a:t>
+            </a:r>
+            <a:r>
+              <a:rPr kumimoji="1" lang="ja-JP" altLang="en-US" smtClean="0"/>
+              <a:t>変わる。</a:t>
             </a:r>
             <a:endParaRPr kumimoji="1" lang="en-US" altLang="ja-JP" dirty="0" smtClean="0"/>
           </a:p>
@@ -3555,14 +3608,37 @@
             <p:ph idx="1"/>
           </p:nvPr>
         </p:nvSpPr>
-        <p:spPr/>
-        <p:txBody>
-          <a:bodyPr/>
-          <a:lstStyle/>
-          <a:p>
-            <a:r>
-              <a:rPr lang="ja-JP" altLang="en-US" dirty="0" smtClean="0"/>
-              <a:t>採取パートと強化パートがある</a:t>
+        <p:spPr>
+          <a:xfrm>
+            <a:off x="838200" y="1490065"/>
+            <a:ext cx="10515600" cy="3383940"/>
+          </a:xfrm>
+        </p:spPr>
+        <p:txBody>
+          <a:bodyPr>
+            <a:normAutofit/>
+          </a:bodyPr>
+          <a:lstStyle/>
+          <a:p>
+            <a:r>
+              <a:rPr lang="ja-JP" altLang="en-US" dirty="0" smtClean="0"/>
+              <a:t>採取パート</a:t>
+            </a:r>
+            <a:r>
+              <a:rPr lang="ja-JP" altLang="en-US" dirty="0" smtClean="0"/>
+              <a:t>と</a:t>
+            </a:r>
+            <a:r>
+              <a:rPr lang="ja-JP" altLang="en-US" dirty="0"/>
+              <a:t>購入</a:t>
+            </a:r>
+            <a:r>
+              <a:rPr lang="ja-JP" altLang="en-US" dirty="0" smtClean="0"/>
+              <a:t>パート</a:t>
+            </a:r>
+            <a:r>
+              <a:rPr lang="ja-JP" altLang="en-US" dirty="0" smtClean="0"/>
+              <a:t>がある</a:t>
             </a:r>
             <a:endParaRPr lang="en-US" altLang="ja-JP" dirty="0"/>
           </a:p>
@@ -3573,37 +3649,77 @@
             </a:r>
             <a:r>
               <a:rPr lang="ja-JP" altLang="en-US" dirty="0" smtClean="0"/>
-              <a:t>を得るための畑と強化をするための小屋がマップにある</a:t>
+              <a:t>を得るための畑</a:t>
+            </a:r>
+            <a:r>
+              <a:rPr lang="ja-JP" altLang="en-US" dirty="0" smtClean="0"/>
+              <a:t>とパーク、鍬を買うための</a:t>
+            </a:r>
+            <a:r>
+              <a:rPr lang="ja-JP" altLang="en-US" dirty="0"/>
+              <a:t>店</a:t>
+            </a:r>
+            <a:r>
+              <a:rPr lang="ja-JP" altLang="en-US" dirty="0" smtClean="0"/>
+              <a:t>がマップ内に</a:t>
+            </a:r>
+            <a:r>
+              <a:rPr lang="ja-JP" altLang="en-US" dirty="0" smtClean="0"/>
+              <a:t>ある</a:t>
             </a:r>
             <a:endParaRPr lang="en-US" altLang="ja-JP" dirty="0" smtClean="0"/>
           </a:p>
           <a:p>
             <a:r>
+              <a:rPr lang="ja-JP" altLang="en-US" dirty="0"/>
+              <a:t>購入</a:t>
+            </a:r>
+            <a:r>
               <a:rPr kumimoji="1" lang="ja-JP" altLang="en-US" dirty="0" smtClean="0"/>
-              <a:t>強化パートでパークを購入して自分を強化していく。</a:t>
+              <a:t>パート</a:t>
+            </a:r>
+            <a:r>
+              <a:rPr kumimoji="1" lang="ja-JP" altLang="en-US" dirty="0" smtClean="0"/>
+              <a:t>でパークを購入して自分を強化していく</a:t>
+            </a:r>
+            <a:r>
+              <a:rPr kumimoji="1" lang="ja-JP" altLang="en-US" dirty="0" smtClean="0"/>
+              <a:t>。</a:t>
+            </a:r>
+            <a:endParaRPr kumimoji="1" lang="en-US" altLang="ja-JP" dirty="0" smtClean="0"/>
+          </a:p>
+          <a:p>
+            <a:r>
+              <a:rPr lang="ja-JP" altLang="en-US" dirty="0" smtClean="0"/>
+              <a:t>採取する鍬の耐久値がなくなったらお金を消費して新しく買わなければならない</a:t>
             </a:r>
             <a:endParaRPr lang="en-US" altLang="ja-JP" dirty="0"/>
           </a:p>
           <a:p>
+            <a:r>
+              <a:rPr lang="ja-JP" altLang="en-US" dirty="0" smtClean="0"/>
+              <a:t>鍬がない状態で</a:t>
+            </a:r>
+            <a:r>
+              <a:rPr lang="ja-JP" altLang="en-US" dirty="0"/>
+              <a:t>新しい</a:t>
+            </a:r>
+            <a:r>
+              <a:rPr lang="ja-JP" altLang="en-US" dirty="0" smtClean="0"/>
+              <a:t>鍬</a:t>
+            </a:r>
+            <a:r>
+              <a:rPr lang="ja-JP" altLang="en-US" dirty="0"/>
+              <a:t>が買えない場合ゲームオーバーになる</a:t>
+            </a:r>
+            <a:r>
+              <a:rPr lang="ja-JP" altLang="en-US" dirty="0" smtClean="0"/>
+              <a:t>。</a:t>
+            </a:r>
+            <a:endParaRPr kumimoji="1" lang="en-US" altLang="ja-JP" dirty="0" smtClean="0"/>
+          </a:p>
+          <a:p>
             <a:endParaRPr kumimoji="1" lang="en-US" altLang="ja-JP" dirty="0"/>
-          </a:p>
-          <a:p>
-            <a:r>
-              <a:rPr kumimoji="1" lang="ja-JP" altLang="en-US" dirty="0" smtClean="0"/>
-              <a:t>クリア目標</a:t>
-            </a:r>
-            <a:endParaRPr kumimoji="1" lang="en-US" altLang="ja-JP" dirty="0" smtClean="0"/>
-          </a:p>
-          <a:p>
-            <a:r>
-              <a:rPr lang="en-US" altLang="ja-JP" dirty="0" smtClean="0"/>
-              <a:t>10000</a:t>
-            </a:r>
-            <a:r>
-              <a:rPr lang="ja-JP" altLang="en-US" dirty="0" smtClean="0"/>
-              <a:t>ゴールド稼ぎ、家を買うというパークを取得することでクリア</a:t>
-            </a:r>
-            <a:endParaRPr lang="en-US" altLang="ja-JP" dirty="0" smtClean="0"/>
           </a:p>
         </p:txBody>
       </p:sp>
@@ -3670,18 +3786,26 @@
             <p:ph idx="1"/>
           </p:nvPr>
         </p:nvSpPr>
-        <p:spPr/>
-        <p:txBody>
-          <a:bodyPr/>
-          <a:lstStyle/>
-          <a:p>
-            <a:r>
-              <a:rPr lang="ja-JP" altLang="en-US" dirty="0" smtClean="0"/>
-              <a:t>畑の中のランダム</a:t>
-            </a:r>
-            <a:r>
-              <a:rPr lang="ja-JP" altLang="en-US" dirty="0" smtClean="0"/>
-              <a:t>な場所に作物が生成される</a:t>
+        <p:spPr>
+          <a:xfrm>
+            <a:off x="838200" y="1540399"/>
+            <a:ext cx="10515600" cy="4351338"/>
+          </a:xfrm>
+        </p:spPr>
+        <p:txBody>
+          <a:bodyPr/>
+          <a:lstStyle/>
+          <a:p>
+            <a:r>
+              <a:rPr lang="ja-JP" altLang="en-US" dirty="0" smtClean="0"/>
+              <a:t>畑の中のランダムな場所に作物が生成される。</a:t>
+            </a:r>
+            <a:endParaRPr lang="en-US" altLang="ja-JP" dirty="0" smtClean="0"/>
+          </a:p>
+          <a:p>
+            <a:r>
+              <a:rPr lang="ja-JP" altLang="en-US" dirty="0" smtClean="0"/>
+              <a:t>作物を採取した時点でお金を入手することができる</a:t>
             </a:r>
             <a:r>
               <a:rPr lang="ja-JP" altLang="en-US" dirty="0" smtClean="0"/>
@@ -3692,14 +3816,26 @@
           <a:p>
             <a:r>
               <a:rPr lang="ja-JP" altLang="en-US" dirty="0" smtClean="0"/>
-              <a:t>作物を採取した時点でお金を入手することができる。</a:t>
+              <a:t>作物にも種類があり、通常の作物、</a:t>
+            </a:r>
+            <a:r>
+              <a:rPr lang="ja-JP" altLang="en-US" dirty="0" smtClean="0"/>
+              <a:t>悪い色の作物</a:t>
+            </a:r>
+            <a:r>
+              <a:rPr lang="ja-JP" altLang="en-US" dirty="0" smtClean="0"/>
+              <a:t>、爆発する作物など</a:t>
             </a:r>
             <a:endParaRPr lang="en-US" altLang="ja-JP" dirty="0" smtClean="0"/>
           </a:p>
           <a:p>
             <a:r>
               <a:rPr lang="ja-JP" altLang="en-US" dirty="0" smtClean="0"/>
-              <a:t>制限時間を過ぎると畑の目の前にテレポートする。</a:t>
+              <a:t>制限時間を過ぎると</a:t>
+            </a:r>
+            <a:r>
+              <a:rPr lang="ja-JP" altLang="en-US" dirty="0" smtClean="0"/>
+              <a:t>畑の作物がすべて消える。</a:t>
             </a:r>
             <a:endParaRPr kumimoji="1" lang="ja-JP" altLang="en-US" dirty="0"/>
           </a:p>
@@ -3713,8 +3849,8 @@
         </p:nvSpPr>
         <p:spPr>
           <a:xfrm>
-            <a:off x="838200" y="3858670"/>
-            <a:ext cx="4982029" cy="2246769"/>
+            <a:off x="745921" y="4294908"/>
+            <a:ext cx="11200002" cy="2246769"/>
           </a:xfrm>
           <a:prstGeom prst="rect">
             <a:avLst/>
@@ -3739,6 +3875,10 @@
               <a:t>・制限時間　</a:t>
             </a:r>
             <a:r>
+              <a:rPr lang="ja-JP" altLang="en-US" sz="2800" dirty="0" smtClean="0"/>
+              <a:t>  </a:t>
+            </a:r>
+            <a:r>
               <a:rPr lang="en-US" altLang="ja-JP" sz="2800" dirty="0" smtClean="0"/>
               <a:t>5</a:t>
             </a:r>
@@ -3770,12 +3910,76 @@
           <a:p>
             <a:r>
               <a:rPr lang="ja-JP" altLang="en-US" sz="2800" dirty="0" smtClean="0"/>
-              <a:t>・出現する作物　カブ</a:t>
+              <a:t>・出現する作物　</a:t>
+            </a:r>
+            <a:r>
+              <a:rPr lang="ja-JP" altLang="en-US" sz="2800" dirty="0" smtClean="0"/>
+              <a:t>　</a:t>
+            </a:r>
+            <a:r>
+              <a:rPr lang="ja-JP" altLang="en-US" sz="2800" dirty="0" smtClean="0"/>
+              <a:t>通常の</a:t>
+            </a:r>
+            <a:r>
+              <a:rPr lang="ja-JP" altLang="en-US" sz="2800" dirty="0" smtClean="0"/>
+              <a:t>カブ</a:t>
+            </a:r>
+            <a:r>
+              <a:rPr lang="en-US" altLang="ja-JP" sz="2800" dirty="0"/>
+              <a:t>(</a:t>
+            </a:r>
+            <a:r>
+              <a:rPr lang="ja-JP" altLang="en-US" sz="2800" dirty="0" smtClean="0"/>
+              <a:t>価値 </a:t>
+            </a:r>
+            <a:r>
+              <a:rPr lang="en-US" altLang="ja-JP" sz="2800" dirty="0" smtClean="0"/>
+              <a:t>:  2G,</a:t>
+            </a:r>
+            <a:r>
+              <a:rPr lang="ja-JP" altLang="en-US" sz="2800" dirty="0" smtClean="0"/>
+              <a:t>作物体力 </a:t>
+            </a:r>
+            <a:r>
+              <a:rPr lang="en-US" altLang="ja-JP" sz="2800" dirty="0" smtClean="0"/>
+              <a:t>: 3</a:t>
+            </a:r>
+            <a:r>
+              <a:rPr lang="en-US" altLang="ja-JP" sz="2800" dirty="0"/>
+              <a:t>)</a:t>
+            </a:r>
+            <a:endParaRPr lang="en-US" altLang="ja-JP" sz="2800" dirty="0" smtClean="0"/>
+          </a:p>
+          <a:p>
+            <a:r>
+              <a:rPr lang="ja-JP" altLang="en-US" sz="2800" dirty="0"/>
+              <a:t>　</a:t>
+            </a:r>
+            <a:r>
+              <a:rPr lang="ja-JP" altLang="en-US" sz="2800" dirty="0" smtClean="0"/>
+              <a:t>　　　　　　　悪い色のカブ</a:t>
+            </a:r>
+            <a:r>
+              <a:rPr lang="en-US" altLang="ja-JP" sz="2800" dirty="0" smtClean="0"/>
+              <a:t>(</a:t>
+            </a:r>
+            <a:r>
+              <a:rPr lang="ja-JP" altLang="en-US" sz="2800" dirty="0" smtClean="0"/>
+              <a:t>価値 </a:t>
+            </a:r>
+            <a:r>
+              <a:rPr lang="en-US" altLang="ja-JP" sz="2800" dirty="0" smtClean="0"/>
+              <a:t>: -1G,</a:t>
+            </a:r>
+            <a:r>
+              <a:rPr lang="ja-JP" altLang="en-US" sz="2800" dirty="0" smtClean="0"/>
+              <a:t>作物体力 </a:t>
+            </a:r>
+            <a:r>
+              <a:rPr lang="en-US" altLang="ja-JP" sz="2800" dirty="0" smtClean="0"/>
+              <a:t>: 2)</a:t>
             </a:r>
             <a:endParaRPr lang="en-US" altLang="ja-JP" sz="2800" dirty="0"/>
-          </a:p>
-          <a:p>
-            <a:endParaRPr kumimoji="1" lang="ja-JP" altLang="en-US" sz="2800" dirty="0"/>
           </a:p>
         </p:txBody>
       </p:sp>
@@ -3826,7 +4030,7 @@
           <a:p>
             <a:r>
               <a:rPr kumimoji="1" lang="ja-JP" altLang="en-US" dirty="0" smtClean="0"/>
-              <a:t>強化パート</a:t>
+              <a:t>作物の種類</a:t>
             </a:r>
             <a:endParaRPr kumimoji="1" lang="ja-JP" altLang="en-US" dirty="0"/>
           </a:p>
@@ -3842,20 +4046,140 @@
             <p:ph idx="1"/>
           </p:nvPr>
         </p:nvSpPr>
+        <p:spPr>
+          <a:xfrm>
+            <a:off x="838200" y="1825625"/>
+            <a:ext cx="10515600" cy="3308438"/>
+          </a:xfrm>
+        </p:spPr>
+        <p:txBody>
+          <a:bodyPr/>
+          <a:lstStyle/>
+          <a:p>
+            <a:r>
+              <a:rPr kumimoji="1" lang="ja-JP" altLang="en-US" dirty="0" smtClean="0"/>
+              <a:t>通常の作物・・・普通の作物で、どの鍬でも採取可能</a:t>
+            </a:r>
+            <a:endParaRPr kumimoji="1" lang="en-US" altLang="ja-JP" dirty="0" smtClean="0"/>
+          </a:p>
+          <a:p>
+            <a:endParaRPr lang="en-US" altLang="ja-JP" dirty="0"/>
+          </a:p>
+          <a:p>
+            <a:r>
+              <a:rPr lang="ja-JP" altLang="en-US" dirty="0"/>
+              <a:t>悪い色の</a:t>
+            </a:r>
+            <a:r>
+              <a:rPr lang="ja-JP" altLang="en-US" dirty="0" smtClean="0"/>
+              <a:t>作物・・・色の暗い作物で、黒い鍬以外ではお金が減る</a:t>
+            </a:r>
+            <a:endParaRPr kumimoji="1" lang="en-US" altLang="ja-JP" dirty="0"/>
+          </a:p>
+          <a:p>
+            <a:r>
+              <a:rPr kumimoji="1" lang="ja-JP" altLang="en-US" dirty="0" smtClean="0"/>
+              <a:t>爆発する作物・・・普通の作物に似ているが葉など一部の形状が違う、鋼の鍬でのみ安全に採取できる、それ以外では吹き飛ばされる</a:t>
+            </a:r>
+            <a:endParaRPr kumimoji="1" lang="en-US" altLang="ja-JP" dirty="0" smtClean="0"/>
+          </a:p>
+        </p:txBody>
+      </p:sp>
+    </p:spTree>
+    <p:extLst>
+      <p:ext uri="{BB962C8B-B14F-4D97-AF65-F5344CB8AC3E}">
+        <p14:creationId xmlns:p14="http://schemas.microsoft.com/office/powerpoint/2010/main" val="685127799"/>
+      </p:ext>
+    </p:extLst>
+  </p:cSld>
+  <p:clrMapOvr>
+    <a:masterClrMapping/>
+  </p:clrMapOvr>
+</p:sld>
+</file>
+
+<file path=ppt/slides/slide6.xml><?xml version="1.0" encoding="utf-8"?>
+<p:sld xmlns:a="http://schemas.openxmlformats.org/drawingml/2006/main" xmlns:r="http://schemas.openxmlformats.org/officeDocument/2006/relationships" xmlns:p="http://schemas.openxmlformats.org/presentationml/2006/main">
+  <p:cSld>
+    <p:spTree>
+      <p:nvGrpSpPr>
+        <p:cNvPr id="1" name=""/>
+        <p:cNvGrpSpPr/>
+        <p:nvPr/>
+      </p:nvGrpSpPr>
+      <p:grpSpPr>
+        <a:xfrm>
+          <a:off x="0" y="0"/>
+          <a:ext cx="0" cy="0"/>
+          <a:chOff x="0" y="0"/>
+          <a:chExt cx="0" cy="0"/>
+        </a:xfrm>
+      </p:grpSpPr>
+      <p:sp>
+        <p:nvSpPr>
+          <p:cNvPr id="2" name="タイトル 1"/>
+          <p:cNvSpPr>
+            <a:spLocks noGrp="1"/>
+          </p:cNvSpPr>
+          <p:nvPr>
+            <p:ph type="title"/>
+          </p:nvPr>
+        </p:nvSpPr>
         <p:spPr/>
         <p:txBody>
+          <a:bodyPr/>
+          <a:lstStyle/>
+          <a:p>
+            <a:r>
+              <a:rPr lang="ja-JP" altLang="en-US" dirty="0"/>
+              <a:t>購入</a:t>
+            </a:r>
+            <a:r>
+              <a:rPr kumimoji="1" lang="ja-JP" altLang="en-US" dirty="0" smtClean="0"/>
+              <a:t>パート</a:t>
+            </a:r>
+            <a:endParaRPr kumimoji="1" lang="ja-JP" altLang="en-US" dirty="0"/>
+          </a:p>
+        </p:txBody>
+      </p:sp>
+      <p:sp>
+        <p:nvSpPr>
+          <p:cNvPr id="3" name="コンテンツ プレースホルダー 2"/>
+          <p:cNvSpPr>
+            <a:spLocks noGrp="1"/>
+          </p:cNvSpPr>
+          <p:nvPr>
+            <p:ph idx="1"/>
+          </p:nvPr>
+        </p:nvSpPr>
+        <p:spPr>
+          <a:xfrm>
+            <a:off x="838200" y="1627465"/>
+            <a:ext cx="10515600" cy="2676088"/>
+          </a:xfrm>
+        </p:spPr>
+        <p:txBody>
           <a:bodyPr>
-            <a:normAutofit fontScale="92500" lnSpcReduction="10000"/>
+            <a:normAutofit/>
           </a:bodyPr>
           <a:lstStyle/>
           <a:p>
             <a:r>
               <a:rPr kumimoji="1" lang="ja-JP" altLang="en-US" dirty="0" smtClean="0"/>
-              <a:t>採取パートで得たお金を使ってパークを購入することができる</a:t>
-            </a:r>
-            <a:endParaRPr lang="en-US" altLang="ja-JP" dirty="0"/>
-          </a:p>
-          <a:p>
+              <a:t>採取パートで得たお金を使って</a:t>
+            </a:r>
+            <a:r>
+              <a:rPr kumimoji="1" lang="ja-JP" altLang="en-US" dirty="0" smtClean="0"/>
+              <a:t>パークや鍬を購入</a:t>
+            </a:r>
+            <a:r>
+              <a:rPr kumimoji="1" lang="ja-JP" altLang="en-US" dirty="0" smtClean="0"/>
+              <a:t>することが</a:t>
+            </a:r>
+            <a:r>
+              <a:rPr kumimoji="1" lang="ja-JP" altLang="en-US" dirty="0" smtClean="0"/>
+              <a:t>できる</a:t>
+            </a:r>
             <a:endParaRPr lang="en-US" altLang="ja-JP" dirty="0" smtClean="0"/>
           </a:p>
           <a:p>
@@ -3874,61 +4198,95 @@
             <a:endParaRPr lang="en-US" altLang="ja-JP" dirty="0" smtClean="0"/>
           </a:p>
           <a:p>
-            <a:endParaRPr lang="en-US" altLang="ja-JP" dirty="0"/>
-          </a:p>
-          <a:p>
-            <a:r>
-              <a:rPr lang="ja-JP" altLang="en-US" dirty="0" smtClean="0"/>
-              <a:t>例</a:t>
+            <a:r>
+              <a:rPr lang="ja-JP" altLang="en-US" dirty="0" smtClean="0"/>
+              <a:t>パークの取得にもお金を使用するので、鍬を買うためのお金と兼ね合いながら</a:t>
+            </a:r>
+            <a:r>
+              <a:rPr lang="ja-JP" altLang="en-US" dirty="0" smtClean="0"/>
+              <a:t>パークを開放しないといけない</a:t>
+            </a:r>
+            <a:r>
+              <a:rPr lang="ja-JP" altLang="en-US" dirty="0" smtClean="0"/>
+              <a:t>。</a:t>
             </a:r>
             <a:endParaRPr lang="en-US" altLang="ja-JP" dirty="0" smtClean="0"/>
           </a:p>
-          <a:p>
-            <a:r>
-              <a:rPr lang="ja-JP" altLang="en-US" dirty="0" smtClean="0"/>
-              <a:t>作物追加　ナス、トマト</a:t>
-            </a:r>
-            <a:endParaRPr lang="en-US" altLang="ja-JP" dirty="0" smtClean="0"/>
-          </a:p>
-          <a:p>
-            <a:r>
-              <a:rPr lang="ja-JP" altLang="en-US" dirty="0" smtClean="0"/>
+        </p:txBody>
+      </p:sp>
+      <p:sp>
+        <p:nvSpPr>
+          <p:cNvPr id="4" name="正方形/長方形 3"/>
+          <p:cNvSpPr/>
+          <p:nvPr/>
+        </p:nvSpPr>
+        <p:spPr>
+          <a:xfrm>
+            <a:off x="992697" y="4460413"/>
+            <a:ext cx="6096000" cy="1938992"/>
+          </a:xfrm>
+          <a:prstGeom prst="rect">
+            <a:avLst/>
+          </a:prstGeom>
+        </p:spPr>
+        <p:txBody>
+          <a:bodyPr>
+            <a:spAutoFit/>
+          </a:bodyPr>
+          <a:lstStyle/>
+          <a:p>
+            <a:r>
+              <a:rPr lang="ja-JP" altLang="en-US" sz="2400" dirty="0"/>
+              <a:t>パーク例</a:t>
+            </a:r>
+            <a:endParaRPr lang="en-US" altLang="ja-JP" sz="2400" dirty="0"/>
+          </a:p>
+          <a:p>
+            <a:r>
+              <a:rPr lang="ja-JP" altLang="en-US" sz="2400" dirty="0"/>
+              <a:t>作物追加　ナス、トマト、キノコなど</a:t>
+            </a:r>
+            <a:endParaRPr lang="en-US" altLang="ja-JP" sz="2400" dirty="0"/>
+          </a:p>
+          <a:p>
+            <a:r>
+              <a:rPr lang="ja-JP" altLang="en-US" sz="2400" dirty="0"/>
               <a:t>制限時間</a:t>
             </a:r>
             <a:r>
-              <a:rPr lang="en-US" altLang="ja-JP" dirty="0" smtClean="0"/>
+              <a:rPr lang="en-US" altLang="ja-JP" sz="2400" dirty="0"/>
               <a:t>+1/s</a:t>
             </a:r>
           </a:p>
           <a:p>
             <a:r>
-              <a:rPr lang="ja-JP" altLang="en-US" dirty="0" smtClean="0"/>
+              <a:rPr lang="ja-JP" altLang="en-US" sz="2400" dirty="0"/>
               <a:t>作物の価値</a:t>
             </a:r>
             <a:r>
-              <a:rPr lang="en-US" altLang="ja-JP" dirty="0" smtClean="0"/>
+              <a:rPr lang="en-US" altLang="ja-JP" sz="2400" dirty="0"/>
               <a:t>2</a:t>
             </a:r>
             <a:r>
-              <a:rPr lang="ja-JP" altLang="en-US" dirty="0" smtClean="0"/>
+              <a:rPr lang="ja-JP" altLang="en-US" sz="2400" dirty="0"/>
               <a:t>倍</a:t>
             </a:r>
-            <a:endParaRPr lang="en-US" altLang="ja-JP" dirty="0" smtClean="0"/>
-          </a:p>
-          <a:p>
-            <a:r>
-              <a:rPr lang="ja-JP" altLang="en-US" dirty="0" smtClean="0"/>
+            <a:endParaRPr lang="en-US" altLang="ja-JP" sz="2400" dirty="0"/>
+          </a:p>
+          <a:p>
+            <a:r>
+              <a:rPr lang="ja-JP" altLang="en-US" sz="2400" dirty="0"/>
               <a:t>最大出現数</a:t>
             </a:r>
             <a:r>
-              <a:rPr lang="en-US" altLang="ja-JP" dirty="0" smtClean="0"/>
+              <a:rPr lang="en-US" altLang="ja-JP" sz="2400" dirty="0"/>
               <a:t>+5</a:t>
             </a:r>
             <a:r>
-              <a:rPr lang="ja-JP" altLang="en-US" dirty="0" smtClean="0"/>
+              <a:rPr lang="ja-JP" altLang="en-US" sz="2400" dirty="0"/>
               <a:t>　　など</a:t>
             </a:r>
-            <a:endParaRPr lang="en-US" altLang="ja-JP" dirty="0" smtClean="0"/>
+            <a:endParaRPr lang="en-US" altLang="ja-JP" sz="2400" dirty="0"/>
           </a:p>
         </p:txBody>
       </p:sp>
@@ -3936,6 +4294,263 @@
     <p:extLst>
       <p:ext uri="{BB962C8B-B14F-4D97-AF65-F5344CB8AC3E}">
         <p14:creationId xmlns:p14="http://schemas.microsoft.com/office/powerpoint/2010/main" val="1600696718"/>
+      </p:ext>
+    </p:extLst>
+  </p:cSld>
+  <p:clrMapOvr>
+    <a:masterClrMapping/>
+  </p:clrMapOvr>
+</p:sld>
+</file>
+
+<file path=ppt/slides/slide7.xml><?xml version="1.0" encoding="utf-8"?>
+<p:sld xmlns:a="http://schemas.openxmlformats.org/drawingml/2006/main" xmlns:r="http://schemas.openxmlformats.org/officeDocument/2006/relationships" xmlns:p="http://schemas.openxmlformats.org/presentationml/2006/main">
+  <p:cSld>
+    <p:spTree>
+      <p:nvGrpSpPr>
+        <p:cNvPr id="1" name=""/>
+        <p:cNvGrpSpPr/>
+        <p:nvPr/>
+      </p:nvGrpSpPr>
+      <p:grpSpPr>
+        <a:xfrm>
+          <a:off x="0" y="0"/>
+          <a:ext cx="0" cy="0"/>
+          <a:chOff x="0" y="0"/>
+          <a:chExt cx="0" cy="0"/>
+        </a:xfrm>
+      </p:grpSpPr>
+      <p:sp>
+        <p:nvSpPr>
+          <p:cNvPr id="2" name="タイトル 1"/>
+          <p:cNvSpPr>
+            <a:spLocks noGrp="1"/>
+          </p:cNvSpPr>
+          <p:nvPr>
+            <p:ph type="title"/>
+          </p:nvPr>
+        </p:nvSpPr>
+        <p:spPr/>
+        <p:txBody>
+          <a:bodyPr/>
+          <a:lstStyle/>
+          <a:p>
+            <a:r>
+              <a:rPr lang="ja-JP" altLang="en-US" dirty="0" smtClean="0"/>
+              <a:t>鍬の種類（仮）</a:t>
+            </a:r>
+            <a:endParaRPr kumimoji="1" lang="ja-JP" altLang="en-US" dirty="0"/>
+          </a:p>
+        </p:txBody>
+      </p:sp>
+      <p:sp>
+        <p:nvSpPr>
+          <p:cNvPr id="3" name="コンテンツ プレースホルダー 2"/>
+          <p:cNvSpPr>
+            <a:spLocks noGrp="1"/>
+          </p:cNvSpPr>
+          <p:nvPr>
+            <p:ph idx="1"/>
+          </p:nvPr>
+        </p:nvSpPr>
+        <p:spPr>
+          <a:xfrm>
+            <a:off x="499310" y="1535185"/>
+            <a:ext cx="11193379" cy="4915949"/>
+          </a:xfrm>
+        </p:spPr>
+        <p:txBody>
+          <a:bodyPr>
+            <a:normAutofit/>
+          </a:bodyPr>
+          <a:lstStyle/>
+          <a:p>
+            <a:r>
+              <a:rPr lang="ja-JP" altLang="en-US" dirty="0" smtClean="0"/>
+              <a:t>ぼろい鍬・・・耐久値 </a:t>
+            </a:r>
+            <a:r>
+              <a:rPr lang="en-US" altLang="ja-JP" dirty="0" smtClean="0"/>
+              <a:t>: 12 </a:t>
+            </a:r>
+            <a:r>
+              <a:rPr lang="ja-JP" altLang="en-US" dirty="0" smtClean="0"/>
+              <a:t>    価格 </a:t>
+            </a:r>
+            <a:r>
+              <a:rPr lang="en-US" altLang="ja-JP" dirty="0" smtClean="0"/>
+              <a:t>:    2</a:t>
+            </a:r>
+            <a:r>
+              <a:rPr lang="ja-JP" altLang="en-US" dirty="0" smtClean="0"/>
+              <a:t>   初期装備</a:t>
+            </a:r>
+            <a:endParaRPr lang="en-US" altLang="ja-JP" dirty="0" smtClean="0"/>
+          </a:p>
+          <a:p>
+            <a:r>
+              <a:rPr lang="ja-JP" altLang="en-US" dirty="0" smtClean="0"/>
+              <a:t>銅の鍬　・・・耐久値 </a:t>
+            </a:r>
+            <a:r>
+              <a:rPr lang="en-US" altLang="ja-JP" dirty="0" smtClean="0"/>
+              <a:t>: 30</a:t>
+            </a:r>
+            <a:r>
+              <a:rPr lang="ja-JP" altLang="en-US" dirty="0" smtClean="0"/>
+              <a:t> </a:t>
+            </a:r>
+            <a:r>
+              <a:rPr lang="en-US" altLang="ja-JP" dirty="0" smtClean="0"/>
+              <a:t>    </a:t>
+            </a:r>
+            <a:r>
+              <a:rPr lang="ja-JP" altLang="en-US" dirty="0" smtClean="0"/>
+              <a:t>価格 </a:t>
+            </a:r>
+            <a:r>
+              <a:rPr lang="en-US" altLang="ja-JP" dirty="0" smtClean="0"/>
+              <a:t>:    6</a:t>
+            </a:r>
+            <a:r>
+              <a:rPr lang="ja-JP" altLang="en-US" dirty="0" smtClean="0"/>
+              <a:t>    </a:t>
+            </a:r>
+            <a:endParaRPr lang="en-US" altLang="ja-JP" dirty="0" smtClean="0"/>
+          </a:p>
+          <a:p>
+            <a:r>
+              <a:rPr kumimoji="1" lang="ja-JP" altLang="en-US" dirty="0" smtClean="0"/>
+              <a:t>鉄の鍬　・・・</a:t>
+            </a:r>
+            <a:r>
+              <a:rPr lang="ja-JP" altLang="en-US" dirty="0" smtClean="0"/>
+              <a:t>耐久値 </a:t>
+            </a:r>
+            <a:r>
+              <a:rPr lang="en-US" altLang="ja-JP" dirty="0" smtClean="0"/>
+              <a:t>: 70     </a:t>
+            </a:r>
+            <a:r>
+              <a:rPr lang="ja-JP" altLang="en-US" dirty="0" smtClean="0"/>
+              <a:t>価格</a:t>
+            </a:r>
+            <a:r>
+              <a:rPr lang="en-US" altLang="ja-JP" dirty="0"/>
+              <a:t> </a:t>
+            </a:r>
+            <a:r>
+              <a:rPr lang="en-US" altLang="ja-JP" dirty="0" smtClean="0"/>
+              <a:t>:  10    </a:t>
+            </a:r>
+            <a:endParaRPr kumimoji="1" lang="en-US" altLang="ja-JP" dirty="0"/>
+          </a:p>
+          <a:p>
+            <a:r>
+              <a:rPr lang="ja-JP" altLang="en-US" dirty="0" smtClean="0"/>
+              <a:t>鋼の鍬　・・・耐久値</a:t>
+            </a:r>
+            <a:r>
+              <a:rPr lang="en-US" altLang="ja-JP" dirty="0"/>
+              <a:t> </a:t>
+            </a:r>
+            <a:r>
+              <a:rPr lang="en-US" altLang="ja-JP" dirty="0" smtClean="0"/>
+              <a:t>: 120</a:t>
+            </a:r>
+            <a:r>
+              <a:rPr lang="ja-JP" altLang="en-US" dirty="0"/>
+              <a:t> </a:t>
+            </a:r>
+            <a:r>
+              <a:rPr lang="ja-JP" altLang="en-US" dirty="0" smtClean="0"/>
+              <a:t>  価格 </a:t>
+            </a:r>
+            <a:r>
+              <a:rPr lang="en-US" altLang="ja-JP" dirty="0" smtClean="0"/>
+              <a:t>:  35    </a:t>
+            </a:r>
+            <a:r>
+              <a:rPr lang="ja-JP" altLang="en-US" dirty="0" smtClean="0"/>
+              <a:t>爆発する作物も通常の作物と同じ価格で採取可能</a:t>
+            </a:r>
+            <a:endParaRPr lang="en-US" altLang="ja-JP" dirty="0" smtClean="0"/>
+          </a:p>
+          <a:p>
+            <a:endParaRPr lang="en-US" altLang="ja-JP" dirty="0" smtClean="0"/>
+          </a:p>
+          <a:p>
+            <a:r>
+              <a:rPr kumimoji="1" lang="ja-JP" altLang="en-US" dirty="0" smtClean="0"/>
+              <a:t>黒い鉄の鍬・・・</a:t>
+            </a:r>
+            <a:r>
+              <a:rPr lang="ja-JP" altLang="en-US" dirty="0" smtClean="0"/>
+              <a:t>耐久値 </a:t>
+            </a:r>
+            <a:r>
+              <a:rPr lang="en-US" altLang="ja-JP" dirty="0" smtClean="0"/>
+              <a:t>: 60  </a:t>
+            </a:r>
+            <a:r>
+              <a:rPr lang="ja-JP" altLang="en-US" dirty="0" smtClean="0"/>
+              <a:t>価格 </a:t>
+            </a:r>
+            <a:r>
+              <a:rPr lang="en-US" altLang="ja-JP" dirty="0" smtClean="0"/>
+              <a:t>:  20   </a:t>
+            </a:r>
+            <a:r>
+              <a:rPr lang="ja-JP" altLang="en-US" dirty="0" smtClean="0"/>
+              <a:t>悪い作物を通常の作物と同じように採取可能</a:t>
+            </a:r>
+            <a:endParaRPr lang="en-US" altLang="ja-JP" dirty="0" smtClean="0"/>
+          </a:p>
+          <a:p>
+            <a:r>
+              <a:rPr kumimoji="1" lang="ja-JP" altLang="en-US" dirty="0" smtClean="0"/>
+              <a:t>黒い鋼の鍬・・・耐久値 </a:t>
+            </a:r>
+            <a:r>
+              <a:rPr kumimoji="1" lang="en-US" altLang="ja-JP" dirty="0" smtClean="0"/>
+              <a:t>: 100 </a:t>
+            </a:r>
+            <a:r>
+              <a:rPr kumimoji="1" lang="ja-JP" altLang="en-US" dirty="0" smtClean="0"/>
+              <a:t>価格 </a:t>
+            </a:r>
+            <a:r>
+              <a:rPr kumimoji="1" lang="en-US" altLang="ja-JP" dirty="0" smtClean="0"/>
+              <a:t>: </a:t>
+            </a:r>
+            <a:r>
+              <a:rPr lang="ja-JP" altLang="en-US" dirty="0"/>
+              <a:t> </a:t>
+            </a:r>
+            <a:r>
+              <a:rPr lang="en-US" altLang="ja-JP" dirty="0"/>
+              <a:t>4</a:t>
+            </a:r>
+            <a:r>
+              <a:rPr kumimoji="1" lang="en-US" altLang="ja-JP" dirty="0" smtClean="0"/>
+              <a:t>0  </a:t>
+            </a:r>
+            <a:r>
+              <a:rPr kumimoji="1" lang="ja-JP" altLang="en-US" dirty="0" smtClean="0"/>
+              <a:t>悪い作物、爆発す</a:t>
+            </a:r>
+            <a:r>
+              <a:rPr lang="ja-JP" altLang="en-US" dirty="0" smtClean="0"/>
+              <a:t>る作物も普通の作物と同じように採取可能</a:t>
+            </a:r>
+            <a:endParaRPr kumimoji="1" lang="ja-JP" altLang="en-US" dirty="0"/>
+          </a:p>
+        </p:txBody>
+      </p:sp>
+    </p:spTree>
+    <p:extLst>
+      <p:ext uri="{BB962C8B-B14F-4D97-AF65-F5344CB8AC3E}">
+        <p14:creationId xmlns:p14="http://schemas.microsoft.com/office/powerpoint/2010/main" val="433446604"/>
       </p:ext>
     </p:extLst>
   </p:cSld>

--- a/FarmLife_企画.pptx
+++ b/FarmLife_企画.pptx
@@ -3445,21 +3445,13 @@
         </p:spPr>
         <p:txBody>
           <a:bodyPr>
-            <a:normAutofit fontScale="92500" lnSpcReduction="20000"/>
+            <a:normAutofit fontScale="85000" lnSpcReduction="20000"/>
           </a:bodyPr>
           <a:lstStyle/>
           <a:p>
             <a:r>
               <a:rPr kumimoji="1" lang="ja-JP" altLang="en-US" dirty="0" smtClean="0"/>
-              <a:t>畑に生成される作物を制限時間内に多く採取し、得たお金</a:t>
-            </a:r>
-            <a:r>
-              <a:rPr kumimoji="1" lang="ja-JP" altLang="en-US" dirty="0" smtClean="0"/>
-              <a:t>で自身を強化</a:t>
-            </a:r>
-            <a:r>
-              <a:rPr kumimoji="1" lang="ja-JP" altLang="en-US" dirty="0" smtClean="0"/>
-              <a:t>することでより稼ぎやすくする</a:t>
+              <a:t>畑に生成される作物を制限時間内に多く採取し、得たお金で自身を強化することでより稼ぎやすくする</a:t>
             </a:r>
             <a:r>
               <a:rPr lang="ja-JP" altLang="en-US" dirty="0" smtClean="0"/>
@@ -3496,7 +3488,38 @@
             </a:r>
             <a:r>
               <a:rPr lang="ja-JP" altLang="en-US" dirty="0" smtClean="0"/>
-              <a:t>クリア、クリア時点の経過時間、採取した作物の数でスコアが決まりランク付けされる。</a:t>
+              <a:t>クリア</a:t>
+            </a:r>
+            <a:endParaRPr lang="en-US" altLang="ja-JP" dirty="0" smtClean="0"/>
+          </a:p>
+          <a:p>
+            <a:r>
+              <a:rPr lang="ja-JP" altLang="en-US" dirty="0" smtClean="0"/>
+              <a:t>クリア</a:t>
+            </a:r>
+            <a:r>
+              <a:rPr lang="ja-JP" altLang="en-US" dirty="0" smtClean="0"/>
+              <a:t>時点の経過時間、採取した作物</a:t>
+            </a:r>
+            <a:r>
+              <a:rPr lang="ja-JP" altLang="en-US" dirty="0" smtClean="0"/>
+              <a:t>の合計</a:t>
+            </a:r>
+            <a:r>
+              <a:rPr lang="ja-JP" altLang="en-US" dirty="0" smtClean="0"/>
+              <a:t>個数</a:t>
+            </a:r>
+            <a:r>
+              <a:rPr lang="ja-JP" altLang="en-US" dirty="0" smtClean="0"/>
+              <a:t>で</a:t>
+            </a:r>
+            <a:r>
+              <a:rPr lang="ja-JP" altLang="en-US" dirty="0" smtClean="0"/>
+              <a:t>スコアが決まりランク付けされる</a:t>
+            </a:r>
+            <a:r>
+              <a:rPr lang="ja-JP" altLang="en-US" dirty="0" smtClean="0"/>
+              <a:t>。早く、少ない個数でクリアするほど高得点を得れる</a:t>
             </a:r>
             <a:endParaRPr lang="en-US" altLang="ja-JP" dirty="0"/>
           </a:p>
@@ -3517,22 +3540,14 @@
             </a:r>
             <a:r>
               <a:rPr lang="ja-JP" altLang="en-US" dirty="0" smtClean="0"/>
-              <a:t>動き方によってどのくらい早く稼げるのか変わってくるところ</a:t>
-            </a:r>
-            <a:r>
-              <a:rPr lang="ja-JP" altLang="en-US" dirty="0" smtClean="0"/>
-              <a:t>。</a:t>
+              <a:t>動き方によってどのくらい早く稼げるのか変わってくるところ。</a:t>
             </a:r>
             <a:endParaRPr lang="en-US" altLang="ja-JP" dirty="0" smtClean="0"/>
           </a:p>
           <a:p>
             <a:r>
               <a:rPr kumimoji="1" lang="ja-JP" altLang="en-US" dirty="0" smtClean="0"/>
-              <a:t>採取するための鍬に耐久力があり、持っている鍬によって採取できる作物が</a:t>
-            </a:r>
-            <a:r>
-              <a:rPr kumimoji="1" lang="ja-JP" altLang="en-US" smtClean="0"/>
-              <a:t>変わる。</a:t>
+              <a:t>採取するための鍬に耐久力があり、持っている鍬によって採取できる作物が変わる。</a:t>
             </a:r>
             <a:endParaRPr kumimoji="1" lang="en-US" altLang="ja-JP" dirty="0" smtClean="0"/>
           </a:p>
@@ -3616,17 +3631,13 @@
         </p:spPr>
         <p:txBody>
           <a:bodyPr>
-            <a:normAutofit/>
+            <a:normAutofit fontScale="92500" lnSpcReduction="10000"/>
           </a:bodyPr>
           <a:lstStyle/>
           <a:p>
             <a:r>
               <a:rPr lang="ja-JP" altLang="en-US" dirty="0" smtClean="0"/>
-              <a:t>採取パート</a:t>
-            </a:r>
-            <a:r>
-              <a:rPr lang="ja-JP" altLang="en-US" dirty="0" smtClean="0"/>
-              <a:t>と</a:t>
+              <a:t>採取パートと</a:t>
             </a:r>
             <a:r>
               <a:rPr lang="ja-JP" altLang="en-US" dirty="0"/>
@@ -3634,11 +3645,7 @@
             </a:r>
             <a:r>
               <a:rPr lang="ja-JP" altLang="en-US" dirty="0" smtClean="0"/>
-              <a:t>パート</a:t>
-            </a:r>
-            <a:r>
-              <a:rPr lang="ja-JP" altLang="en-US" dirty="0" smtClean="0"/>
-              <a:t>がある</a:t>
+              <a:t>パートがある</a:t>
             </a:r>
             <a:endParaRPr lang="en-US" altLang="ja-JP" dirty="0"/>
           </a:p>
@@ -3649,11 +3656,22 @@
             </a:r>
             <a:r>
               <a:rPr lang="ja-JP" altLang="en-US" dirty="0" smtClean="0"/>
-              <a:t>を得るための畑</a:t>
-            </a:r>
-            <a:r>
-              <a:rPr lang="ja-JP" altLang="en-US" dirty="0" smtClean="0"/>
-              <a:t>とパーク、鍬を買うための</a:t>
+              <a:t>を得るための</a:t>
+            </a:r>
+            <a:r>
+              <a:rPr lang="ja-JP" altLang="en-US" dirty="0" smtClean="0"/>
+              <a:t>畑</a:t>
+            </a:r>
+            <a:endParaRPr lang="en-US" altLang="ja-JP" dirty="0" smtClean="0"/>
+          </a:p>
+          <a:p>
+            <a:r>
+              <a:rPr lang="ja-JP" altLang="en-US" dirty="0" smtClean="0"/>
+              <a:t>パーク</a:t>
+            </a:r>
+            <a:r>
+              <a:rPr lang="ja-JP" altLang="en-US" dirty="0" smtClean="0"/>
+              <a:t>、鍬を買うための</a:t>
             </a:r>
             <a:r>
               <a:rPr lang="ja-JP" altLang="en-US" dirty="0"/>
@@ -3661,11 +3679,19 @@
             </a:r>
             <a:r>
               <a:rPr lang="ja-JP" altLang="en-US" dirty="0" smtClean="0"/>
-              <a:t>がマップ内に</a:t>
-            </a:r>
-            <a:r>
-              <a:rPr lang="ja-JP" altLang="en-US" dirty="0" smtClean="0"/>
-              <a:t>ある</a:t>
+              <a:t>が</a:t>
+            </a:r>
+            <a:r>
+              <a:rPr lang="ja-JP" altLang="en-US" dirty="0"/>
+              <a:t>同</a:t>
+            </a:r>
+            <a:r>
+              <a:rPr lang="ja-JP" altLang="en-US" dirty="0" smtClean="0"/>
+              <a:t>マップ内</a:t>
+            </a:r>
+            <a:r>
+              <a:rPr lang="ja-JP" altLang="en-US" dirty="0" smtClean="0"/>
+              <a:t>にある</a:t>
             </a:r>
             <a:endParaRPr lang="en-US" altLang="ja-JP" dirty="0" smtClean="0"/>
           </a:p>
@@ -3676,15 +3702,7 @@
             </a:r>
             <a:r>
               <a:rPr kumimoji="1" lang="ja-JP" altLang="en-US" dirty="0" smtClean="0"/>
-              <a:t>パート</a:t>
-            </a:r>
-            <a:r>
-              <a:rPr kumimoji="1" lang="ja-JP" altLang="en-US" dirty="0" smtClean="0"/>
-              <a:t>でパークを購入して自分を強化していく</a:t>
-            </a:r>
-            <a:r>
-              <a:rPr kumimoji="1" lang="ja-JP" altLang="en-US" dirty="0" smtClean="0"/>
-              <a:t>。</a:t>
+              <a:t>パートでパークを購入して自分を強化していく。</a:t>
             </a:r>
             <a:endParaRPr kumimoji="1" lang="en-US" altLang="ja-JP" dirty="0" smtClean="0"/>
           </a:p>
@@ -3698,7 +3716,23 @@
           <a:p>
             <a:r>
               <a:rPr lang="ja-JP" altLang="en-US" dirty="0" smtClean="0"/>
-              <a:t>鍬がない状態で</a:t>
+              <a:t>鍬</a:t>
+            </a:r>
+            <a:r>
+              <a:rPr lang="ja-JP" altLang="en-US" dirty="0" smtClean="0"/>
+              <a:t>が</a:t>
+            </a:r>
+            <a:r>
+              <a:rPr lang="ja-JP" altLang="en-US" dirty="0"/>
+              <a:t>壊れている</a:t>
+            </a:r>
+            <a:r>
+              <a:rPr lang="ja-JP" altLang="en-US" dirty="0" smtClean="0"/>
+              <a:t>状態</a:t>
+            </a:r>
+            <a:r>
+              <a:rPr lang="ja-JP" altLang="en-US" dirty="0" smtClean="0"/>
+              <a:t>で</a:t>
             </a:r>
             <a:r>
               <a:rPr lang="ja-JP" altLang="en-US" dirty="0"/>
@@ -3805,37 +3839,25 @@
           <a:p>
             <a:r>
               <a:rPr lang="ja-JP" altLang="en-US" dirty="0" smtClean="0"/>
-              <a:t>作物を採取した時点でお金を入手することができる</a:t>
-            </a:r>
-            <a:r>
-              <a:rPr lang="ja-JP" altLang="en-US" dirty="0" smtClean="0"/>
-              <a:t>。</a:t>
+              <a:t>作物を採取した時点でお金を入手することができる。</a:t>
             </a:r>
             <a:endParaRPr lang="en-US" altLang="ja-JP" dirty="0" smtClean="0"/>
           </a:p>
           <a:p>
             <a:r>
               <a:rPr lang="ja-JP" altLang="en-US" dirty="0" smtClean="0"/>
-              <a:t>作物にも種類があり、通常の作物、</a:t>
-            </a:r>
-            <a:r>
-              <a:rPr lang="ja-JP" altLang="en-US" dirty="0" smtClean="0"/>
-              <a:t>悪い色の作物</a:t>
-            </a:r>
-            <a:r>
-              <a:rPr lang="ja-JP" altLang="en-US" dirty="0" smtClean="0"/>
-              <a:t>、爆発する作物など</a:t>
+              <a:t>作物にも種類があり、通常の作物、悪い色の作物、爆発する作物など</a:t>
             </a:r>
             <a:endParaRPr lang="en-US" altLang="ja-JP" dirty="0" smtClean="0"/>
           </a:p>
           <a:p>
             <a:r>
               <a:rPr lang="ja-JP" altLang="en-US" dirty="0" smtClean="0"/>
-              <a:t>制限時間を過ぎると</a:t>
-            </a:r>
-            <a:r>
-              <a:rPr lang="ja-JP" altLang="en-US" dirty="0" smtClean="0"/>
-              <a:t>畑の作物がすべて消える。</a:t>
+              <a:t>作物の出現時間</a:t>
+            </a:r>
+            <a:r>
+              <a:rPr lang="ja-JP" altLang="en-US" dirty="0" smtClean="0"/>
+              <a:t>を過ぎると畑の作物がすべて消える。</a:t>
             </a:r>
             <a:endParaRPr kumimoji="1" lang="ja-JP" altLang="en-US" dirty="0"/>
           </a:p>
@@ -3872,11 +3894,19 @@
           <a:p>
             <a:r>
               <a:rPr lang="ja-JP" altLang="en-US" sz="2800" dirty="0" smtClean="0"/>
-              <a:t>・制限時間　</a:t>
+              <a:t>・</a:t>
+            </a:r>
+            <a:r>
+              <a:rPr lang="ja-JP" altLang="en-US" sz="2800" dirty="0"/>
+              <a:t>出現</a:t>
             </a:r>
             <a:r>
               <a:rPr lang="ja-JP" altLang="en-US" sz="2800" dirty="0" smtClean="0"/>
-              <a:t>  </a:t>
+              <a:t>時間</a:t>
+            </a:r>
+            <a:r>
+              <a:rPr lang="ja-JP" altLang="en-US" sz="2800" dirty="0" smtClean="0"/>
+              <a:t>　  </a:t>
             </a:r>
             <a:r>
               <a:rPr lang="en-US" altLang="ja-JP" sz="2800" dirty="0" smtClean="0"/>
@@ -3910,19 +3940,7 @@
           <a:p>
             <a:r>
               <a:rPr lang="ja-JP" altLang="en-US" sz="2800" dirty="0" smtClean="0"/>
-              <a:t>・出現する作物　</a:t>
-            </a:r>
-            <a:r>
-              <a:rPr lang="ja-JP" altLang="en-US" sz="2800" dirty="0" smtClean="0"/>
-              <a:t>　</a:t>
-            </a:r>
-            <a:r>
-              <a:rPr lang="ja-JP" altLang="en-US" sz="2800" dirty="0" smtClean="0"/>
-              <a:t>通常の</a:t>
-            </a:r>
-            <a:r>
-              <a:rPr lang="ja-JP" altLang="en-US" sz="2800" dirty="0" smtClean="0"/>
-              <a:t>カブ</a:t>
+              <a:t>・出現する作物　　通常のカブ</a:t>
             </a:r>
             <a:r>
               <a:rPr lang="en-US" altLang="ja-JP" sz="2800" dirty="0"/>
@@ -4166,19 +4184,7 @@
           <a:p>
             <a:r>
               <a:rPr kumimoji="1" lang="ja-JP" altLang="en-US" dirty="0" smtClean="0"/>
-              <a:t>採取パートで得たお金を使って</a:t>
-            </a:r>
-            <a:r>
-              <a:rPr kumimoji="1" lang="ja-JP" altLang="en-US" dirty="0" smtClean="0"/>
-              <a:t>パークや鍬を購入</a:t>
-            </a:r>
-            <a:r>
-              <a:rPr kumimoji="1" lang="ja-JP" altLang="en-US" dirty="0" smtClean="0"/>
-              <a:t>することが</a:t>
-            </a:r>
-            <a:r>
-              <a:rPr kumimoji="1" lang="ja-JP" altLang="en-US" dirty="0" smtClean="0"/>
-              <a:t>できる</a:t>
+              <a:t>採取パートで得たお金を使ってパークや鍬を購入することができる</a:t>
             </a:r>
             <a:endParaRPr lang="en-US" altLang="ja-JP" dirty="0" smtClean="0"/>
           </a:p>
@@ -4200,15 +4206,7 @@
           <a:p>
             <a:r>
               <a:rPr lang="ja-JP" altLang="en-US" dirty="0" smtClean="0"/>
-              <a:t>パークの取得にもお金を使用するので、鍬を買うためのお金と兼ね合いながら</a:t>
-            </a:r>
-            <a:r>
-              <a:rPr lang="ja-JP" altLang="en-US" dirty="0" smtClean="0"/>
-              <a:t>パークを開放しないといけない</a:t>
-            </a:r>
-            <a:r>
-              <a:rPr lang="ja-JP" altLang="en-US" dirty="0" smtClean="0"/>
-              <a:t>。</a:t>
+              <a:t>パークの取得にもお金を使用するので、鍬を買うためのお金と兼ね合いながらパークを開放しないといけない。</a:t>
             </a:r>
             <a:endParaRPr lang="en-US" altLang="ja-JP" dirty="0" smtClean="0"/>
           </a:p>
@@ -4251,7 +4249,11 @@
           <a:p>
             <a:r>
               <a:rPr lang="ja-JP" altLang="en-US" sz="2400" dirty="0"/>
-              <a:t>制限時間</a:t>
+              <a:t>出現</a:t>
+            </a:r>
+            <a:r>
+              <a:rPr lang="ja-JP" altLang="en-US" sz="2400" dirty="0" smtClean="0"/>
+              <a:t>時間</a:t>
             </a:r>
             <a:r>
               <a:rPr lang="en-US" altLang="ja-JP" sz="2400" dirty="0"/>
@@ -4367,7 +4369,15 @@
           <a:p>
             <a:r>
               <a:rPr lang="ja-JP" altLang="en-US" dirty="0" smtClean="0"/>
-              <a:t>ぼろい鍬・・・耐久値 </a:t>
+              <a:t>石の鍬   ・</a:t>
+            </a:r>
+            <a:r>
+              <a:rPr lang="ja-JP" altLang="en-US" dirty="0" smtClean="0"/>
+              <a:t>・</a:t>
+            </a:r>
+            <a:r>
+              <a:rPr lang="ja-JP" altLang="en-US" dirty="0" smtClean="0"/>
+              <a:t>・耐久値 </a:t>
             </a:r>
             <a:r>
               <a:rPr lang="en-US" altLang="ja-JP" dirty="0" smtClean="0"/>
@@ -4441,7 +4451,11 @@
             </a:r>
             <a:r>
               <a:rPr lang="en-US" altLang="ja-JP" dirty="0" smtClean="0"/>
-              <a:t>:  10    </a:t>
+              <a:t>:  </a:t>
+            </a:r>
+            <a:r>
+              <a:rPr lang="en-US" altLang="ja-JP" dirty="0" smtClean="0"/>
+              <a:t>14    </a:t>
             </a:r>
             <a:endParaRPr kumimoji="1" lang="en-US" altLang="ja-JP" dirty="0"/>
           </a:p>
@@ -4456,15 +4470,19 @@
             </a:r>
             <a:r>
               <a:rPr lang="en-US" altLang="ja-JP" dirty="0" smtClean="0"/>
-              <a:t>: 120</a:t>
-            </a:r>
-            <a:r>
-              <a:rPr lang="ja-JP" altLang="en-US" dirty="0"/>
-              <a:t> </a:t>
-            </a:r>
-            <a:r>
-              <a:rPr lang="ja-JP" altLang="en-US" dirty="0" smtClean="0"/>
-              <a:t>  価格 </a:t>
+              <a:t>: </a:t>
+            </a:r>
+            <a:r>
+              <a:rPr lang="en-US" altLang="ja-JP" dirty="0" smtClean="0"/>
+              <a:t>140</a:t>
+            </a:r>
+            <a:r>
+              <a:rPr lang="ja-JP" altLang="en-US" dirty="0" smtClean="0"/>
+              <a:t>   </a:t>
+            </a:r>
+            <a:r>
+              <a:rPr lang="ja-JP" altLang="en-US" dirty="0" smtClean="0"/>
+              <a:t>価格 </a:t>
             </a:r>
             <a:r>
               <a:rPr lang="en-US" altLang="ja-JP" dirty="0" smtClean="0"/>
@@ -4512,8 +4530,12 @@
               <a:t>黒い鋼の鍬・・・耐久値 </a:t>
             </a:r>
             <a:r>
-              <a:rPr kumimoji="1" lang="en-US" altLang="ja-JP" dirty="0" smtClean="0"/>
-              <a:t>: 100 </a:t>
+              <a:rPr kumimoji="1" lang="en-US" altLang="ja-JP" smtClean="0"/>
+              <a:t>: </a:t>
+            </a:r>
+            <a:r>
+              <a:rPr kumimoji="1" lang="en-US" altLang="ja-JP" smtClean="0"/>
+              <a:t>110 </a:t>
             </a:r>
             <a:r>
               <a:rPr kumimoji="1" lang="ja-JP" altLang="en-US" dirty="0" smtClean="0"/>

--- a/FarmLife_企画.pptx
+++ b/FarmLife_企画.pptx
@@ -11,7 +11,6 @@
     <p:sldId id="259" r:id="rId5"/>
     <p:sldId id="262" r:id="rId6"/>
     <p:sldId id="260" r:id="rId7"/>
-    <p:sldId id="261" r:id="rId8"/>
   </p:sldIdLst>
   <p:sldSz cx="12192000" cy="6858000"/>
   <p:notesSz cx="6858000" cy="9144000"/>
@@ -160,10 +159,9 @@
           </a:lstStyle>
           <a:p>
             <a:r>
-              <a:rPr kumimoji="1" lang="ja-JP" altLang="en-US" smtClean="0"/>
+              <a:rPr kumimoji="1" lang="ja-JP" altLang="en-US"/>
               <a:t>マスター タイトルの書式設定</a:t>
             </a:r>
-            <a:endParaRPr kumimoji="1" lang="ja-JP" altLang="en-US"/>
           </a:p>
         </p:txBody>
       </p:sp>
@@ -225,10 +223,9 @@
           </a:lstStyle>
           <a:p>
             <a:r>
-              <a:rPr kumimoji="1" lang="ja-JP" altLang="en-US" smtClean="0"/>
+              <a:rPr kumimoji="1" lang="ja-JP" altLang="en-US"/>
               <a:t>マスター サブタイトルの書式設定</a:t>
             </a:r>
-            <a:endParaRPr kumimoji="1" lang="ja-JP" altLang="en-US"/>
           </a:p>
         </p:txBody>
       </p:sp>
@@ -249,7 +246,7 @@
           <a:p>
             <a:fld id="{14472033-EBEF-4113-884E-480E233F66C8}" type="datetimeFigureOut">
               <a:rPr kumimoji="1" lang="ja-JP" altLang="en-US" smtClean="0"/>
-              <a:t>2026/4/17</a:t>
+              <a:t>2026/4/18</a:t>
             </a:fld>
             <a:endParaRPr kumimoji="1" lang="ja-JP" altLang="en-US"/>
           </a:p>
@@ -343,10 +340,9 @@
           <a:lstStyle/>
           <a:p>
             <a:r>
-              <a:rPr kumimoji="1" lang="ja-JP" altLang="en-US" smtClean="0"/>
+              <a:rPr kumimoji="1" lang="ja-JP" altLang="en-US"/>
               <a:t>マスター タイトルの書式設定</a:t>
             </a:r>
-            <a:endParaRPr kumimoji="1" lang="ja-JP" altLang="en-US"/>
           </a:p>
         </p:txBody>
       </p:sp>
@@ -367,70 +363,69 @@
           <a:p>
             <a:pPr lvl="0"/>
             <a:r>
-              <a:rPr kumimoji="1" lang="ja-JP" altLang="en-US" smtClean="0"/>
+              <a:rPr kumimoji="1" lang="ja-JP" altLang="en-US"/>
               <a:t>マスター テキストの書式設定</a:t>
             </a:r>
           </a:p>
           <a:p>
             <a:pPr lvl="1"/>
             <a:r>
-              <a:rPr kumimoji="1" lang="ja-JP" altLang="en-US" smtClean="0"/>
+              <a:rPr kumimoji="1" lang="ja-JP" altLang="en-US"/>
               <a:t>第 </a:t>
             </a:r>
             <a:r>
-              <a:rPr kumimoji="1" lang="en-US" altLang="ja-JP" smtClean="0"/>
+              <a:rPr kumimoji="1" lang="en-US" altLang="ja-JP"/>
               <a:t>2 </a:t>
             </a:r>
             <a:r>
-              <a:rPr kumimoji="1" lang="ja-JP" altLang="en-US" smtClean="0"/>
+              <a:rPr kumimoji="1" lang="ja-JP" altLang="en-US"/>
               <a:t>レベル</a:t>
             </a:r>
           </a:p>
           <a:p>
             <a:pPr lvl="2"/>
             <a:r>
-              <a:rPr kumimoji="1" lang="ja-JP" altLang="en-US" smtClean="0"/>
+              <a:rPr kumimoji="1" lang="ja-JP" altLang="en-US"/>
               <a:t>第 </a:t>
             </a:r>
             <a:r>
-              <a:rPr kumimoji="1" lang="en-US" altLang="ja-JP" smtClean="0"/>
+              <a:rPr kumimoji="1" lang="en-US" altLang="ja-JP"/>
               <a:t>3 </a:t>
             </a:r>
             <a:r>
-              <a:rPr kumimoji="1" lang="ja-JP" altLang="en-US" smtClean="0"/>
+              <a:rPr kumimoji="1" lang="ja-JP" altLang="en-US"/>
               <a:t>レベル</a:t>
             </a:r>
           </a:p>
           <a:p>
             <a:pPr lvl="3"/>
             <a:r>
-              <a:rPr kumimoji="1" lang="ja-JP" altLang="en-US" smtClean="0"/>
+              <a:rPr kumimoji="1" lang="ja-JP" altLang="en-US"/>
               <a:t>第 </a:t>
             </a:r>
             <a:r>
-              <a:rPr kumimoji="1" lang="en-US" altLang="ja-JP" smtClean="0"/>
+              <a:rPr kumimoji="1" lang="en-US" altLang="ja-JP"/>
               <a:t>4 </a:t>
             </a:r>
             <a:r>
-              <a:rPr kumimoji="1" lang="ja-JP" altLang="en-US" smtClean="0"/>
+              <a:rPr kumimoji="1" lang="ja-JP" altLang="en-US"/>
               <a:t>レベル</a:t>
             </a:r>
           </a:p>
           <a:p>
             <a:pPr lvl="4"/>
             <a:r>
-              <a:rPr kumimoji="1" lang="ja-JP" altLang="en-US" smtClean="0"/>
+              <a:rPr kumimoji="1" lang="ja-JP" altLang="en-US"/>
               <a:t>第 </a:t>
             </a:r>
             <a:r>
-              <a:rPr kumimoji="1" lang="en-US" altLang="ja-JP" smtClean="0"/>
+              <a:rPr kumimoji="1" lang="en-US" altLang="ja-JP"/>
               <a:t>5 </a:t>
             </a:r>
             <a:r>
-              <a:rPr kumimoji="1" lang="ja-JP" altLang="en-US" smtClean="0"/>
+              <a:rPr kumimoji="1" lang="ja-JP" altLang="en-US"/>
               <a:t>レベル</a:t>
             </a:r>
-            <a:endParaRPr kumimoji="1" lang="ja-JP" altLang="en-US"/>
           </a:p>
         </p:txBody>
       </p:sp>
@@ -451,7 +446,7 @@
           <a:p>
             <a:fld id="{14472033-EBEF-4113-884E-480E233F66C8}" type="datetimeFigureOut">
               <a:rPr kumimoji="1" lang="ja-JP" altLang="en-US" smtClean="0"/>
-              <a:t>2026/4/17</a:t>
+              <a:t>2026/4/18</a:t>
             </a:fld>
             <a:endParaRPr kumimoji="1" lang="ja-JP" altLang="en-US"/>
           </a:p>
@@ -550,10 +545,9 @@
           <a:lstStyle/>
           <a:p>
             <a:r>
-              <a:rPr kumimoji="1" lang="ja-JP" altLang="en-US" smtClean="0"/>
+              <a:rPr kumimoji="1" lang="ja-JP" altLang="en-US"/>
               <a:t>マスター タイトルの書式設定</a:t>
             </a:r>
-            <a:endParaRPr kumimoji="1" lang="ja-JP" altLang="en-US"/>
           </a:p>
         </p:txBody>
       </p:sp>
@@ -579,70 +573,69 @@
           <a:p>
             <a:pPr lvl="0"/>
             <a:r>
-              <a:rPr kumimoji="1" lang="ja-JP" altLang="en-US" smtClean="0"/>
+              <a:rPr kumimoji="1" lang="ja-JP" altLang="en-US"/>
               <a:t>マスター テキストの書式設定</a:t>
             </a:r>
           </a:p>
           <a:p>
             <a:pPr lvl="1"/>
             <a:r>
-              <a:rPr kumimoji="1" lang="ja-JP" altLang="en-US" smtClean="0"/>
+              <a:rPr kumimoji="1" lang="ja-JP" altLang="en-US"/>
               <a:t>第 </a:t>
             </a:r>
             <a:r>
-              <a:rPr kumimoji="1" lang="en-US" altLang="ja-JP" smtClean="0"/>
+              <a:rPr kumimoji="1" lang="en-US" altLang="ja-JP"/>
               <a:t>2 </a:t>
             </a:r>
             <a:r>
-              <a:rPr kumimoji="1" lang="ja-JP" altLang="en-US" smtClean="0"/>
+              <a:rPr kumimoji="1" lang="ja-JP" altLang="en-US"/>
               <a:t>レベル</a:t>
             </a:r>
           </a:p>
           <a:p>
             <a:pPr lvl="2"/>
             <a:r>
-              <a:rPr kumimoji="1" lang="ja-JP" altLang="en-US" smtClean="0"/>
+              <a:rPr kumimoji="1" lang="ja-JP" altLang="en-US"/>
               <a:t>第 </a:t>
             </a:r>
             <a:r>
-              <a:rPr kumimoji="1" lang="en-US" altLang="ja-JP" smtClean="0"/>
+              <a:rPr kumimoji="1" lang="en-US" altLang="ja-JP"/>
               <a:t>3 </a:t>
             </a:r>
             <a:r>
-              <a:rPr kumimoji="1" lang="ja-JP" altLang="en-US" smtClean="0"/>
+              <a:rPr kumimoji="1" lang="ja-JP" altLang="en-US"/>
               <a:t>レベル</a:t>
             </a:r>
           </a:p>
           <a:p>
             <a:pPr lvl="3"/>
             <a:r>
-              <a:rPr kumimoji="1" lang="ja-JP" altLang="en-US" smtClean="0"/>
+              <a:rPr kumimoji="1" lang="ja-JP" altLang="en-US"/>
               <a:t>第 </a:t>
             </a:r>
             <a:r>
-              <a:rPr kumimoji="1" lang="en-US" altLang="ja-JP" smtClean="0"/>
+              <a:rPr kumimoji="1" lang="en-US" altLang="ja-JP"/>
               <a:t>4 </a:t>
             </a:r>
             <a:r>
-              <a:rPr kumimoji="1" lang="ja-JP" altLang="en-US" smtClean="0"/>
+              <a:rPr kumimoji="1" lang="ja-JP" altLang="en-US"/>
               <a:t>レベル</a:t>
             </a:r>
           </a:p>
           <a:p>
             <a:pPr lvl="4"/>
             <a:r>
-              <a:rPr kumimoji="1" lang="ja-JP" altLang="en-US" smtClean="0"/>
+              <a:rPr kumimoji="1" lang="ja-JP" altLang="en-US"/>
               <a:t>第 </a:t>
             </a:r>
             <a:r>
-              <a:rPr kumimoji="1" lang="en-US" altLang="ja-JP" smtClean="0"/>
+              <a:rPr kumimoji="1" lang="en-US" altLang="ja-JP"/>
               <a:t>5 </a:t>
             </a:r>
             <a:r>
-              <a:rPr kumimoji="1" lang="ja-JP" altLang="en-US" smtClean="0"/>
+              <a:rPr kumimoji="1" lang="ja-JP" altLang="en-US"/>
               <a:t>レベル</a:t>
             </a:r>
-            <a:endParaRPr kumimoji="1" lang="ja-JP" altLang="en-US"/>
           </a:p>
         </p:txBody>
       </p:sp>
@@ -663,7 +656,7 @@
           <a:p>
             <a:fld id="{14472033-EBEF-4113-884E-480E233F66C8}" type="datetimeFigureOut">
               <a:rPr kumimoji="1" lang="ja-JP" altLang="en-US" smtClean="0"/>
-              <a:t>2026/4/17</a:t>
+              <a:t>2026/4/18</a:t>
             </a:fld>
             <a:endParaRPr kumimoji="1" lang="ja-JP" altLang="en-US"/>
           </a:p>
@@ -757,10 +750,9 @@
           <a:lstStyle/>
           <a:p>
             <a:r>
-              <a:rPr kumimoji="1" lang="ja-JP" altLang="en-US" smtClean="0"/>
+              <a:rPr kumimoji="1" lang="ja-JP" altLang="en-US"/>
               <a:t>マスター タイトルの書式設定</a:t>
             </a:r>
-            <a:endParaRPr kumimoji="1" lang="ja-JP" altLang="en-US"/>
           </a:p>
         </p:txBody>
       </p:sp>
@@ -781,70 +773,69 @@
           <a:p>
             <a:pPr lvl="0"/>
             <a:r>
-              <a:rPr kumimoji="1" lang="ja-JP" altLang="en-US" smtClean="0"/>
+              <a:rPr kumimoji="1" lang="ja-JP" altLang="en-US"/>
               <a:t>マスター テキストの書式設定</a:t>
             </a:r>
           </a:p>
           <a:p>
             <a:pPr lvl="1"/>
             <a:r>
-              <a:rPr kumimoji="1" lang="ja-JP" altLang="en-US" smtClean="0"/>
+              <a:rPr kumimoji="1" lang="ja-JP" altLang="en-US"/>
               <a:t>第 </a:t>
             </a:r>
             <a:r>
-              <a:rPr kumimoji="1" lang="en-US" altLang="ja-JP" smtClean="0"/>
+              <a:rPr kumimoji="1" lang="en-US" altLang="ja-JP"/>
               <a:t>2 </a:t>
             </a:r>
             <a:r>
-              <a:rPr kumimoji="1" lang="ja-JP" altLang="en-US" smtClean="0"/>
+              <a:rPr kumimoji="1" lang="ja-JP" altLang="en-US"/>
               <a:t>レベル</a:t>
             </a:r>
           </a:p>
           <a:p>
             <a:pPr lvl="2"/>
             <a:r>
-              <a:rPr kumimoji="1" lang="ja-JP" altLang="en-US" smtClean="0"/>
+              <a:rPr kumimoji="1" lang="ja-JP" altLang="en-US"/>
               <a:t>第 </a:t>
             </a:r>
             <a:r>
-              <a:rPr kumimoji="1" lang="en-US" altLang="ja-JP" smtClean="0"/>
+              <a:rPr kumimoji="1" lang="en-US" altLang="ja-JP"/>
               <a:t>3 </a:t>
             </a:r>
             <a:r>
-              <a:rPr kumimoji="1" lang="ja-JP" altLang="en-US" smtClean="0"/>
+              <a:rPr kumimoji="1" lang="ja-JP" altLang="en-US"/>
               <a:t>レベル</a:t>
             </a:r>
           </a:p>
           <a:p>
             <a:pPr lvl="3"/>
             <a:r>
-              <a:rPr kumimoji="1" lang="ja-JP" altLang="en-US" smtClean="0"/>
+              <a:rPr kumimoji="1" lang="ja-JP" altLang="en-US"/>
               <a:t>第 </a:t>
             </a:r>
             <a:r>
-              <a:rPr kumimoji="1" lang="en-US" altLang="ja-JP" smtClean="0"/>
+              <a:rPr kumimoji="1" lang="en-US" altLang="ja-JP"/>
               <a:t>4 </a:t>
             </a:r>
             <a:r>
-              <a:rPr kumimoji="1" lang="ja-JP" altLang="en-US" smtClean="0"/>
+              <a:rPr kumimoji="1" lang="ja-JP" altLang="en-US"/>
               <a:t>レベル</a:t>
             </a:r>
           </a:p>
           <a:p>
             <a:pPr lvl="4"/>
             <a:r>
-              <a:rPr kumimoji="1" lang="ja-JP" altLang="en-US" smtClean="0"/>
+              <a:rPr kumimoji="1" lang="ja-JP" altLang="en-US"/>
               <a:t>第 </a:t>
             </a:r>
             <a:r>
-              <a:rPr kumimoji="1" lang="en-US" altLang="ja-JP" smtClean="0"/>
+              <a:rPr kumimoji="1" lang="en-US" altLang="ja-JP"/>
               <a:t>5 </a:t>
             </a:r>
             <a:r>
-              <a:rPr kumimoji="1" lang="ja-JP" altLang="en-US" smtClean="0"/>
+              <a:rPr kumimoji="1" lang="ja-JP" altLang="en-US"/>
               <a:t>レベル</a:t>
             </a:r>
-            <a:endParaRPr kumimoji="1" lang="ja-JP" altLang="en-US"/>
           </a:p>
         </p:txBody>
       </p:sp>
@@ -865,7 +856,7 @@
           <a:p>
             <a:fld id="{14472033-EBEF-4113-884E-480E233F66C8}" type="datetimeFigureOut">
               <a:rPr kumimoji="1" lang="ja-JP" altLang="en-US" smtClean="0"/>
-              <a:t>2026/4/17</a:t>
+              <a:t>2026/4/18</a:t>
             </a:fld>
             <a:endParaRPr kumimoji="1" lang="ja-JP" altLang="en-US"/>
           </a:p>
@@ -968,10 +959,9 @@
           </a:lstStyle>
           <a:p>
             <a:r>
-              <a:rPr kumimoji="1" lang="ja-JP" altLang="en-US" smtClean="0"/>
+              <a:rPr kumimoji="1" lang="ja-JP" altLang="en-US"/>
               <a:t>マスター タイトルの書式設定</a:t>
             </a:r>
-            <a:endParaRPr kumimoji="1" lang="ja-JP" altLang="en-US"/>
           </a:p>
         </p:txBody>
       </p:sp>
@@ -1088,7 +1078,7 @@
           <a:p>
             <a:pPr lvl="0"/>
             <a:r>
-              <a:rPr kumimoji="1" lang="ja-JP" altLang="en-US" smtClean="0"/>
+              <a:rPr kumimoji="1" lang="ja-JP" altLang="en-US"/>
               <a:t>マスター テキストの書式設定</a:t>
             </a:r>
           </a:p>
@@ -1111,7 +1101,7 @@
           <a:p>
             <a:fld id="{14472033-EBEF-4113-884E-480E233F66C8}" type="datetimeFigureOut">
               <a:rPr kumimoji="1" lang="ja-JP" altLang="en-US" smtClean="0"/>
-              <a:t>2026/4/17</a:t>
+              <a:t>2026/4/18</a:t>
             </a:fld>
             <a:endParaRPr kumimoji="1" lang="ja-JP" altLang="en-US"/>
           </a:p>
@@ -1205,10 +1195,9 @@
           <a:lstStyle/>
           <a:p>
             <a:r>
-              <a:rPr kumimoji="1" lang="ja-JP" altLang="en-US" smtClean="0"/>
+              <a:rPr kumimoji="1" lang="ja-JP" altLang="en-US"/>
               <a:t>マスター タイトルの書式設定</a:t>
             </a:r>
-            <a:endParaRPr kumimoji="1" lang="ja-JP" altLang="en-US"/>
           </a:p>
         </p:txBody>
       </p:sp>
@@ -1234,70 +1223,69 @@
           <a:p>
             <a:pPr lvl="0"/>
             <a:r>
-              <a:rPr kumimoji="1" lang="ja-JP" altLang="en-US" smtClean="0"/>
+              <a:rPr kumimoji="1" lang="ja-JP" altLang="en-US"/>
               <a:t>マスター テキストの書式設定</a:t>
             </a:r>
           </a:p>
           <a:p>
             <a:pPr lvl="1"/>
             <a:r>
-              <a:rPr kumimoji="1" lang="ja-JP" altLang="en-US" smtClean="0"/>
+              <a:rPr kumimoji="1" lang="ja-JP" altLang="en-US"/>
               <a:t>第 </a:t>
             </a:r>
             <a:r>
-              <a:rPr kumimoji="1" lang="en-US" altLang="ja-JP" smtClean="0"/>
+              <a:rPr kumimoji="1" lang="en-US" altLang="ja-JP"/>
               <a:t>2 </a:t>
             </a:r>
             <a:r>
-              <a:rPr kumimoji="1" lang="ja-JP" altLang="en-US" smtClean="0"/>
+              <a:rPr kumimoji="1" lang="ja-JP" altLang="en-US"/>
               <a:t>レベル</a:t>
             </a:r>
           </a:p>
           <a:p>
             <a:pPr lvl="2"/>
             <a:r>
-              <a:rPr kumimoji="1" lang="ja-JP" altLang="en-US" smtClean="0"/>
+              <a:rPr kumimoji="1" lang="ja-JP" altLang="en-US"/>
               <a:t>第 </a:t>
             </a:r>
             <a:r>
-              <a:rPr kumimoji="1" lang="en-US" altLang="ja-JP" smtClean="0"/>
+              <a:rPr kumimoji="1" lang="en-US" altLang="ja-JP"/>
               <a:t>3 </a:t>
             </a:r>
             <a:r>
-              <a:rPr kumimoji="1" lang="ja-JP" altLang="en-US" smtClean="0"/>
+              <a:rPr kumimoji="1" lang="ja-JP" altLang="en-US"/>
               <a:t>レベル</a:t>
             </a:r>
           </a:p>
           <a:p>
             <a:pPr lvl="3"/>
             <a:r>
-              <a:rPr kumimoji="1" lang="ja-JP" altLang="en-US" smtClean="0"/>
+              <a:rPr kumimoji="1" lang="ja-JP" altLang="en-US"/>
               <a:t>第 </a:t>
             </a:r>
             <a:r>
-              <a:rPr kumimoji="1" lang="en-US" altLang="ja-JP" smtClean="0"/>
+              <a:rPr kumimoji="1" lang="en-US" altLang="ja-JP"/>
               <a:t>4 </a:t>
             </a:r>
             <a:r>
-              <a:rPr kumimoji="1" lang="ja-JP" altLang="en-US" smtClean="0"/>
+              <a:rPr kumimoji="1" lang="ja-JP" altLang="en-US"/>
               <a:t>レベル</a:t>
             </a:r>
           </a:p>
           <a:p>
             <a:pPr lvl="4"/>
             <a:r>
-              <a:rPr kumimoji="1" lang="ja-JP" altLang="en-US" smtClean="0"/>
+              <a:rPr kumimoji="1" lang="ja-JP" altLang="en-US"/>
               <a:t>第 </a:t>
             </a:r>
             <a:r>
-              <a:rPr kumimoji="1" lang="en-US" altLang="ja-JP" smtClean="0"/>
+              <a:rPr kumimoji="1" lang="en-US" altLang="ja-JP"/>
               <a:t>5 </a:t>
             </a:r>
             <a:r>
-              <a:rPr kumimoji="1" lang="ja-JP" altLang="en-US" smtClean="0"/>
+              <a:rPr kumimoji="1" lang="ja-JP" altLang="en-US"/>
               <a:t>レベル</a:t>
             </a:r>
-            <a:endParaRPr kumimoji="1" lang="ja-JP" altLang="en-US"/>
           </a:p>
         </p:txBody>
       </p:sp>
@@ -1323,70 +1311,69 @@
           <a:p>
             <a:pPr lvl="0"/>
             <a:r>
-              <a:rPr kumimoji="1" lang="ja-JP" altLang="en-US" smtClean="0"/>
+              <a:rPr kumimoji="1" lang="ja-JP" altLang="en-US"/>
               <a:t>マスター テキストの書式設定</a:t>
             </a:r>
           </a:p>
           <a:p>
             <a:pPr lvl="1"/>
             <a:r>
-              <a:rPr kumimoji="1" lang="ja-JP" altLang="en-US" smtClean="0"/>
+              <a:rPr kumimoji="1" lang="ja-JP" altLang="en-US"/>
               <a:t>第 </a:t>
             </a:r>
             <a:r>
-              <a:rPr kumimoji="1" lang="en-US" altLang="ja-JP" smtClean="0"/>
+              <a:rPr kumimoji="1" lang="en-US" altLang="ja-JP"/>
               <a:t>2 </a:t>
             </a:r>
             <a:r>
-              <a:rPr kumimoji="1" lang="ja-JP" altLang="en-US" smtClean="0"/>
+              <a:rPr kumimoji="1" lang="ja-JP" altLang="en-US"/>
               <a:t>レベル</a:t>
             </a:r>
           </a:p>
           <a:p>
             <a:pPr lvl="2"/>
             <a:r>
-              <a:rPr kumimoji="1" lang="ja-JP" altLang="en-US" smtClean="0"/>
+              <a:rPr kumimoji="1" lang="ja-JP" altLang="en-US"/>
               <a:t>第 </a:t>
             </a:r>
             <a:r>
-              <a:rPr kumimoji="1" lang="en-US" altLang="ja-JP" smtClean="0"/>
+              <a:rPr kumimoji="1" lang="en-US" altLang="ja-JP"/>
               <a:t>3 </a:t>
             </a:r>
             <a:r>
-              <a:rPr kumimoji="1" lang="ja-JP" altLang="en-US" smtClean="0"/>
+              <a:rPr kumimoji="1" lang="ja-JP" altLang="en-US"/>
               <a:t>レベル</a:t>
             </a:r>
           </a:p>
           <a:p>
             <a:pPr lvl="3"/>
             <a:r>
-              <a:rPr kumimoji="1" lang="ja-JP" altLang="en-US" smtClean="0"/>
+              <a:rPr kumimoji="1" lang="ja-JP" altLang="en-US"/>
               <a:t>第 </a:t>
             </a:r>
             <a:r>
-              <a:rPr kumimoji="1" lang="en-US" altLang="ja-JP" smtClean="0"/>
+              <a:rPr kumimoji="1" lang="en-US" altLang="ja-JP"/>
               <a:t>4 </a:t>
             </a:r>
             <a:r>
-              <a:rPr kumimoji="1" lang="ja-JP" altLang="en-US" smtClean="0"/>
+              <a:rPr kumimoji="1" lang="ja-JP" altLang="en-US"/>
               <a:t>レベル</a:t>
             </a:r>
           </a:p>
           <a:p>
             <a:pPr lvl="4"/>
             <a:r>
-              <a:rPr kumimoji="1" lang="ja-JP" altLang="en-US" smtClean="0"/>
+              <a:rPr kumimoji="1" lang="ja-JP" altLang="en-US"/>
               <a:t>第 </a:t>
             </a:r>
             <a:r>
-              <a:rPr kumimoji="1" lang="en-US" altLang="ja-JP" smtClean="0"/>
+              <a:rPr kumimoji="1" lang="en-US" altLang="ja-JP"/>
               <a:t>5 </a:t>
             </a:r>
             <a:r>
-              <a:rPr kumimoji="1" lang="ja-JP" altLang="en-US" smtClean="0"/>
+              <a:rPr kumimoji="1" lang="ja-JP" altLang="en-US"/>
               <a:t>レベル</a:t>
             </a:r>
-            <a:endParaRPr kumimoji="1" lang="ja-JP" altLang="en-US"/>
           </a:p>
         </p:txBody>
       </p:sp>
@@ -1407,7 +1394,7 @@
           <a:p>
             <a:fld id="{14472033-EBEF-4113-884E-480E233F66C8}" type="datetimeFigureOut">
               <a:rPr kumimoji="1" lang="ja-JP" altLang="en-US" smtClean="0"/>
-              <a:t>2026/4/17</a:t>
+              <a:t>2026/4/18</a:t>
             </a:fld>
             <a:endParaRPr kumimoji="1" lang="ja-JP" altLang="en-US"/>
           </a:p>
@@ -1506,10 +1493,9 @@
           <a:lstStyle/>
           <a:p>
             <a:r>
-              <a:rPr kumimoji="1" lang="ja-JP" altLang="en-US" smtClean="0"/>
+              <a:rPr kumimoji="1" lang="ja-JP" altLang="en-US"/>
               <a:t>マスター タイトルの書式設定</a:t>
             </a:r>
-            <a:endParaRPr kumimoji="1" lang="ja-JP" altLang="en-US"/>
           </a:p>
         </p:txBody>
       </p:sp>
@@ -1572,7 +1558,7 @@
           <a:p>
             <a:pPr lvl="0"/>
             <a:r>
-              <a:rPr kumimoji="1" lang="ja-JP" altLang="en-US" smtClean="0"/>
+              <a:rPr kumimoji="1" lang="ja-JP" altLang="en-US"/>
               <a:t>マスター テキストの書式設定</a:t>
             </a:r>
           </a:p>
@@ -1600,70 +1586,69 @@
           <a:p>
             <a:pPr lvl="0"/>
             <a:r>
-              <a:rPr kumimoji="1" lang="ja-JP" altLang="en-US" smtClean="0"/>
+              <a:rPr kumimoji="1" lang="ja-JP" altLang="en-US"/>
               <a:t>マスター テキストの書式設定</a:t>
             </a:r>
           </a:p>
           <a:p>
             <a:pPr lvl="1"/>
             <a:r>
-              <a:rPr kumimoji="1" lang="ja-JP" altLang="en-US" smtClean="0"/>
+              <a:rPr kumimoji="1" lang="ja-JP" altLang="en-US"/>
               <a:t>第 </a:t>
             </a:r>
             <a:r>
-              <a:rPr kumimoji="1" lang="en-US" altLang="ja-JP" smtClean="0"/>
+              <a:rPr kumimoji="1" lang="en-US" altLang="ja-JP"/>
               <a:t>2 </a:t>
             </a:r>
             <a:r>
-              <a:rPr kumimoji="1" lang="ja-JP" altLang="en-US" smtClean="0"/>
+              <a:rPr kumimoji="1" lang="ja-JP" altLang="en-US"/>
               <a:t>レベル</a:t>
             </a:r>
           </a:p>
           <a:p>
             <a:pPr lvl="2"/>
             <a:r>
-              <a:rPr kumimoji="1" lang="ja-JP" altLang="en-US" smtClean="0"/>
+              <a:rPr kumimoji="1" lang="ja-JP" altLang="en-US"/>
               <a:t>第 </a:t>
             </a:r>
             <a:r>
-              <a:rPr kumimoji="1" lang="en-US" altLang="ja-JP" smtClean="0"/>
+              <a:rPr kumimoji="1" lang="en-US" altLang="ja-JP"/>
               <a:t>3 </a:t>
             </a:r>
             <a:r>
-              <a:rPr kumimoji="1" lang="ja-JP" altLang="en-US" smtClean="0"/>
+              <a:rPr kumimoji="1" lang="ja-JP" altLang="en-US"/>
               <a:t>レベル</a:t>
             </a:r>
           </a:p>
           <a:p>
             <a:pPr lvl="3"/>
             <a:r>
-              <a:rPr kumimoji="1" lang="ja-JP" altLang="en-US" smtClean="0"/>
+              <a:rPr kumimoji="1" lang="ja-JP" altLang="en-US"/>
               <a:t>第 </a:t>
             </a:r>
             <a:r>
-              <a:rPr kumimoji="1" lang="en-US" altLang="ja-JP" smtClean="0"/>
+              <a:rPr kumimoji="1" lang="en-US" altLang="ja-JP"/>
               <a:t>4 </a:t>
             </a:r>
             <a:r>
-              <a:rPr kumimoji="1" lang="ja-JP" altLang="en-US" smtClean="0"/>
+              <a:rPr kumimoji="1" lang="ja-JP" altLang="en-US"/>
               <a:t>レベル</a:t>
             </a:r>
           </a:p>
           <a:p>
             <a:pPr lvl="4"/>
             <a:r>
-              <a:rPr kumimoji="1" lang="ja-JP" altLang="en-US" smtClean="0"/>
+              <a:rPr kumimoji="1" lang="ja-JP" altLang="en-US"/>
               <a:t>第 </a:t>
             </a:r>
             <a:r>
-              <a:rPr kumimoji="1" lang="en-US" altLang="ja-JP" smtClean="0"/>
+              <a:rPr kumimoji="1" lang="en-US" altLang="ja-JP"/>
               <a:t>5 </a:t>
             </a:r>
             <a:r>
-              <a:rPr kumimoji="1" lang="ja-JP" altLang="en-US" smtClean="0"/>
+              <a:rPr kumimoji="1" lang="ja-JP" altLang="en-US"/>
               <a:t>レベル</a:t>
             </a:r>
-            <a:endParaRPr kumimoji="1" lang="ja-JP" altLang="en-US"/>
           </a:p>
         </p:txBody>
       </p:sp>
@@ -1726,7 +1711,7 @@
           <a:p>
             <a:pPr lvl="0"/>
             <a:r>
-              <a:rPr kumimoji="1" lang="ja-JP" altLang="en-US" smtClean="0"/>
+              <a:rPr kumimoji="1" lang="ja-JP" altLang="en-US"/>
               <a:t>マスター テキストの書式設定</a:t>
             </a:r>
           </a:p>
@@ -1754,70 +1739,69 @@
           <a:p>
             <a:pPr lvl="0"/>
             <a:r>
-              <a:rPr kumimoji="1" lang="ja-JP" altLang="en-US" smtClean="0"/>
+              <a:rPr kumimoji="1" lang="ja-JP" altLang="en-US"/>
               <a:t>マスター テキストの書式設定</a:t>
             </a:r>
           </a:p>
           <a:p>
             <a:pPr lvl="1"/>
             <a:r>
-              <a:rPr kumimoji="1" lang="ja-JP" altLang="en-US" smtClean="0"/>
+              <a:rPr kumimoji="1" lang="ja-JP" altLang="en-US"/>
               <a:t>第 </a:t>
             </a:r>
             <a:r>
-              <a:rPr kumimoji="1" lang="en-US" altLang="ja-JP" smtClean="0"/>
+              <a:rPr kumimoji="1" lang="en-US" altLang="ja-JP"/>
               <a:t>2 </a:t>
             </a:r>
             <a:r>
-              <a:rPr kumimoji="1" lang="ja-JP" altLang="en-US" smtClean="0"/>
+              <a:rPr kumimoji="1" lang="ja-JP" altLang="en-US"/>
               <a:t>レベル</a:t>
             </a:r>
           </a:p>
           <a:p>
             <a:pPr lvl="2"/>
             <a:r>
-              <a:rPr kumimoji="1" lang="ja-JP" altLang="en-US" smtClean="0"/>
+              <a:rPr kumimoji="1" lang="ja-JP" altLang="en-US"/>
               <a:t>第 </a:t>
             </a:r>
             <a:r>
-              <a:rPr kumimoji="1" lang="en-US" altLang="ja-JP" smtClean="0"/>
+              <a:rPr kumimoji="1" lang="en-US" altLang="ja-JP"/>
               <a:t>3 </a:t>
             </a:r>
             <a:r>
-              <a:rPr kumimoji="1" lang="ja-JP" altLang="en-US" smtClean="0"/>
+              <a:rPr kumimoji="1" lang="ja-JP" altLang="en-US"/>
               <a:t>レベル</a:t>
             </a:r>
           </a:p>
           <a:p>
             <a:pPr lvl="3"/>
             <a:r>
-              <a:rPr kumimoji="1" lang="ja-JP" altLang="en-US" smtClean="0"/>
+              <a:rPr kumimoji="1" lang="ja-JP" altLang="en-US"/>
               <a:t>第 </a:t>
             </a:r>
             <a:r>
-              <a:rPr kumimoji="1" lang="en-US" altLang="ja-JP" smtClean="0"/>
+              <a:rPr kumimoji="1" lang="en-US" altLang="ja-JP"/>
               <a:t>4 </a:t>
             </a:r>
             <a:r>
-              <a:rPr kumimoji="1" lang="ja-JP" altLang="en-US" smtClean="0"/>
+              <a:rPr kumimoji="1" lang="ja-JP" altLang="en-US"/>
               <a:t>レベル</a:t>
             </a:r>
           </a:p>
           <a:p>
             <a:pPr lvl="4"/>
             <a:r>
-              <a:rPr kumimoji="1" lang="ja-JP" altLang="en-US" smtClean="0"/>
+              <a:rPr kumimoji="1" lang="ja-JP" altLang="en-US"/>
               <a:t>第 </a:t>
             </a:r>
             <a:r>
-              <a:rPr kumimoji="1" lang="en-US" altLang="ja-JP" smtClean="0"/>
+              <a:rPr kumimoji="1" lang="en-US" altLang="ja-JP"/>
               <a:t>5 </a:t>
             </a:r>
             <a:r>
-              <a:rPr kumimoji="1" lang="ja-JP" altLang="en-US" smtClean="0"/>
+              <a:rPr kumimoji="1" lang="ja-JP" altLang="en-US"/>
               <a:t>レベル</a:t>
             </a:r>
-            <a:endParaRPr kumimoji="1" lang="ja-JP" altLang="en-US"/>
           </a:p>
         </p:txBody>
       </p:sp>
@@ -1838,7 +1822,7 @@
           <a:p>
             <a:fld id="{14472033-EBEF-4113-884E-480E233F66C8}" type="datetimeFigureOut">
               <a:rPr kumimoji="1" lang="ja-JP" altLang="en-US" smtClean="0"/>
-              <a:t>2026/4/17</a:t>
+              <a:t>2026/4/18</a:t>
             </a:fld>
             <a:endParaRPr kumimoji="1" lang="ja-JP" altLang="en-US"/>
           </a:p>
@@ -1932,10 +1916,9 @@
           <a:lstStyle/>
           <a:p>
             <a:r>
-              <a:rPr kumimoji="1" lang="ja-JP" altLang="en-US" smtClean="0"/>
+              <a:rPr kumimoji="1" lang="ja-JP" altLang="en-US"/>
               <a:t>マスター タイトルの書式設定</a:t>
             </a:r>
-            <a:endParaRPr kumimoji="1" lang="ja-JP" altLang="en-US"/>
           </a:p>
         </p:txBody>
       </p:sp>
@@ -1956,7 +1939,7 @@
           <a:p>
             <a:fld id="{14472033-EBEF-4113-884E-480E233F66C8}" type="datetimeFigureOut">
               <a:rPr kumimoji="1" lang="ja-JP" altLang="en-US" smtClean="0"/>
-              <a:t>2026/4/17</a:t>
+              <a:t>2026/4/18</a:t>
             </a:fld>
             <a:endParaRPr kumimoji="1" lang="ja-JP" altLang="en-US"/>
           </a:p>
@@ -2051,7 +2034,7 @@
           <a:p>
             <a:fld id="{14472033-EBEF-4113-884E-480E233F66C8}" type="datetimeFigureOut">
               <a:rPr kumimoji="1" lang="ja-JP" altLang="en-US" smtClean="0"/>
-              <a:t>2026/4/17</a:t>
+              <a:t>2026/4/18</a:t>
             </a:fld>
             <a:endParaRPr kumimoji="1" lang="ja-JP" altLang="en-US"/>
           </a:p>
@@ -2154,10 +2137,9 @@
           </a:lstStyle>
           <a:p>
             <a:r>
-              <a:rPr kumimoji="1" lang="ja-JP" altLang="en-US" smtClean="0"/>
+              <a:rPr kumimoji="1" lang="ja-JP" altLang="en-US"/>
               <a:t>マスター タイトルの書式設定</a:t>
             </a:r>
-            <a:endParaRPr kumimoji="1" lang="ja-JP" altLang="en-US"/>
           </a:p>
         </p:txBody>
       </p:sp>
@@ -2211,70 +2193,69 @@
           <a:p>
             <a:pPr lvl="0"/>
             <a:r>
-              <a:rPr kumimoji="1" lang="ja-JP" altLang="en-US" smtClean="0"/>
+              <a:rPr kumimoji="1" lang="ja-JP" altLang="en-US"/>
               <a:t>マスター テキストの書式設定</a:t>
             </a:r>
           </a:p>
           <a:p>
             <a:pPr lvl="1"/>
             <a:r>
-              <a:rPr kumimoji="1" lang="ja-JP" altLang="en-US" smtClean="0"/>
+              <a:rPr kumimoji="1" lang="ja-JP" altLang="en-US"/>
               <a:t>第 </a:t>
             </a:r>
             <a:r>
-              <a:rPr kumimoji="1" lang="en-US" altLang="ja-JP" smtClean="0"/>
+              <a:rPr kumimoji="1" lang="en-US" altLang="ja-JP"/>
               <a:t>2 </a:t>
             </a:r>
             <a:r>
-              <a:rPr kumimoji="1" lang="ja-JP" altLang="en-US" smtClean="0"/>
+              <a:rPr kumimoji="1" lang="ja-JP" altLang="en-US"/>
               <a:t>レベル</a:t>
             </a:r>
           </a:p>
           <a:p>
             <a:pPr lvl="2"/>
             <a:r>
-              <a:rPr kumimoji="1" lang="ja-JP" altLang="en-US" smtClean="0"/>
+              <a:rPr kumimoji="1" lang="ja-JP" altLang="en-US"/>
               <a:t>第 </a:t>
             </a:r>
             <a:r>
-              <a:rPr kumimoji="1" lang="en-US" altLang="ja-JP" smtClean="0"/>
+              <a:rPr kumimoji="1" lang="en-US" altLang="ja-JP"/>
               <a:t>3 </a:t>
             </a:r>
             <a:r>
-              <a:rPr kumimoji="1" lang="ja-JP" altLang="en-US" smtClean="0"/>
+              <a:rPr kumimoji="1" lang="ja-JP" altLang="en-US"/>
               <a:t>レベル</a:t>
             </a:r>
           </a:p>
           <a:p>
             <a:pPr lvl="3"/>
             <a:r>
-              <a:rPr kumimoji="1" lang="ja-JP" altLang="en-US" smtClean="0"/>
+              <a:rPr kumimoji="1" lang="ja-JP" altLang="en-US"/>
               <a:t>第 </a:t>
             </a:r>
             <a:r>
-              <a:rPr kumimoji="1" lang="en-US" altLang="ja-JP" smtClean="0"/>
+              <a:rPr kumimoji="1" lang="en-US" altLang="ja-JP"/>
               <a:t>4 </a:t>
             </a:r>
             <a:r>
-              <a:rPr kumimoji="1" lang="ja-JP" altLang="en-US" smtClean="0"/>
+              <a:rPr kumimoji="1" lang="ja-JP" altLang="en-US"/>
               <a:t>レベル</a:t>
             </a:r>
           </a:p>
           <a:p>
             <a:pPr lvl="4"/>
             <a:r>
-              <a:rPr kumimoji="1" lang="ja-JP" altLang="en-US" smtClean="0"/>
+              <a:rPr kumimoji="1" lang="ja-JP" altLang="en-US"/>
               <a:t>第 </a:t>
             </a:r>
             <a:r>
-              <a:rPr kumimoji="1" lang="en-US" altLang="ja-JP" smtClean="0"/>
+              <a:rPr kumimoji="1" lang="en-US" altLang="ja-JP"/>
               <a:t>5 </a:t>
             </a:r>
             <a:r>
-              <a:rPr kumimoji="1" lang="ja-JP" altLang="en-US" smtClean="0"/>
+              <a:rPr kumimoji="1" lang="ja-JP" altLang="en-US"/>
               <a:t>レベル</a:t>
             </a:r>
-            <a:endParaRPr kumimoji="1" lang="ja-JP" altLang="en-US"/>
           </a:p>
         </p:txBody>
       </p:sp>
@@ -2337,7 +2318,7 @@
           <a:p>
             <a:pPr lvl="0"/>
             <a:r>
-              <a:rPr kumimoji="1" lang="ja-JP" altLang="en-US" smtClean="0"/>
+              <a:rPr kumimoji="1" lang="ja-JP" altLang="en-US"/>
               <a:t>マスター テキストの書式設定</a:t>
             </a:r>
           </a:p>
@@ -2360,7 +2341,7 @@
           <a:p>
             <a:fld id="{14472033-EBEF-4113-884E-480E233F66C8}" type="datetimeFigureOut">
               <a:rPr kumimoji="1" lang="ja-JP" altLang="en-US" smtClean="0"/>
-              <a:t>2026/4/17</a:t>
+              <a:t>2026/4/18</a:t>
             </a:fld>
             <a:endParaRPr kumimoji="1" lang="ja-JP" altLang="en-US"/>
           </a:p>
@@ -2463,10 +2444,9 @@
           </a:lstStyle>
           <a:p>
             <a:r>
-              <a:rPr kumimoji="1" lang="ja-JP" altLang="en-US" smtClean="0"/>
+              <a:rPr kumimoji="1" lang="ja-JP" altLang="en-US"/>
               <a:t>マスター タイトルの書式設定</a:t>
             </a:r>
-            <a:endParaRPr kumimoji="1" lang="ja-JP" altLang="en-US"/>
           </a:p>
         </p:txBody>
       </p:sp>
@@ -2590,7 +2570,7 @@
           <a:p>
             <a:pPr lvl="0"/>
             <a:r>
-              <a:rPr kumimoji="1" lang="ja-JP" altLang="en-US" smtClean="0"/>
+              <a:rPr kumimoji="1" lang="ja-JP" altLang="en-US"/>
               <a:t>マスター テキストの書式設定</a:t>
             </a:r>
           </a:p>
@@ -2613,7 +2593,7 @@
           <a:p>
             <a:fld id="{14472033-EBEF-4113-884E-480E233F66C8}" type="datetimeFigureOut">
               <a:rPr kumimoji="1" lang="ja-JP" altLang="en-US" smtClean="0"/>
-              <a:t>2026/4/17</a:t>
+              <a:t>2026/4/18</a:t>
             </a:fld>
             <a:endParaRPr kumimoji="1" lang="ja-JP" altLang="en-US"/>
           </a:p>
@@ -2722,10 +2702,9 @@
           <a:lstStyle/>
           <a:p>
             <a:r>
-              <a:rPr kumimoji="1" lang="ja-JP" altLang="en-US" smtClean="0"/>
+              <a:rPr kumimoji="1" lang="ja-JP" altLang="en-US"/>
               <a:t>マスター タイトルの書式設定</a:t>
             </a:r>
-            <a:endParaRPr kumimoji="1" lang="ja-JP" altLang="en-US"/>
           </a:p>
         </p:txBody>
       </p:sp>
@@ -2756,70 +2735,69 @@
           <a:p>
             <a:pPr lvl="0"/>
             <a:r>
-              <a:rPr kumimoji="1" lang="ja-JP" altLang="en-US" smtClean="0"/>
+              <a:rPr kumimoji="1" lang="ja-JP" altLang="en-US"/>
               <a:t>マスター テキストの書式設定</a:t>
             </a:r>
           </a:p>
           <a:p>
             <a:pPr lvl="1"/>
             <a:r>
-              <a:rPr kumimoji="1" lang="ja-JP" altLang="en-US" smtClean="0"/>
+              <a:rPr kumimoji="1" lang="ja-JP" altLang="en-US"/>
               <a:t>第 </a:t>
             </a:r>
             <a:r>
-              <a:rPr kumimoji="1" lang="en-US" altLang="ja-JP" smtClean="0"/>
+              <a:rPr kumimoji="1" lang="en-US" altLang="ja-JP"/>
               <a:t>2 </a:t>
             </a:r>
             <a:r>
-              <a:rPr kumimoji="1" lang="ja-JP" altLang="en-US" smtClean="0"/>
+              <a:rPr kumimoji="1" lang="ja-JP" altLang="en-US"/>
               <a:t>レベル</a:t>
             </a:r>
           </a:p>
           <a:p>
             <a:pPr lvl="2"/>
             <a:r>
-              <a:rPr kumimoji="1" lang="ja-JP" altLang="en-US" smtClean="0"/>
+              <a:rPr kumimoji="1" lang="ja-JP" altLang="en-US"/>
               <a:t>第 </a:t>
             </a:r>
             <a:r>
-              <a:rPr kumimoji="1" lang="en-US" altLang="ja-JP" smtClean="0"/>
+              <a:rPr kumimoji="1" lang="en-US" altLang="ja-JP"/>
               <a:t>3 </a:t>
             </a:r>
             <a:r>
-              <a:rPr kumimoji="1" lang="ja-JP" altLang="en-US" smtClean="0"/>
+              <a:rPr kumimoji="1" lang="ja-JP" altLang="en-US"/>
               <a:t>レベル</a:t>
             </a:r>
           </a:p>
           <a:p>
             <a:pPr lvl="3"/>
             <a:r>
-              <a:rPr kumimoji="1" lang="ja-JP" altLang="en-US" smtClean="0"/>
+              <a:rPr kumimoji="1" lang="ja-JP" altLang="en-US"/>
               <a:t>第 </a:t>
             </a:r>
             <a:r>
-              <a:rPr kumimoji="1" lang="en-US" altLang="ja-JP" smtClean="0"/>
+              <a:rPr kumimoji="1" lang="en-US" altLang="ja-JP"/>
               <a:t>4 </a:t>
             </a:r>
             <a:r>
-              <a:rPr kumimoji="1" lang="ja-JP" altLang="en-US" smtClean="0"/>
+              <a:rPr kumimoji="1" lang="ja-JP" altLang="en-US"/>
               <a:t>レベル</a:t>
             </a:r>
           </a:p>
           <a:p>
             <a:pPr lvl="4"/>
             <a:r>
-              <a:rPr kumimoji="1" lang="ja-JP" altLang="en-US" smtClean="0"/>
+              <a:rPr kumimoji="1" lang="ja-JP" altLang="en-US"/>
               <a:t>第 </a:t>
             </a:r>
             <a:r>
-              <a:rPr kumimoji="1" lang="en-US" altLang="ja-JP" smtClean="0"/>
+              <a:rPr kumimoji="1" lang="en-US" altLang="ja-JP"/>
               <a:t>5 </a:t>
             </a:r>
             <a:r>
-              <a:rPr kumimoji="1" lang="ja-JP" altLang="en-US" smtClean="0"/>
+              <a:rPr kumimoji="1" lang="ja-JP" altLang="en-US"/>
               <a:t>レベル</a:t>
             </a:r>
-            <a:endParaRPr kumimoji="1" lang="ja-JP" altLang="en-US"/>
           </a:p>
         </p:txBody>
       </p:sp>
@@ -2858,7 +2836,7 @@
           <a:p>
             <a:fld id="{14472033-EBEF-4113-884E-480E233F66C8}" type="datetimeFigureOut">
               <a:rPr kumimoji="1" lang="ja-JP" altLang="en-US" smtClean="0"/>
-              <a:t>2026/4/17</a:t>
+              <a:t>2026/4/18</a:t>
             </a:fld>
             <a:endParaRPr kumimoji="1" lang="ja-JP" altLang="en-US"/>
           </a:p>
@@ -3284,7 +3262,7 @@
           <a:lstStyle/>
           <a:p>
             <a:r>
-              <a:rPr lang="en-US" altLang="ja-JP" dirty="0" err="1" smtClean="0"/>
+              <a:rPr lang="en-US" altLang="ja-JP" dirty="0" err="1"/>
               <a:t>FarmLife</a:t>
             </a:r>
             <a:endParaRPr kumimoji="1" lang="ja-JP" altLang="en-US" dirty="0"/>
@@ -3312,28 +3290,28 @@
           <a:lstStyle/>
           <a:p>
             <a:r>
-              <a:rPr kumimoji="1" lang="en-US" altLang="ja-JP" dirty="0" err="1" smtClean="0"/>
+              <a:rPr kumimoji="1" lang="en-US" altLang="ja-JP" dirty="0" err="1"/>
               <a:t>UnrealEngin</a:t>
             </a:r>
             <a:r>
-              <a:rPr kumimoji="1" lang="en-US" altLang="ja-JP" dirty="0" smtClean="0"/>
+              <a:rPr kumimoji="1" lang="en-US" altLang="ja-JP" dirty="0"/>
               <a:t> 5.5.4</a:t>
             </a:r>
           </a:p>
           <a:p>
             <a:r>
-              <a:rPr lang="ja-JP" altLang="en-US" dirty="0" smtClean="0"/>
+              <a:rPr lang="ja-JP" altLang="en-US" dirty="0"/>
               <a:t>ジャンル　</a:t>
             </a:r>
             <a:r>
-              <a:rPr lang="en-US" altLang="ja-JP" dirty="0" smtClean="0"/>
+              <a:rPr lang="en-US" altLang="ja-JP" dirty="0"/>
               <a:t>3D</a:t>
             </a:r>
             <a:r>
-              <a:rPr lang="ja-JP" altLang="en-US" dirty="0" smtClean="0"/>
+              <a:rPr lang="ja-JP" altLang="en-US" dirty="0"/>
               <a:t>クリック採取ゲーム</a:t>
             </a:r>
-            <a:endParaRPr lang="en-US" altLang="ja-JP" dirty="0" smtClean="0"/>
+            <a:endParaRPr lang="en-US" altLang="ja-JP" dirty="0"/>
           </a:p>
         </p:txBody>
       </p:sp>
@@ -3360,7 +3338,7 @@
           <a:lstStyle/>
           <a:p>
             <a:r>
-              <a:rPr lang="ja-JP" altLang="en-US" dirty="0" smtClean="0"/>
+              <a:rPr lang="ja-JP" altLang="en-US" dirty="0"/>
               <a:t>河野　拓実</a:t>
             </a:r>
             <a:endParaRPr kumimoji="1" lang="ja-JP" altLang="en-US" dirty="0"/>
@@ -3377,13 +3355,6 @@
   <p:clrMapOvr>
     <a:masterClrMapping/>
   </p:clrMapOvr>
-  <p:timing>
-    <p:tnLst>
-      <p:par>
-        <p:cTn id="1" dur="indefinite" restart="never" nodeType="tmRoot"/>
-      </p:par>
-    </p:tnLst>
-  </p:timing>
 </p:sld>
 </file>
 
@@ -3420,10 +3391,9 @@
           <a:lstStyle/>
           <a:p>
             <a:r>
-              <a:rPr kumimoji="1" lang="ja-JP" altLang="en-US" dirty="0" smtClean="0"/>
+              <a:rPr kumimoji="1" lang="ja-JP" altLang="en-US" dirty="0"/>
               <a:t>ゲームの目的</a:t>
             </a:r>
-            <a:endParaRPr kumimoji="1" lang="ja-JP" altLang="en-US" dirty="0"/>
           </a:p>
         </p:txBody>
       </p:sp>
@@ -3445,19 +3415,19 @@
         </p:spPr>
         <p:txBody>
           <a:bodyPr>
-            <a:normAutofit fontScale="85000" lnSpcReduction="20000"/>
+            <a:normAutofit/>
           </a:bodyPr>
           <a:lstStyle/>
           <a:p>
             <a:r>
-              <a:rPr kumimoji="1" lang="ja-JP" altLang="en-US" dirty="0" smtClean="0"/>
+              <a:rPr kumimoji="1" lang="ja-JP" altLang="en-US" dirty="0"/>
               <a:t>畑に生成される作物を制限時間内に多く採取し、得たお金で自身を強化することでより稼ぎやすくする</a:t>
             </a:r>
             <a:r>
-              <a:rPr lang="ja-JP" altLang="en-US" dirty="0" smtClean="0"/>
+              <a:rPr lang="ja-JP" altLang="en-US" dirty="0"/>
               <a:t>。</a:t>
             </a:r>
-            <a:endParaRPr lang="en-US" altLang="ja-JP" dirty="0" smtClean="0"/>
+            <a:endParaRPr lang="en-US" altLang="ja-JP" dirty="0"/>
           </a:p>
           <a:p>
             <a:endParaRPr lang="en-US" altLang="ja-JP" dirty="0"/>
@@ -3476,80 +3446,19 @@
             </a:r>
             <a:r>
               <a:rPr lang="ja-JP" altLang="en-US" dirty="0"/>
-              <a:t>ゴールド稼ぎ</a:t>
-            </a:r>
-            <a:r>
-              <a:rPr lang="ja-JP" altLang="en-US" dirty="0" smtClean="0"/>
-              <a:t>、家を完全修理と</a:t>
-            </a:r>
+              <a:t>ゴールド稼ぎ、家を完全修理というパークを取得することでクリア</a:t>
+            </a:r>
+            <a:endParaRPr lang="en-US" altLang="ja-JP" dirty="0"/>
+          </a:p>
+          <a:p>
             <a:r>
               <a:rPr lang="ja-JP" altLang="en-US" dirty="0"/>
-              <a:t>いうパークを取得することで</a:t>
-            </a:r>
-            <a:r>
-              <a:rPr lang="ja-JP" altLang="en-US" dirty="0" smtClean="0"/>
-              <a:t>クリア</a:t>
-            </a:r>
-            <a:endParaRPr lang="en-US" altLang="ja-JP" dirty="0" smtClean="0"/>
-          </a:p>
-          <a:p>
-            <a:r>
-              <a:rPr lang="ja-JP" altLang="en-US" dirty="0" smtClean="0"/>
-              <a:t>クリア</a:t>
-            </a:r>
-            <a:r>
-              <a:rPr lang="ja-JP" altLang="en-US" dirty="0" smtClean="0"/>
-              <a:t>時点の経過時間、採取した作物</a:t>
-            </a:r>
-            <a:r>
-              <a:rPr lang="ja-JP" altLang="en-US" dirty="0" smtClean="0"/>
-              <a:t>の合計</a:t>
-            </a:r>
-            <a:r>
-              <a:rPr lang="ja-JP" altLang="en-US" dirty="0" smtClean="0"/>
-              <a:t>個数</a:t>
-            </a:r>
-            <a:r>
-              <a:rPr lang="ja-JP" altLang="en-US" dirty="0" smtClean="0"/>
-              <a:t>で</a:t>
-            </a:r>
-            <a:r>
-              <a:rPr lang="ja-JP" altLang="en-US" dirty="0" smtClean="0"/>
-              <a:t>スコアが決まりランク付けされる</a:t>
-            </a:r>
-            <a:r>
-              <a:rPr lang="ja-JP" altLang="en-US" dirty="0" smtClean="0"/>
-              <a:t>。早く、少ない個数でクリアするほど高得点を得れる</a:t>
+              <a:t>クリア時点の経過時間、採取した作物の合計個数でスコアが決まりランク付けされる。早く、少ない個数でクリアするほど高得点を得れる</a:t>
             </a:r>
             <a:endParaRPr lang="en-US" altLang="ja-JP" dirty="0"/>
           </a:p>
           <a:p>
             <a:endParaRPr kumimoji="1" lang="en-US" altLang="ja-JP" dirty="0"/>
-          </a:p>
-          <a:p>
-            <a:r>
-              <a:rPr lang="ja-JP" altLang="en-US" dirty="0" smtClean="0"/>
-              <a:t>ゲームの特色</a:t>
-            </a:r>
-            <a:endParaRPr lang="en-US" altLang="ja-JP" dirty="0" smtClean="0"/>
-          </a:p>
-          <a:p>
-            <a:r>
-              <a:rPr kumimoji="1" lang="ja-JP" altLang="en-US" dirty="0" smtClean="0"/>
-              <a:t>３Ｄの一人称視点で、自分で移動しなければいけないので</a:t>
-            </a:r>
-            <a:r>
-              <a:rPr lang="ja-JP" altLang="en-US" dirty="0" smtClean="0"/>
-              <a:t>動き方によってどのくらい早く稼げるのか変わってくるところ。</a:t>
-            </a:r>
-            <a:endParaRPr lang="en-US" altLang="ja-JP" dirty="0" smtClean="0"/>
-          </a:p>
-          <a:p>
-            <a:r>
-              <a:rPr kumimoji="1" lang="ja-JP" altLang="en-US" dirty="0" smtClean="0"/>
-              <a:t>採取するための鍬に耐久力があり、持っている鍬によって採取できる作物が変わる。</a:t>
-            </a:r>
-            <a:endParaRPr kumimoji="1" lang="en-US" altLang="ja-JP" dirty="0" smtClean="0"/>
           </a:p>
         </p:txBody>
       </p:sp>
@@ -3563,13 +3472,6 @@
   <p:clrMapOvr>
     <a:masterClrMapping/>
   </p:clrMapOvr>
-  <p:timing>
-    <p:tnLst>
-      <p:par>
-        <p:cTn id="1" dur="indefinite" restart="never" nodeType="tmRoot"/>
-      </p:par>
-    </p:tnLst>
-  </p:timing>
 </p:sld>
 </file>
 
@@ -3606,10 +3508,9 @@
           <a:lstStyle/>
           <a:p>
             <a:r>
-              <a:rPr kumimoji="1" lang="ja-JP" altLang="en-US" dirty="0" smtClean="0"/>
+              <a:rPr kumimoji="1" lang="ja-JP" altLang="en-US" dirty="0"/>
               <a:t>ゲームの大まかな動き</a:t>
             </a:r>
-            <a:endParaRPr kumimoji="1" lang="ja-JP" altLang="en-US" dirty="0"/>
           </a:p>
         </p:txBody>
       </p:sp>
@@ -3631,129 +3532,283 @@
         </p:spPr>
         <p:txBody>
           <a:bodyPr>
-            <a:normAutofit fontScale="92500" lnSpcReduction="10000"/>
+            <a:normAutofit/>
           </a:bodyPr>
           <a:lstStyle/>
           <a:p>
-            <a:r>
-              <a:rPr lang="ja-JP" altLang="en-US" dirty="0" smtClean="0"/>
-              <a:t>採取パートと</a:t>
-            </a:r>
             <a:r>
               <a:rPr lang="ja-JP" altLang="en-US" dirty="0"/>
               <a:t>購入</a:t>
             </a:r>
             <a:r>
-              <a:rPr lang="ja-JP" altLang="en-US" dirty="0" smtClean="0"/>
-              <a:t>パートがある</a:t>
+              <a:rPr kumimoji="1" lang="ja-JP" altLang="en-US" dirty="0"/>
+              <a:t>パートでパークを購入して自分を強化していく。</a:t>
+            </a:r>
+            <a:endParaRPr kumimoji="1" lang="en-US" altLang="ja-JP" dirty="0"/>
+          </a:p>
+          <a:p>
+            <a:r>
+              <a:rPr lang="ja-JP" altLang="en-US" dirty="0"/>
+              <a:t>採取する鍬の耐久値がなくなったらお金を消費して新しく買わなければならない</a:t>
             </a:r>
             <a:endParaRPr lang="en-US" altLang="ja-JP" dirty="0"/>
           </a:p>
           <a:p>
             <a:r>
               <a:rPr lang="ja-JP" altLang="en-US" dirty="0"/>
-              <a:t>お金</a:t>
-            </a:r>
-            <a:r>
-              <a:rPr lang="ja-JP" altLang="en-US" dirty="0" smtClean="0"/>
-              <a:t>を得るための</a:t>
-            </a:r>
-            <a:r>
-              <a:rPr lang="ja-JP" altLang="en-US" dirty="0" smtClean="0"/>
-              <a:t>畑</a:t>
-            </a:r>
-            <a:endParaRPr lang="en-US" altLang="ja-JP" dirty="0" smtClean="0"/>
-          </a:p>
-          <a:p>
-            <a:r>
-              <a:rPr lang="ja-JP" altLang="en-US" dirty="0" smtClean="0"/>
-              <a:t>パーク</a:t>
-            </a:r>
-            <a:r>
-              <a:rPr lang="ja-JP" altLang="en-US" dirty="0" smtClean="0"/>
-              <a:t>、鍬を買うための</a:t>
-            </a:r>
-            <a:r>
-              <a:rPr lang="ja-JP" altLang="en-US" dirty="0"/>
-              <a:t>店</a:t>
-            </a:r>
-            <a:r>
-              <a:rPr lang="ja-JP" altLang="en-US" dirty="0" smtClean="0"/>
-              <a:t>が</a:t>
-            </a:r>
-            <a:r>
-              <a:rPr lang="ja-JP" altLang="en-US" dirty="0"/>
-              <a:t>同</a:t>
-            </a:r>
-            <a:r>
-              <a:rPr lang="ja-JP" altLang="en-US" dirty="0" smtClean="0"/>
-              <a:t>マップ内</a:t>
-            </a:r>
-            <a:r>
-              <a:rPr lang="ja-JP" altLang="en-US" dirty="0" smtClean="0"/>
-              <a:t>にある</a:t>
-            </a:r>
-            <a:endParaRPr lang="en-US" altLang="ja-JP" dirty="0" smtClean="0"/>
-          </a:p>
-          <a:p>
-            <a:r>
-              <a:rPr lang="ja-JP" altLang="en-US" dirty="0"/>
+              <a:t>鍬が壊れている状態で新しい鍬が買えない場合ゲームオーバーになる。</a:t>
+            </a:r>
+            <a:endParaRPr kumimoji="1" lang="en-US" altLang="ja-JP" dirty="0"/>
+          </a:p>
+          <a:p>
+            <a:endParaRPr kumimoji="1" lang="en-US" altLang="ja-JP" dirty="0"/>
+          </a:p>
+        </p:txBody>
+      </p:sp>
+      <p:sp>
+        <p:nvSpPr>
+          <p:cNvPr id="4" name="正方形/長方形 3">
+            <a:extLst>
+              <a:ext uri="{FF2B5EF4-FFF2-40B4-BE49-F238E27FC236}">
+                <a16:creationId xmlns:a16="http://schemas.microsoft.com/office/drawing/2014/main" id="{1B9A147A-8F59-CEFA-CC2A-93699956386C}"/>
+              </a:ext>
+            </a:extLst>
+          </p:cNvPr>
+          <p:cNvSpPr/>
+          <p:nvPr/>
+        </p:nvSpPr>
+        <p:spPr>
+          <a:xfrm>
+            <a:off x="995881" y="4874005"/>
+            <a:ext cx="2109458" cy="1689757"/>
+          </a:xfrm>
+          <a:prstGeom prst="rect">
+            <a:avLst/>
+          </a:prstGeom>
+          <a:solidFill>
+            <a:srgbClr val="92D050"/>
+          </a:solidFill>
+        </p:spPr>
+        <p:style>
+          <a:lnRef idx="2">
+            <a:schemeClr val="accent1">
+              <a:shade val="15000"/>
+            </a:schemeClr>
+          </a:lnRef>
+          <a:fillRef idx="1">
+            <a:schemeClr val="accent1"/>
+          </a:fillRef>
+          <a:effectRef idx="0">
+            <a:schemeClr val="accent1"/>
+          </a:effectRef>
+          <a:fontRef idx="minor">
+            <a:schemeClr val="lt1"/>
+          </a:fontRef>
+        </p:style>
+        <p:txBody>
+          <a:bodyPr rtlCol="0" anchor="ctr"/>
+          <a:lstStyle/>
+          <a:p>
+            <a:pPr algn="ctr"/>
+            <a:r>
+              <a:rPr kumimoji="1" lang="ja-JP" altLang="en-US" sz="2400" dirty="0"/>
+              <a:t>採取パート</a:t>
+            </a:r>
+          </a:p>
+        </p:txBody>
+      </p:sp>
+      <p:sp>
+        <p:nvSpPr>
+          <p:cNvPr id="9" name="正方形/長方形 8">
+            <a:extLst>
+              <a:ext uri="{FF2B5EF4-FFF2-40B4-BE49-F238E27FC236}">
+                <a16:creationId xmlns:a16="http://schemas.microsoft.com/office/drawing/2014/main" id="{A7333689-DC3C-3E7F-DA67-4749C70D7186}"/>
+              </a:ext>
+            </a:extLst>
+          </p:cNvPr>
+          <p:cNvSpPr/>
+          <p:nvPr/>
+        </p:nvSpPr>
+        <p:spPr>
+          <a:xfrm>
+            <a:off x="7852373" y="4874005"/>
+            <a:ext cx="2109458" cy="1689757"/>
+          </a:xfrm>
+          <a:prstGeom prst="rect">
+            <a:avLst/>
+          </a:prstGeom>
+          <a:solidFill>
+            <a:srgbClr val="FF0000"/>
+          </a:solidFill>
+        </p:spPr>
+        <p:style>
+          <a:lnRef idx="2">
+            <a:schemeClr val="accent1">
+              <a:shade val="15000"/>
+            </a:schemeClr>
+          </a:lnRef>
+          <a:fillRef idx="1">
+            <a:schemeClr val="accent1"/>
+          </a:fillRef>
+          <a:effectRef idx="0">
+            <a:schemeClr val="accent1"/>
+          </a:effectRef>
+          <a:fontRef idx="minor">
+            <a:schemeClr val="lt1"/>
+          </a:fontRef>
+        </p:style>
+        <p:txBody>
+          <a:bodyPr rtlCol="0" anchor="ctr"/>
+          <a:lstStyle/>
+          <a:p>
+            <a:pPr algn="ctr"/>
+            <a:r>
+              <a:rPr lang="ja-JP" altLang="en-US" sz="2400" dirty="0"/>
               <a:t>購入</a:t>
             </a:r>
             <a:r>
-              <a:rPr kumimoji="1" lang="ja-JP" altLang="en-US" dirty="0" smtClean="0"/>
-              <a:t>パートでパークを購入して自分を強化していく。</a:t>
-            </a:r>
-            <a:endParaRPr kumimoji="1" lang="en-US" altLang="ja-JP" dirty="0" smtClean="0"/>
-          </a:p>
-          <a:p>
-            <a:r>
-              <a:rPr lang="ja-JP" altLang="en-US" dirty="0" smtClean="0"/>
-              <a:t>採取する鍬の耐久値がなくなったらお金を消費して新しく買わなければならない</a:t>
-            </a:r>
-            <a:endParaRPr lang="en-US" altLang="ja-JP" dirty="0"/>
-          </a:p>
-          <a:p>
-            <a:r>
-              <a:rPr lang="ja-JP" altLang="en-US" dirty="0" smtClean="0"/>
-              <a:t>鍬</a:t>
-            </a:r>
-            <a:r>
-              <a:rPr lang="ja-JP" altLang="en-US" dirty="0" smtClean="0"/>
-              <a:t>が</a:t>
-            </a:r>
-            <a:r>
-              <a:rPr lang="ja-JP" altLang="en-US" dirty="0"/>
-              <a:t>壊れている</a:t>
-            </a:r>
-            <a:r>
-              <a:rPr lang="ja-JP" altLang="en-US" dirty="0" smtClean="0"/>
-              <a:t>状態</a:t>
-            </a:r>
-            <a:r>
-              <a:rPr lang="ja-JP" altLang="en-US" dirty="0" smtClean="0"/>
-              <a:t>で</a:t>
-            </a:r>
-            <a:r>
-              <a:rPr lang="ja-JP" altLang="en-US" dirty="0"/>
-              <a:t>新しい</a:t>
-            </a:r>
-            <a:r>
-              <a:rPr lang="ja-JP" altLang="en-US" dirty="0" smtClean="0"/>
-              <a:t>鍬</a:t>
-            </a:r>
-            <a:r>
-              <a:rPr lang="ja-JP" altLang="en-US" dirty="0"/>
-              <a:t>が買えない場合ゲームオーバーになる</a:t>
-            </a:r>
-            <a:r>
-              <a:rPr lang="ja-JP" altLang="en-US" dirty="0" smtClean="0"/>
-              <a:t>。</a:t>
-            </a:r>
-            <a:endParaRPr kumimoji="1" lang="en-US" altLang="ja-JP" dirty="0" smtClean="0"/>
-          </a:p>
-          <a:p>
-            <a:endParaRPr kumimoji="1" lang="en-US" altLang="ja-JP" dirty="0"/>
+              <a:rPr kumimoji="1" lang="ja-JP" altLang="en-US" sz="2400" dirty="0"/>
+              <a:t>パート</a:t>
+            </a:r>
+          </a:p>
+        </p:txBody>
+      </p:sp>
+      <p:cxnSp>
+        <p:nvCxnSpPr>
+          <p:cNvPr id="14" name="直線矢印コネクタ 13">
+            <a:extLst>
+              <a:ext uri="{FF2B5EF4-FFF2-40B4-BE49-F238E27FC236}">
+                <a16:creationId xmlns:a16="http://schemas.microsoft.com/office/drawing/2014/main" id="{78FF2947-0A4E-7296-C9B9-C2CF2B649433}"/>
+              </a:ext>
+            </a:extLst>
+          </p:cNvPr>
+          <p:cNvCxnSpPr>
+            <a:cxnSpLocks/>
+          </p:cNvCxnSpPr>
+          <p:nvPr/>
+        </p:nvCxnSpPr>
+        <p:spPr>
+          <a:xfrm>
+            <a:off x="3105339" y="6138250"/>
+            <a:ext cx="4747034" cy="0"/>
+          </a:xfrm>
+          <a:prstGeom prst="straightConnector1">
+            <a:avLst/>
+          </a:prstGeom>
+          <a:ln w="38100">
+            <a:solidFill>
+              <a:schemeClr val="tx1">
+                <a:lumMod val="95000"/>
+                <a:lumOff val="5000"/>
+              </a:schemeClr>
+            </a:solidFill>
+            <a:headEnd type="triangle"/>
+            <a:tailEnd type="triangle"/>
+          </a:ln>
+        </p:spPr>
+        <p:style>
+          <a:lnRef idx="1">
+            <a:schemeClr val="accent1"/>
+          </a:lnRef>
+          <a:fillRef idx="0">
+            <a:schemeClr val="accent1"/>
+          </a:fillRef>
+          <a:effectRef idx="0">
+            <a:schemeClr val="accent1"/>
+          </a:effectRef>
+          <a:fontRef idx="minor">
+            <a:schemeClr val="tx1"/>
+          </a:fontRef>
+        </p:style>
+      </p:cxnSp>
+      <p:sp>
+        <p:nvSpPr>
+          <p:cNvPr id="16" name="矢印: 左カーブ 15">
+            <a:extLst>
+              <a:ext uri="{FF2B5EF4-FFF2-40B4-BE49-F238E27FC236}">
+                <a16:creationId xmlns:a16="http://schemas.microsoft.com/office/drawing/2014/main" id="{EBA0A7A7-1218-CB5C-57A6-30D1E77A40B0}"/>
+              </a:ext>
+            </a:extLst>
+          </p:cNvPr>
+          <p:cNvSpPr/>
+          <p:nvPr/>
+        </p:nvSpPr>
+        <p:spPr>
+          <a:xfrm>
+            <a:off x="3105339" y="5217577"/>
+            <a:ext cx="660903" cy="334204"/>
+          </a:xfrm>
+          <a:prstGeom prst="curvedLeftArrow">
+            <a:avLst/>
+          </a:prstGeom>
+          <a:solidFill>
+            <a:schemeClr val="tx1">
+              <a:lumMod val="95000"/>
+              <a:lumOff val="5000"/>
+            </a:schemeClr>
+          </a:solidFill>
+        </p:spPr>
+        <p:style>
+          <a:lnRef idx="2">
+            <a:schemeClr val="accent1">
+              <a:shade val="15000"/>
+            </a:schemeClr>
+          </a:lnRef>
+          <a:fillRef idx="1">
+            <a:schemeClr val="accent1"/>
+          </a:fillRef>
+          <a:effectRef idx="0">
+            <a:schemeClr val="accent1"/>
+          </a:effectRef>
+          <a:fontRef idx="minor">
+            <a:schemeClr val="lt1"/>
+          </a:fontRef>
+        </p:style>
+        <p:txBody>
+          <a:bodyPr rtlCol="0" anchor="ctr"/>
+          <a:lstStyle/>
+          <a:p>
+            <a:pPr algn="ctr"/>
+            <a:endParaRPr kumimoji="1" lang="ja-JP" altLang="en-US">
+              <a:solidFill>
+                <a:schemeClr val="tx1"/>
+              </a:solidFill>
+            </a:endParaRPr>
+          </a:p>
+        </p:txBody>
+      </p:sp>
+      <p:sp>
+        <p:nvSpPr>
+          <p:cNvPr id="17" name="テキスト ボックス 16">
+            <a:extLst>
+              <a:ext uri="{FF2B5EF4-FFF2-40B4-BE49-F238E27FC236}">
+                <a16:creationId xmlns:a16="http://schemas.microsoft.com/office/drawing/2014/main" id="{DD299686-EA69-FFF5-ABA1-813111544455}"/>
+              </a:ext>
+            </a:extLst>
+          </p:cNvPr>
+          <p:cNvSpPr txBox="1"/>
+          <p:nvPr/>
+        </p:nvSpPr>
+        <p:spPr>
+          <a:xfrm>
+            <a:off x="3847723" y="4874005"/>
+            <a:ext cx="2248277" cy="923330"/>
+          </a:xfrm>
+          <a:prstGeom prst="rect">
+            <a:avLst/>
+          </a:prstGeom>
+          <a:noFill/>
+        </p:spPr>
+        <p:txBody>
+          <a:bodyPr wrap="square" rtlCol="0">
+            <a:spAutoFit/>
+          </a:bodyPr>
+          <a:lstStyle/>
+          <a:p>
+            <a:r>
+              <a:rPr kumimoji="1" lang="ja-JP" altLang="en-US" dirty="0"/>
+              <a:t>鍬があるならそのまま採取を続行することもできる。</a:t>
+            </a:r>
           </a:p>
         </p:txBody>
       </p:sp>
@@ -3803,10 +3858,9 @@
           <a:lstStyle/>
           <a:p>
             <a:r>
-              <a:rPr kumimoji="1" lang="ja-JP" altLang="en-US" dirty="0" smtClean="0"/>
+              <a:rPr kumimoji="1" lang="ja-JP" altLang="en-US" dirty="0"/>
               <a:t>採取パート</a:t>
             </a:r>
-            <a:endParaRPr kumimoji="1" lang="ja-JP" altLang="en-US" dirty="0"/>
           </a:p>
         </p:txBody>
       </p:sp>
@@ -3831,33 +3885,33 @@
           <a:lstStyle/>
           <a:p>
             <a:r>
-              <a:rPr lang="ja-JP" altLang="en-US" dirty="0" smtClean="0"/>
+              <a:rPr lang="ja-JP" altLang="en-US" dirty="0"/>
               <a:t>畑の中のランダムな場所に作物が生成される。</a:t>
             </a:r>
-            <a:endParaRPr lang="en-US" altLang="ja-JP" dirty="0" smtClean="0"/>
-          </a:p>
-          <a:p>
-            <a:r>
-              <a:rPr lang="ja-JP" altLang="en-US" dirty="0" smtClean="0"/>
+            <a:endParaRPr lang="en-US" altLang="ja-JP" dirty="0"/>
+          </a:p>
+          <a:p>
+            <a:r>
+              <a:rPr lang="ja-JP" altLang="en-US" dirty="0"/>
               <a:t>作物を採取した時点でお金を入手することができる。</a:t>
             </a:r>
-            <a:endParaRPr lang="en-US" altLang="ja-JP" dirty="0" smtClean="0"/>
-          </a:p>
-          <a:p>
-            <a:r>
-              <a:rPr lang="ja-JP" altLang="en-US" dirty="0" smtClean="0"/>
+            <a:endParaRPr lang="en-US" altLang="ja-JP" dirty="0"/>
+          </a:p>
+          <a:p>
+            <a:r>
+              <a:rPr lang="ja-JP" altLang="en-US" dirty="0"/>
               <a:t>作物にも種類があり、通常の作物、悪い色の作物、爆発する作物など</a:t>
             </a:r>
-            <a:endParaRPr lang="en-US" altLang="ja-JP" dirty="0" smtClean="0"/>
-          </a:p>
-          <a:p>
-            <a:r>
-              <a:rPr lang="ja-JP" altLang="en-US" dirty="0" smtClean="0"/>
-              <a:t>作物の出現時間</a:t>
-            </a:r>
-            <a:r>
-              <a:rPr lang="ja-JP" altLang="en-US" dirty="0" smtClean="0"/>
-              <a:t>を過ぎると畑の作物がすべて消える。</a:t>
+            <a:endParaRPr lang="en-US" altLang="ja-JP" dirty="0"/>
+          </a:p>
+          <a:p>
+            <a:r>
+              <a:rPr lang="ja-JP" altLang="en-US" dirty="0"/>
+              <a:t>作物の出現時間を過ぎると畑の作物がすべて</a:t>
+            </a:r>
+            <a:r>
+              <a:rPr lang="ja-JP" altLang="en-US"/>
+              <a:t>消える。出現時間が過ぎるまで畑からは出られない</a:t>
             </a:r>
             <a:endParaRPr kumimoji="1" lang="ja-JP" altLang="en-US" dirty="0"/>
           </a:p>
@@ -3871,8 +3925,8 @@
         </p:nvSpPr>
         <p:spPr>
           <a:xfrm>
-            <a:off x="745921" y="4294908"/>
-            <a:ext cx="11200002" cy="2246769"/>
+            <a:off x="6304749" y="5380672"/>
+            <a:ext cx="5980804" cy="1477328"/>
           </a:xfrm>
           <a:prstGeom prst="rect">
             <a:avLst/>
@@ -3886,118 +3940,92 @@
           <a:lstStyle/>
           <a:p>
             <a:r>
-              <a:rPr kumimoji="1" lang="ja-JP" altLang="en-US" sz="2800" dirty="0" smtClean="0"/>
+              <a:rPr kumimoji="1" lang="ja-JP" altLang="en-US" dirty="0"/>
               <a:t>初期の畑のステータス（仮）</a:t>
             </a:r>
-            <a:endParaRPr kumimoji="1" lang="en-US" altLang="ja-JP" sz="2800" dirty="0" smtClean="0"/>
-          </a:p>
-          <a:p>
-            <a:r>
-              <a:rPr lang="ja-JP" altLang="en-US" sz="2800" dirty="0" smtClean="0"/>
-              <a:t>・</a:t>
-            </a:r>
-            <a:r>
-              <a:rPr lang="ja-JP" altLang="en-US" sz="2800" dirty="0"/>
-              <a:t>出現</a:t>
-            </a:r>
-            <a:r>
-              <a:rPr lang="ja-JP" altLang="en-US" sz="2800" dirty="0" smtClean="0"/>
-              <a:t>時間</a:t>
-            </a:r>
-            <a:r>
-              <a:rPr lang="ja-JP" altLang="en-US" sz="2800" dirty="0" smtClean="0"/>
-              <a:t>　  </a:t>
-            </a:r>
-            <a:r>
-              <a:rPr lang="en-US" altLang="ja-JP" sz="2800" dirty="0" smtClean="0"/>
+            <a:endParaRPr kumimoji="1" lang="en-US" altLang="ja-JP" dirty="0"/>
+          </a:p>
+          <a:p>
+            <a:r>
+              <a:rPr lang="ja-JP" altLang="en-US" dirty="0"/>
+              <a:t>・出現時間　  </a:t>
+            </a:r>
+            <a:r>
+              <a:rPr lang="en-US" altLang="ja-JP" dirty="0"/>
               <a:t>5</a:t>
             </a:r>
             <a:r>
-              <a:rPr lang="ja-JP" altLang="en-US" sz="2800" dirty="0" smtClean="0"/>
+              <a:rPr lang="ja-JP" altLang="en-US" dirty="0"/>
               <a:t>秒</a:t>
             </a:r>
-            <a:endParaRPr lang="en-US" altLang="ja-JP" sz="2800" dirty="0" smtClean="0"/>
-          </a:p>
-          <a:p>
-            <a:r>
-              <a:rPr lang="ja-JP" altLang="en-US" sz="2800" dirty="0"/>
-              <a:t>・</a:t>
-            </a:r>
-            <a:r>
-              <a:rPr lang="ja-JP" altLang="en-US" sz="2800" dirty="0" smtClean="0"/>
-              <a:t>最大個数　</a:t>
-            </a:r>
-            <a:r>
-              <a:rPr lang="en-US" altLang="ja-JP" sz="2800" dirty="0" smtClean="0"/>
+            <a:endParaRPr lang="en-US" altLang="ja-JP" dirty="0"/>
+          </a:p>
+          <a:p>
+            <a:r>
+              <a:rPr lang="ja-JP" altLang="en-US" dirty="0"/>
+              <a:t>・最大個数　</a:t>
+            </a:r>
+            <a:r>
+              <a:rPr lang="en-US" altLang="ja-JP" dirty="0"/>
               <a:t>10</a:t>
             </a:r>
             <a:r>
-              <a:rPr lang="ja-JP" altLang="en-US" sz="2800" dirty="0" smtClean="0"/>
+              <a:rPr lang="ja-JP" altLang="en-US" dirty="0"/>
               <a:t>個</a:t>
             </a:r>
-            <a:endParaRPr lang="en-US" altLang="ja-JP" sz="2800" dirty="0" smtClean="0"/>
-          </a:p>
-          <a:p>
-            <a:r>
-              <a:rPr lang="ja-JP" altLang="en-US" sz="2800" dirty="0" smtClean="0"/>
+            <a:endParaRPr lang="en-US" altLang="ja-JP" dirty="0"/>
+          </a:p>
+          <a:p>
+            <a:r>
+              <a:rPr lang="ja-JP" altLang="en-US" dirty="0"/>
               <a:t>・出現する作物　　通常のカブ</a:t>
             </a:r>
             <a:r>
-              <a:rPr lang="en-US" altLang="ja-JP" sz="2800" dirty="0"/>
+              <a:rPr lang="en-US" altLang="ja-JP" dirty="0"/>
               <a:t>(</a:t>
             </a:r>
             <a:r>
-              <a:rPr lang="ja-JP" altLang="en-US" sz="2800" dirty="0" smtClean="0"/>
+              <a:rPr lang="ja-JP" altLang="en-US" dirty="0"/>
               <a:t>価値 </a:t>
             </a:r>
             <a:r>
-              <a:rPr lang="en-US" altLang="ja-JP" sz="2800" dirty="0" smtClean="0"/>
+              <a:rPr lang="en-US" altLang="ja-JP" dirty="0"/>
               <a:t>:  2G,</a:t>
             </a:r>
             <a:r>
-              <a:rPr lang="ja-JP" altLang="en-US" sz="2800" dirty="0" smtClean="0"/>
+              <a:rPr lang="ja-JP" altLang="en-US" dirty="0"/>
               <a:t>作物体力 </a:t>
             </a:r>
             <a:r>
-              <a:rPr lang="en-US" altLang="ja-JP" sz="2800" dirty="0" smtClean="0"/>
-              <a:t>: 3</a:t>
-            </a:r>
-            <a:r>
-              <a:rPr lang="en-US" altLang="ja-JP" sz="2800" dirty="0"/>
-              <a:t>)</a:t>
-            </a:r>
-            <a:endParaRPr lang="en-US" altLang="ja-JP" sz="2800" dirty="0" smtClean="0"/>
-          </a:p>
-          <a:p>
-            <a:r>
-              <a:rPr lang="ja-JP" altLang="en-US" sz="2800" dirty="0"/>
-              <a:t>　</a:t>
-            </a:r>
-            <a:r>
-              <a:rPr lang="ja-JP" altLang="en-US" sz="2800" dirty="0" smtClean="0"/>
-              <a:t>　　　　　　　悪い色のカブ</a:t>
-            </a:r>
-            <a:r>
-              <a:rPr lang="en-US" altLang="ja-JP" sz="2800" dirty="0" smtClean="0"/>
+              <a:rPr lang="en-US" altLang="ja-JP" dirty="0"/>
+              <a:t>: 3)</a:t>
+            </a:r>
+          </a:p>
+          <a:p>
+            <a:r>
+              <a:rPr lang="ja-JP" altLang="en-US" dirty="0"/>
+              <a:t>　　　　　　　　悪い色のカブ</a:t>
+            </a:r>
+            <a:r>
+              <a:rPr lang="en-US" altLang="ja-JP" dirty="0"/>
               <a:t>(</a:t>
             </a:r>
             <a:r>
-              <a:rPr lang="ja-JP" altLang="en-US" sz="2800" dirty="0" smtClean="0"/>
+              <a:rPr lang="ja-JP" altLang="en-US" dirty="0"/>
               <a:t>価値 </a:t>
             </a:r>
             <a:r>
-              <a:rPr lang="en-US" altLang="ja-JP" sz="2800" dirty="0" smtClean="0"/>
+              <a:rPr lang="en-US" altLang="ja-JP" dirty="0"/>
               <a:t>: -1G,</a:t>
             </a:r>
             <a:r>
-              <a:rPr lang="ja-JP" altLang="en-US" sz="2800" dirty="0" smtClean="0"/>
+              <a:rPr lang="ja-JP" altLang="en-US" dirty="0"/>
               <a:t>作物体力 </a:t>
             </a:r>
             <a:r>
-              <a:rPr lang="en-US" altLang="ja-JP" sz="2800" dirty="0" smtClean="0"/>
+              <a:rPr lang="en-US" altLang="ja-JP" dirty="0"/>
               <a:t>: 2)</a:t>
             </a:r>
-            <a:endParaRPr lang="en-US" altLang="ja-JP" sz="2800" dirty="0"/>
           </a:p>
         </p:txBody>
       </p:sp>
@@ -4047,10 +4075,9 @@
           <a:lstStyle/>
           <a:p>
             <a:r>
-              <a:rPr kumimoji="1" lang="ja-JP" altLang="en-US" dirty="0" smtClean="0"/>
+              <a:rPr kumimoji="1" lang="ja-JP" altLang="en-US" dirty="0"/>
               <a:t>作物の種類</a:t>
             </a:r>
-            <a:endParaRPr kumimoji="1" lang="ja-JP" altLang="en-US" dirty="0"/>
           </a:p>
         </p:txBody>
       </p:sp>
@@ -4066,43 +4093,166 @@
         </p:nvSpPr>
         <p:spPr>
           <a:xfrm>
-            <a:off x="838200" y="1825625"/>
+            <a:off x="593756" y="1567752"/>
             <a:ext cx="10515600" cy="3308438"/>
           </a:xfrm>
         </p:spPr>
         <p:txBody>
-          <a:bodyPr/>
-          <a:lstStyle/>
-          <a:p>
-            <a:r>
-              <a:rPr kumimoji="1" lang="ja-JP" altLang="en-US" dirty="0" smtClean="0"/>
+          <a:bodyPr>
+            <a:normAutofit fontScale="92500"/>
+          </a:bodyPr>
+          <a:lstStyle/>
+          <a:p>
+            <a:r>
+              <a:rPr kumimoji="1" lang="ja-JP" altLang="en-US" dirty="0"/>
               <a:t>通常の作物・・・普通の作物で、どの鍬でも採取可能</a:t>
             </a:r>
-            <a:endParaRPr kumimoji="1" lang="en-US" altLang="ja-JP" dirty="0" smtClean="0"/>
-          </a:p>
-          <a:p>
+            <a:endParaRPr kumimoji="1" lang="en-US" altLang="ja-JP" dirty="0"/>
+          </a:p>
+          <a:p>
+            <a:pPr marL="0" indent="0">
+              <a:buNone/>
+            </a:pPr>
             <a:endParaRPr lang="en-US" altLang="ja-JP" dirty="0"/>
           </a:p>
           <a:p>
             <a:r>
               <a:rPr lang="ja-JP" altLang="en-US" dirty="0"/>
-              <a:t>悪い色の</a:t>
-            </a:r>
-            <a:r>
-              <a:rPr lang="ja-JP" altLang="en-US" dirty="0" smtClean="0"/>
-              <a:t>作物・・・色の暗い作物で、黒い鍬以外ではお金が減る</a:t>
-            </a:r>
+              <a:t>悪い色の作物・・・色の暗い作物で、黒い鍬以外ではお金が減る</a:t>
+            </a:r>
+            <a:endParaRPr lang="en-US" altLang="ja-JP" dirty="0"/>
+          </a:p>
+          <a:p>
+            <a:pPr marL="0" indent="0">
+              <a:buNone/>
+            </a:pPr>
             <a:endParaRPr kumimoji="1" lang="en-US" altLang="ja-JP" dirty="0"/>
           </a:p>
           <a:p>
             <a:r>
-              <a:rPr kumimoji="1" lang="ja-JP" altLang="en-US" dirty="0" smtClean="0"/>
-              <a:t>爆発する作物・・・普通の作物に似ているが葉など一部の形状が違う、鋼の鍬でのみ安全に採取できる、それ以外では吹き飛ばされる</a:t>
-            </a:r>
-            <a:endParaRPr kumimoji="1" lang="en-US" altLang="ja-JP" dirty="0" smtClean="0"/>
-          </a:p>
-        </p:txBody>
-      </p:sp>
+              <a:rPr kumimoji="1" lang="ja-JP" altLang="en-US" dirty="0"/>
+              <a:t>爆発する作物・・・普通の作物に似ているが</a:t>
+            </a:r>
+            <a:r>
+              <a:rPr lang="ja-JP" altLang="en-US" dirty="0"/>
+              <a:t>エフェクトや</a:t>
+            </a:r>
+            <a:r>
+              <a:rPr kumimoji="1" lang="ja-JP" altLang="en-US" dirty="0"/>
+              <a:t>葉など一部の形状が違う、鋼の鍬でのみ安全に採取できる、それ以外では吹き飛ばされる</a:t>
+            </a:r>
+            <a:endParaRPr kumimoji="1" lang="en-US" altLang="ja-JP" dirty="0"/>
+          </a:p>
+        </p:txBody>
+      </p:sp>
+      <p:pic>
+        <p:nvPicPr>
+          <p:cNvPr id="5" name="グラフィックス 4" descr="りんご 単色塗りつぶし">
+            <a:extLst>
+              <a:ext uri="{FF2B5EF4-FFF2-40B4-BE49-F238E27FC236}">
+                <a16:creationId xmlns:a16="http://schemas.microsoft.com/office/drawing/2014/main" id="{92730AF3-7E0E-C3F4-6133-08A5A515B711}"/>
+              </a:ext>
+            </a:extLst>
+          </p:cNvPr>
+          <p:cNvPicPr>
+            <a:picLocks noChangeAspect="1"/>
+          </p:cNvPicPr>
+          <p:nvPr/>
+        </p:nvPicPr>
+        <p:blipFill>
+          <a:blip>
+            <a:extLst>
+              <a:ext uri="{96DAC541-7B7A-43D3-8B79-37D633B846F1}">
+                <asvg:svgBlip xmlns:asvg="http://schemas.microsoft.com/office/drawing/2016/SVG/main" r:embed="rId2"/>
+              </a:ext>
+            </a:extLst>
+          </a:blip>
+          <a:stretch>
+            <a:fillRect/>
+          </a:stretch>
+        </p:blipFill>
+        <p:spPr>
+          <a:xfrm>
+            <a:off x="1082644" y="4876190"/>
+            <a:ext cx="1569269" cy="1569269"/>
+          </a:xfrm>
+          <a:prstGeom prst="rect">
+            <a:avLst/>
+          </a:prstGeom>
+        </p:spPr>
+      </p:pic>
+      <p:pic>
+        <p:nvPicPr>
+          <p:cNvPr id="6" name="グラフィックス 5" descr="りんご 単色塗りつぶし">
+            <a:extLst>
+              <a:ext uri="{FF2B5EF4-FFF2-40B4-BE49-F238E27FC236}">
+                <a16:creationId xmlns:a16="http://schemas.microsoft.com/office/drawing/2014/main" id="{DCA9F694-667F-B247-0477-1B9D03C5C0AF}"/>
+              </a:ext>
+            </a:extLst>
+          </p:cNvPr>
+          <p:cNvPicPr>
+            <a:picLocks noChangeAspect="1"/>
+          </p:cNvPicPr>
+          <p:nvPr/>
+        </p:nvPicPr>
+        <p:blipFill>
+          <a:blip>
+            <a:extLst>
+              <a:ext uri="{96DAC541-7B7A-43D3-8B79-37D633B846F1}">
+                <asvg:svgBlip xmlns:asvg="http://schemas.microsoft.com/office/drawing/2016/SVG/main" r:embed="rId3"/>
+              </a:ext>
+            </a:extLst>
+          </a:blip>
+          <a:stretch>
+            <a:fillRect/>
+          </a:stretch>
+        </p:blipFill>
+        <p:spPr>
+          <a:xfrm>
+            <a:off x="4898300" y="4882110"/>
+            <a:ext cx="1569269" cy="1569269"/>
+          </a:xfrm>
+          <a:prstGeom prst="rect">
+            <a:avLst/>
+          </a:prstGeom>
+        </p:spPr>
+      </p:pic>
+      <p:pic>
+        <p:nvPicPr>
+          <p:cNvPr id="7" name="グラフィックス 6" descr="りんご 単色塗りつぶし">
+            <a:extLst>
+              <a:ext uri="{FF2B5EF4-FFF2-40B4-BE49-F238E27FC236}">
+                <a16:creationId xmlns:a16="http://schemas.microsoft.com/office/drawing/2014/main" id="{C05A9474-4B00-52AA-A0AE-9A737C1B1A9B}"/>
+              </a:ext>
+            </a:extLst>
+          </p:cNvPr>
+          <p:cNvPicPr>
+            <a:picLocks noChangeAspect="1"/>
+          </p:cNvPicPr>
+          <p:nvPr/>
+        </p:nvPicPr>
+        <p:blipFill>
+          <a:blip>
+            <a:extLst>
+              <a:ext uri="{96DAC541-7B7A-43D3-8B79-37D633B846F1}">
+                <asvg:svgBlip xmlns:asvg="http://schemas.microsoft.com/office/drawing/2016/SVG/main" r:embed="rId4"/>
+              </a:ext>
+            </a:extLst>
+          </a:blip>
+          <a:stretch>
+            <a:fillRect/>
+          </a:stretch>
+        </p:blipFill>
+        <p:spPr>
+          <a:xfrm>
+            <a:off x="8592490" y="4876190"/>
+            <a:ext cx="1569269" cy="1569269"/>
+          </a:xfrm>
+          <a:prstGeom prst="rect">
+            <a:avLst/>
+          </a:prstGeom>
+        </p:spPr>
+      </p:pic>
     </p:spTree>
     <p:extLst>
       <p:ext uri="{BB962C8B-B14F-4D97-AF65-F5344CB8AC3E}">
@@ -4153,10 +4303,9 @@
               <a:t>購入</a:t>
             </a:r>
             <a:r>
-              <a:rPr kumimoji="1" lang="ja-JP" altLang="en-US" dirty="0" smtClean="0"/>
+              <a:rPr kumimoji="1" lang="ja-JP" altLang="en-US" dirty="0"/>
               <a:t>パート</a:t>
             </a:r>
-            <a:endParaRPr kumimoji="1" lang="ja-JP" altLang="en-US" dirty="0"/>
           </a:p>
         </p:txBody>
       </p:sp>
@@ -4183,32 +4332,32 @@
           <a:lstStyle/>
           <a:p>
             <a:r>
-              <a:rPr kumimoji="1" lang="ja-JP" altLang="en-US" dirty="0" smtClean="0"/>
+              <a:rPr kumimoji="1" lang="ja-JP" altLang="en-US" dirty="0"/>
               <a:t>採取パートで得たお金を使ってパークや鍬を購入することができる</a:t>
             </a:r>
-            <a:endParaRPr lang="en-US" altLang="ja-JP" dirty="0" smtClean="0"/>
-          </a:p>
-          <a:p>
-            <a:r>
-              <a:rPr lang="ja-JP" altLang="en-US" dirty="0" smtClean="0"/>
+            <a:endParaRPr lang="en-US" altLang="ja-JP" dirty="0"/>
+          </a:p>
+          <a:p>
+            <a:r>
+              <a:rPr lang="ja-JP" altLang="en-US" dirty="0"/>
               <a:t>より価値のある作物や、作物の価値を</a:t>
             </a:r>
             <a:r>
-              <a:rPr lang="en-US" altLang="ja-JP" dirty="0" smtClean="0"/>
+              <a:rPr lang="en-US" altLang="ja-JP" dirty="0"/>
               <a:t>2</a:t>
             </a:r>
             <a:r>
-              <a:rPr lang="ja-JP" altLang="en-US" dirty="0" smtClean="0"/>
+              <a:rPr lang="ja-JP" altLang="en-US" dirty="0"/>
               <a:t>倍にするなど、さまざまなパークがある</a:t>
             </a:r>
-            <a:endParaRPr lang="en-US" altLang="ja-JP" dirty="0" smtClean="0"/>
-          </a:p>
-          <a:p>
-            <a:r>
-              <a:rPr lang="ja-JP" altLang="en-US" dirty="0" smtClean="0"/>
+            <a:endParaRPr lang="en-US" altLang="ja-JP" dirty="0"/>
+          </a:p>
+          <a:p>
+            <a:r>
+              <a:rPr lang="ja-JP" altLang="en-US" dirty="0"/>
               <a:t>パークの取得にもお金を使用するので、鍬を買うためのお金と兼ね合いながらパークを開放しないといけない。</a:t>
             </a:r>
-            <a:endParaRPr lang="en-US" altLang="ja-JP" dirty="0" smtClean="0"/>
+            <a:endParaRPr lang="en-US" altLang="ja-JP" dirty="0"/>
           </a:p>
         </p:txBody>
       </p:sp>
@@ -4249,11 +4398,7 @@
           <a:p>
             <a:r>
               <a:rPr lang="ja-JP" altLang="en-US" sz="2400" dirty="0"/>
-              <a:t>出現</a:t>
-            </a:r>
-            <a:r>
-              <a:rPr lang="ja-JP" altLang="en-US" sz="2400" dirty="0" smtClean="0"/>
-              <a:t>時間</a:t>
+              <a:t>出現時間</a:t>
             </a:r>
             <a:r>
               <a:rPr lang="en-US" altLang="ja-JP" sz="2400" dirty="0"/>
@@ -4296,283 +4441,6 @@
     <p:extLst>
       <p:ext uri="{BB962C8B-B14F-4D97-AF65-F5344CB8AC3E}">
         <p14:creationId xmlns:p14="http://schemas.microsoft.com/office/powerpoint/2010/main" val="1600696718"/>
-      </p:ext>
-    </p:extLst>
-  </p:cSld>
-  <p:clrMapOvr>
-    <a:masterClrMapping/>
-  </p:clrMapOvr>
-</p:sld>
-</file>
-
-<file path=ppt/slides/slide7.xml><?xml version="1.0" encoding="utf-8"?>
-<p:sld xmlns:a="http://schemas.openxmlformats.org/drawingml/2006/main" xmlns:r="http://schemas.openxmlformats.org/officeDocument/2006/relationships" xmlns:p="http://schemas.openxmlformats.org/presentationml/2006/main">
-  <p:cSld>
-    <p:spTree>
-      <p:nvGrpSpPr>
-        <p:cNvPr id="1" name=""/>
-        <p:cNvGrpSpPr/>
-        <p:nvPr/>
-      </p:nvGrpSpPr>
-      <p:grpSpPr>
-        <a:xfrm>
-          <a:off x="0" y="0"/>
-          <a:ext cx="0" cy="0"/>
-          <a:chOff x="0" y="0"/>
-          <a:chExt cx="0" cy="0"/>
-        </a:xfrm>
-      </p:grpSpPr>
-      <p:sp>
-        <p:nvSpPr>
-          <p:cNvPr id="2" name="タイトル 1"/>
-          <p:cNvSpPr>
-            <a:spLocks noGrp="1"/>
-          </p:cNvSpPr>
-          <p:nvPr>
-            <p:ph type="title"/>
-          </p:nvPr>
-        </p:nvSpPr>
-        <p:spPr/>
-        <p:txBody>
-          <a:bodyPr/>
-          <a:lstStyle/>
-          <a:p>
-            <a:r>
-              <a:rPr lang="ja-JP" altLang="en-US" dirty="0" smtClean="0"/>
-              <a:t>鍬の種類（仮）</a:t>
-            </a:r>
-            <a:endParaRPr kumimoji="1" lang="ja-JP" altLang="en-US" dirty="0"/>
-          </a:p>
-        </p:txBody>
-      </p:sp>
-      <p:sp>
-        <p:nvSpPr>
-          <p:cNvPr id="3" name="コンテンツ プレースホルダー 2"/>
-          <p:cNvSpPr>
-            <a:spLocks noGrp="1"/>
-          </p:cNvSpPr>
-          <p:nvPr>
-            <p:ph idx="1"/>
-          </p:nvPr>
-        </p:nvSpPr>
-        <p:spPr>
-          <a:xfrm>
-            <a:off x="499310" y="1535185"/>
-            <a:ext cx="11193379" cy="4915949"/>
-          </a:xfrm>
-        </p:spPr>
-        <p:txBody>
-          <a:bodyPr>
-            <a:normAutofit/>
-          </a:bodyPr>
-          <a:lstStyle/>
-          <a:p>
-            <a:r>
-              <a:rPr lang="ja-JP" altLang="en-US" dirty="0" smtClean="0"/>
-              <a:t>石の鍬   ・</a:t>
-            </a:r>
-            <a:r>
-              <a:rPr lang="ja-JP" altLang="en-US" dirty="0" smtClean="0"/>
-              <a:t>・</a:t>
-            </a:r>
-            <a:r>
-              <a:rPr lang="ja-JP" altLang="en-US" dirty="0" smtClean="0"/>
-              <a:t>・耐久値 </a:t>
-            </a:r>
-            <a:r>
-              <a:rPr lang="en-US" altLang="ja-JP" dirty="0" smtClean="0"/>
-              <a:t>: 12 </a:t>
-            </a:r>
-            <a:r>
-              <a:rPr lang="ja-JP" altLang="en-US" dirty="0" smtClean="0"/>
-              <a:t>    価格 </a:t>
-            </a:r>
-            <a:r>
-              <a:rPr lang="en-US" altLang="ja-JP" dirty="0" smtClean="0"/>
-              <a:t>:    2</a:t>
-            </a:r>
-            <a:r>
-              <a:rPr lang="ja-JP" altLang="en-US" dirty="0" smtClean="0"/>
-              <a:t>   初期装備</a:t>
-            </a:r>
-            <a:endParaRPr lang="en-US" altLang="ja-JP" dirty="0" smtClean="0"/>
-          </a:p>
-          <a:p>
-            <a:r>
-              <a:rPr lang="ja-JP" altLang="en-US" dirty="0" smtClean="0"/>
-              <a:t>銅の鍬　・・・耐久値 </a:t>
-            </a:r>
-            <a:r>
-              <a:rPr lang="en-US" altLang="ja-JP" dirty="0" smtClean="0"/>
-              <a:t>: 30</a:t>
-            </a:r>
-            <a:r>
-              <a:rPr lang="ja-JP" altLang="en-US" dirty="0" smtClean="0"/>
-              <a:t> </a:t>
-            </a:r>
-            <a:r>
-              <a:rPr lang="en-US" altLang="ja-JP" dirty="0" smtClean="0"/>
-              <a:t>    </a:t>
-            </a:r>
-            <a:r>
-              <a:rPr lang="ja-JP" altLang="en-US" dirty="0" smtClean="0"/>
-              <a:t>価格 </a:t>
-            </a:r>
-            <a:r>
-              <a:rPr lang="en-US" altLang="ja-JP" dirty="0" smtClean="0"/>
-              <a:t>:    6</a:t>
-            </a:r>
-            <a:r>
-              <a:rPr lang="ja-JP" altLang="en-US" dirty="0" smtClean="0"/>
-              <a:t>    </a:t>
-            </a:r>
-            <a:endParaRPr lang="en-US" altLang="ja-JP" dirty="0" smtClean="0"/>
-          </a:p>
-          <a:p>
-            <a:r>
-              <a:rPr kumimoji="1" lang="ja-JP" altLang="en-US" dirty="0" smtClean="0"/>
-              <a:t>鉄の鍬　・・・</a:t>
-            </a:r>
-            <a:r>
-              <a:rPr lang="ja-JP" altLang="en-US" dirty="0" smtClean="0"/>
-              <a:t>耐久値 </a:t>
-            </a:r>
-            <a:r>
-              <a:rPr lang="en-US" altLang="ja-JP" dirty="0" smtClean="0"/>
-              <a:t>: 70     </a:t>
-            </a:r>
-            <a:r>
-              <a:rPr lang="ja-JP" altLang="en-US" dirty="0" smtClean="0"/>
-              <a:t>価格</a:t>
-            </a:r>
-            <a:r>
-              <a:rPr lang="en-US" altLang="ja-JP" dirty="0"/>
-              <a:t> </a:t>
-            </a:r>
-            <a:r>
-              <a:rPr lang="en-US" altLang="ja-JP" dirty="0" smtClean="0"/>
-              <a:t>:  </a:t>
-            </a:r>
-            <a:r>
-              <a:rPr lang="en-US" altLang="ja-JP" dirty="0" smtClean="0"/>
-              <a:t>14    </a:t>
-            </a:r>
-            <a:endParaRPr kumimoji="1" lang="en-US" altLang="ja-JP" dirty="0"/>
-          </a:p>
-          <a:p>
-            <a:r>
-              <a:rPr lang="ja-JP" altLang="en-US" dirty="0" smtClean="0"/>
-              <a:t>鋼の鍬　・・・耐久値</a:t>
-            </a:r>
-            <a:r>
-              <a:rPr lang="en-US" altLang="ja-JP" dirty="0"/>
-              <a:t> </a:t>
-            </a:r>
-            <a:r>
-              <a:rPr lang="en-US" altLang="ja-JP" dirty="0" smtClean="0"/>
-              <a:t>: </a:t>
-            </a:r>
-            <a:r>
-              <a:rPr lang="en-US" altLang="ja-JP" dirty="0" smtClean="0"/>
-              <a:t>140</a:t>
-            </a:r>
-            <a:r>
-              <a:rPr lang="ja-JP" altLang="en-US" dirty="0" smtClean="0"/>
-              <a:t>   </a:t>
-            </a:r>
-            <a:r>
-              <a:rPr lang="ja-JP" altLang="en-US" dirty="0" smtClean="0"/>
-              <a:t>価格 </a:t>
-            </a:r>
-            <a:r>
-              <a:rPr lang="en-US" altLang="ja-JP" dirty="0" smtClean="0"/>
-              <a:t>:  35    </a:t>
-            </a:r>
-            <a:r>
-              <a:rPr lang="ja-JP" altLang="en-US" dirty="0" smtClean="0"/>
-              <a:t>爆発する作物も通常の作物と同じ価格で採取可能</a:t>
-            </a:r>
-            <a:endParaRPr lang="en-US" altLang="ja-JP" dirty="0" smtClean="0"/>
-          </a:p>
-          <a:p>
-            <a:endParaRPr lang="en-US" altLang="ja-JP" dirty="0" smtClean="0"/>
-          </a:p>
-          <a:p>
-            <a:r>
-              <a:rPr kumimoji="1" lang="ja-JP" altLang="en-US" dirty="0" smtClean="0"/>
-              <a:t>黒い鉄の鍬・・・</a:t>
-            </a:r>
-            <a:r>
-              <a:rPr lang="ja-JP" altLang="en-US" dirty="0" smtClean="0"/>
-              <a:t>耐久値 </a:t>
-            </a:r>
-            <a:r>
-              <a:rPr lang="en-US" altLang="ja-JP" dirty="0" smtClean="0"/>
-              <a:t>: 60  </a:t>
-            </a:r>
-            <a:r>
-              <a:rPr lang="ja-JP" altLang="en-US" dirty="0" smtClean="0"/>
-              <a:t>価格 </a:t>
-            </a:r>
-            <a:r>
-              <a:rPr lang="en-US" altLang="ja-JP" dirty="0" smtClean="0"/>
-              <a:t>:  20   </a:t>
-            </a:r>
-            <a:r>
-              <a:rPr lang="ja-JP" altLang="en-US" dirty="0" smtClean="0"/>
-              <a:t>悪い作物を通常の作物と同じように採取可能</a:t>
-            </a:r>
-            <a:endParaRPr lang="en-US" altLang="ja-JP" dirty="0" smtClean="0"/>
-          </a:p>
-          <a:p>
-            <a:r>
-              <a:rPr kumimoji="1" lang="ja-JP" altLang="en-US" dirty="0" smtClean="0"/>
-              <a:t>黒い鋼の鍬・・・耐久値 </a:t>
-            </a:r>
-            <a:r>
-              <a:rPr kumimoji="1" lang="en-US" altLang="ja-JP" smtClean="0"/>
-              <a:t>: </a:t>
-            </a:r>
-            <a:r>
-              <a:rPr kumimoji="1" lang="en-US" altLang="ja-JP" smtClean="0"/>
-              <a:t>110 </a:t>
-            </a:r>
-            <a:r>
-              <a:rPr kumimoji="1" lang="ja-JP" altLang="en-US" dirty="0" smtClean="0"/>
-              <a:t>価格 </a:t>
-            </a:r>
-            <a:r>
-              <a:rPr kumimoji="1" lang="en-US" altLang="ja-JP" dirty="0" smtClean="0"/>
-              <a:t>: </a:t>
-            </a:r>
-            <a:r>
-              <a:rPr lang="ja-JP" altLang="en-US" dirty="0"/>
-              <a:t> </a:t>
-            </a:r>
-            <a:r>
-              <a:rPr lang="en-US" altLang="ja-JP" dirty="0"/>
-              <a:t>4</a:t>
-            </a:r>
-            <a:r>
-              <a:rPr kumimoji="1" lang="en-US" altLang="ja-JP" dirty="0" smtClean="0"/>
-              <a:t>0  </a:t>
-            </a:r>
-            <a:r>
-              <a:rPr kumimoji="1" lang="ja-JP" altLang="en-US" dirty="0" smtClean="0"/>
-              <a:t>悪い作物、爆発す</a:t>
-            </a:r>
-            <a:r>
-              <a:rPr lang="ja-JP" altLang="en-US" dirty="0" smtClean="0"/>
-              <a:t>る作物も普通の作物と同じように採取可能</a:t>
-            </a:r>
-            <a:endParaRPr kumimoji="1" lang="ja-JP" altLang="en-US" dirty="0"/>
-          </a:p>
-        </p:txBody>
-      </p:sp>
-    </p:spTree>
-    <p:extLst>
-      <p:ext uri="{BB962C8B-B14F-4D97-AF65-F5344CB8AC3E}">
-        <p14:creationId xmlns:p14="http://schemas.microsoft.com/office/powerpoint/2010/main" val="433446604"/>
       </p:ext>
     </p:extLst>
   </p:cSld>

--- a/FarmLife_企画.pptx
+++ b/FarmLife_企画.pptx
@@ -246,7 +246,7 @@
           <a:p>
             <a:fld id="{14472033-EBEF-4113-884E-480E233F66C8}" type="datetimeFigureOut">
               <a:rPr kumimoji="1" lang="ja-JP" altLang="en-US" smtClean="0"/>
-              <a:t>2026/4/18</a:t>
+              <a:t>2026/4/19</a:t>
             </a:fld>
             <a:endParaRPr kumimoji="1" lang="ja-JP" altLang="en-US"/>
           </a:p>
@@ -446,7 +446,7 @@
           <a:p>
             <a:fld id="{14472033-EBEF-4113-884E-480E233F66C8}" type="datetimeFigureOut">
               <a:rPr kumimoji="1" lang="ja-JP" altLang="en-US" smtClean="0"/>
-              <a:t>2026/4/18</a:t>
+              <a:t>2026/4/19</a:t>
             </a:fld>
             <a:endParaRPr kumimoji="1" lang="ja-JP" altLang="en-US"/>
           </a:p>
@@ -656,7 +656,7 @@
           <a:p>
             <a:fld id="{14472033-EBEF-4113-884E-480E233F66C8}" type="datetimeFigureOut">
               <a:rPr kumimoji="1" lang="ja-JP" altLang="en-US" smtClean="0"/>
-              <a:t>2026/4/18</a:t>
+              <a:t>2026/4/19</a:t>
             </a:fld>
             <a:endParaRPr kumimoji="1" lang="ja-JP" altLang="en-US"/>
           </a:p>
@@ -856,7 +856,7 @@
           <a:p>
             <a:fld id="{14472033-EBEF-4113-884E-480E233F66C8}" type="datetimeFigureOut">
               <a:rPr kumimoji="1" lang="ja-JP" altLang="en-US" smtClean="0"/>
-              <a:t>2026/4/18</a:t>
+              <a:t>2026/4/19</a:t>
             </a:fld>
             <a:endParaRPr kumimoji="1" lang="ja-JP" altLang="en-US"/>
           </a:p>
@@ -1101,7 +1101,7 @@
           <a:p>
             <a:fld id="{14472033-EBEF-4113-884E-480E233F66C8}" type="datetimeFigureOut">
               <a:rPr kumimoji="1" lang="ja-JP" altLang="en-US" smtClean="0"/>
-              <a:t>2026/4/18</a:t>
+              <a:t>2026/4/19</a:t>
             </a:fld>
             <a:endParaRPr kumimoji="1" lang="ja-JP" altLang="en-US"/>
           </a:p>
@@ -1394,7 +1394,7 @@
           <a:p>
             <a:fld id="{14472033-EBEF-4113-884E-480E233F66C8}" type="datetimeFigureOut">
               <a:rPr kumimoji="1" lang="ja-JP" altLang="en-US" smtClean="0"/>
-              <a:t>2026/4/18</a:t>
+              <a:t>2026/4/19</a:t>
             </a:fld>
             <a:endParaRPr kumimoji="1" lang="ja-JP" altLang="en-US"/>
           </a:p>
@@ -1822,7 +1822,7 @@
           <a:p>
             <a:fld id="{14472033-EBEF-4113-884E-480E233F66C8}" type="datetimeFigureOut">
               <a:rPr kumimoji="1" lang="ja-JP" altLang="en-US" smtClean="0"/>
-              <a:t>2026/4/18</a:t>
+              <a:t>2026/4/19</a:t>
             </a:fld>
             <a:endParaRPr kumimoji="1" lang="ja-JP" altLang="en-US"/>
           </a:p>
@@ -1939,7 +1939,7 @@
           <a:p>
             <a:fld id="{14472033-EBEF-4113-884E-480E233F66C8}" type="datetimeFigureOut">
               <a:rPr kumimoji="1" lang="ja-JP" altLang="en-US" smtClean="0"/>
-              <a:t>2026/4/18</a:t>
+              <a:t>2026/4/19</a:t>
             </a:fld>
             <a:endParaRPr kumimoji="1" lang="ja-JP" altLang="en-US"/>
           </a:p>
@@ -2034,7 +2034,7 @@
           <a:p>
             <a:fld id="{14472033-EBEF-4113-884E-480E233F66C8}" type="datetimeFigureOut">
               <a:rPr kumimoji="1" lang="ja-JP" altLang="en-US" smtClean="0"/>
-              <a:t>2026/4/18</a:t>
+              <a:t>2026/4/19</a:t>
             </a:fld>
             <a:endParaRPr kumimoji="1" lang="ja-JP" altLang="en-US"/>
           </a:p>
@@ -2341,7 +2341,7 @@
           <a:p>
             <a:fld id="{14472033-EBEF-4113-884E-480E233F66C8}" type="datetimeFigureOut">
               <a:rPr kumimoji="1" lang="ja-JP" altLang="en-US" smtClean="0"/>
-              <a:t>2026/4/18</a:t>
+              <a:t>2026/4/19</a:t>
             </a:fld>
             <a:endParaRPr kumimoji="1" lang="ja-JP" altLang="en-US"/>
           </a:p>
@@ -2593,7 +2593,7 @@
           <a:p>
             <a:fld id="{14472033-EBEF-4113-884E-480E233F66C8}" type="datetimeFigureOut">
               <a:rPr kumimoji="1" lang="ja-JP" altLang="en-US" smtClean="0"/>
-              <a:t>2026/4/18</a:t>
+              <a:t>2026/4/19</a:t>
             </a:fld>
             <a:endParaRPr kumimoji="1" lang="ja-JP" altLang="en-US"/>
           </a:p>
@@ -2836,7 +2836,7 @@
           <a:p>
             <a:fld id="{14472033-EBEF-4113-884E-480E233F66C8}" type="datetimeFigureOut">
               <a:rPr kumimoji="1" lang="ja-JP" altLang="en-US" smtClean="0"/>
-              <a:t>2026/4/18</a:t>
+              <a:t>2026/4/19</a:t>
             </a:fld>
             <a:endParaRPr kumimoji="1" lang="ja-JP" altLang="en-US"/>
           </a:p>
@@ -3309,7 +3309,7 @@
             </a:r>
             <a:r>
               <a:rPr lang="ja-JP" altLang="en-US" dirty="0"/>
-              <a:t>クリック採取ゲーム</a:t>
+              <a:t>アクションゲーム</a:t>
             </a:r>
             <a:endParaRPr lang="en-US" altLang="ja-JP" dirty="0"/>
           </a:p>
@@ -3421,7 +3421,7 @@
           <a:p>
             <a:r>
               <a:rPr kumimoji="1" lang="ja-JP" altLang="en-US" dirty="0"/>
-              <a:t>畑に生成される作物を制限時間内に多く採取し、得たお金で自身を強化することでより稼ぎやすくする</a:t>
+              <a:t>畑に生成される作物を採取し、得たお金で自身を強化することでより稼ぎやすくする</a:t>
             </a:r>
             <a:r>
               <a:rPr lang="ja-JP" altLang="en-US" dirty="0"/>
@@ -3446,19 +3446,20 @@
             </a:r>
             <a:r>
               <a:rPr lang="ja-JP" altLang="en-US" dirty="0"/>
-              <a:t>ゴールド稼ぎ、家を完全修理というパークを取得することでクリア</a:t>
+              <a:t>ゴールド稼ぐことでクリア</a:t>
             </a:r>
             <a:endParaRPr lang="en-US" altLang="ja-JP" dirty="0"/>
           </a:p>
           <a:p>
             <a:r>
               <a:rPr lang="ja-JP" altLang="en-US" dirty="0"/>
-              <a:t>クリア時点の経過時間、採取した作物の合計個数でスコアが決まりランク付けされる。早く、少ない個数でクリアするほど高得点を得れる</a:t>
+              <a:t>クリア時点の経過時間、採取した作物の合計個数でスコアが決まりランク付けされる。早く、少ない個数でクリアするほど高得点</a:t>
+            </a:r>
+            <a:r>
+              <a:rPr lang="ja-JP" altLang="en-US"/>
+              <a:t>を得れる</a:t>
             </a:r>
             <a:endParaRPr lang="en-US" altLang="ja-JP" dirty="0"/>
-          </a:p>
-          <a:p>
-            <a:endParaRPr kumimoji="1" lang="en-US" altLang="ja-JP" dirty="0"/>
           </a:p>
         </p:txBody>
       </p:sp>
@@ -3907,13 +3908,15 @@
           <a:p>
             <a:r>
               <a:rPr lang="ja-JP" altLang="en-US" dirty="0"/>
-              <a:t>作物の出現時間を過ぎると畑の作物がすべて</a:t>
-            </a:r>
-            <a:r>
-              <a:rPr lang="ja-JP" altLang="en-US"/>
-              <a:t>消える。出現時間が過ぎるまで畑からは出られない</a:t>
-            </a:r>
-            <a:endParaRPr kumimoji="1" lang="ja-JP" altLang="en-US" dirty="0"/>
+              <a:t>作物の出現時間を過ぎると畑の作物がすべて消える。出現時間</a:t>
+            </a:r>
+            <a:endParaRPr lang="en-US" altLang="ja-JP" dirty="0"/>
+          </a:p>
+          <a:p>
+            <a:r>
+              <a:rPr kumimoji="1" lang="ja-JP" altLang="en-US" dirty="0"/>
+              <a:t>が余っていても、畑の外にでることはできる。</a:t>
+            </a:r>
           </a:p>
         </p:txBody>
       </p:sp>
@@ -3925,7 +3928,7 @@
         </p:nvSpPr>
         <p:spPr>
           <a:xfrm>
-            <a:off x="6304749" y="5380672"/>
+            <a:off x="838200" y="4719769"/>
             <a:ext cx="5980804" cy="1477328"/>
           </a:xfrm>
           <a:prstGeom prst="rect">

--- a/FarmLife_企画.pptx
+++ b/FarmLife_企画.pptx
@@ -246,7 +246,7 @@
           <a:p>
             <a:fld id="{14472033-EBEF-4113-884E-480E233F66C8}" type="datetimeFigureOut">
               <a:rPr kumimoji="1" lang="ja-JP" altLang="en-US" smtClean="0"/>
-              <a:t>2026/4/19</a:t>
+              <a:t>2026/4/20</a:t>
             </a:fld>
             <a:endParaRPr kumimoji="1" lang="ja-JP" altLang="en-US"/>
           </a:p>
@@ -446,7 +446,7 @@
           <a:p>
             <a:fld id="{14472033-EBEF-4113-884E-480E233F66C8}" type="datetimeFigureOut">
               <a:rPr kumimoji="1" lang="ja-JP" altLang="en-US" smtClean="0"/>
-              <a:t>2026/4/19</a:t>
+              <a:t>2026/4/20</a:t>
             </a:fld>
             <a:endParaRPr kumimoji="1" lang="ja-JP" altLang="en-US"/>
           </a:p>
@@ -656,7 +656,7 @@
           <a:p>
             <a:fld id="{14472033-EBEF-4113-884E-480E233F66C8}" type="datetimeFigureOut">
               <a:rPr kumimoji="1" lang="ja-JP" altLang="en-US" smtClean="0"/>
-              <a:t>2026/4/19</a:t>
+              <a:t>2026/4/20</a:t>
             </a:fld>
             <a:endParaRPr kumimoji="1" lang="ja-JP" altLang="en-US"/>
           </a:p>
@@ -856,7 +856,7 @@
           <a:p>
             <a:fld id="{14472033-EBEF-4113-884E-480E233F66C8}" type="datetimeFigureOut">
               <a:rPr kumimoji="1" lang="ja-JP" altLang="en-US" smtClean="0"/>
-              <a:t>2026/4/19</a:t>
+              <a:t>2026/4/20</a:t>
             </a:fld>
             <a:endParaRPr kumimoji="1" lang="ja-JP" altLang="en-US"/>
           </a:p>
@@ -1101,7 +1101,7 @@
           <a:p>
             <a:fld id="{14472033-EBEF-4113-884E-480E233F66C8}" type="datetimeFigureOut">
               <a:rPr kumimoji="1" lang="ja-JP" altLang="en-US" smtClean="0"/>
-              <a:t>2026/4/19</a:t>
+              <a:t>2026/4/20</a:t>
             </a:fld>
             <a:endParaRPr kumimoji="1" lang="ja-JP" altLang="en-US"/>
           </a:p>
@@ -1394,7 +1394,7 @@
           <a:p>
             <a:fld id="{14472033-EBEF-4113-884E-480E233F66C8}" type="datetimeFigureOut">
               <a:rPr kumimoji="1" lang="ja-JP" altLang="en-US" smtClean="0"/>
-              <a:t>2026/4/19</a:t>
+              <a:t>2026/4/20</a:t>
             </a:fld>
             <a:endParaRPr kumimoji="1" lang="ja-JP" altLang="en-US"/>
           </a:p>
@@ -1822,7 +1822,7 @@
           <a:p>
             <a:fld id="{14472033-EBEF-4113-884E-480E233F66C8}" type="datetimeFigureOut">
               <a:rPr kumimoji="1" lang="ja-JP" altLang="en-US" smtClean="0"/>
-              <a:t>2026/4/19</a:t>
+              <a:t>2026/4/20</a:t>
             </a:fld>
             <a:endParaRPr kumimoji="1" lang="ja-JP" altLang="en-US"/>
           </a:p>
@@ -1939,7 +1939,7 @@
           <a:p>
             <a:fld id="{14472033-EBEF-4113-884E-480E233F66C8}" type="datetimeFigureOut">
               <a:rPr kumimoji="1" lang="ja-JP" altLang="en-US" smtClean="0"/>
-              <a:t>2026/4/19</a:t>
+              <a:t>2026/4/20</a:t>
             </a:fld>
             <a:endParaRPr kumimoji="1" lang="ja-JP" altLang="en-US"/>
           </a:p>
@@ -2034,7 +2034,7 @@
           <a:p>
             <a:fld id="{14472033-EBEF-4113-884E-480E233F66C8}" type="datetimeFigureOut">
               <a:rPr kumimoji="1" lang="ja-JP" altLang="en-US" smtClean="0"/>
-              <a:t>2026/4/19</a:t>
+              <a:t>2026/4/20</a:t>
             </a:fld>
             <a:endParaRPr kumimoji="1" lang="ja-JP" altLang="en-US"/>
           </a:p>
@@ -2341,7 +2341,7 @@
           <a:p>
             <a:fld id="{14472033-EBEF-4113-884E-480E233F66C8}" type="datetimeFigureOut">
               <a:rPr kumimoji="1" lang="ja-JP" altLang="en-US" smtClean="0"/>
-              <a:t>2026/4/19</a:t>
+              <a:t>2026/4/20</a:t>
             </a:fld>
             <a:endParaRPr kumimoji="1" lang="ja-JP" altLang="en-US"/>
           </a:p>
@@ -2593,7 +2593,7 @@
           <a:p>
             <a:fld id="{14472033-EBEF-4113-884E-480E233F66C8}" type="datetimeFigureOut">
               <a:rPr kumimoji="1" lang="ja-JP" altLang="en-US" smtClean="0"/>
-              <a:t>2026/4/19</a:t>
+              <a:t>2026/4/20</a:t>
             </a:fld>
             <a:endParaRPr kumimoji="1" lang="ja-JP" altLang="en-US"/>
           </a:p>
@@ -2836,7 +2836,7 @@
           <a:p>
             <a:fld id="{14472033-EBEF-4113-884E-480E233F66C8}" type="datetimeFigureOut">
               <a:rPr kumimoji="1" lang="ja-JP" altLang="en-US" smtClean="0"/>
-              <a:t>2026/4/19</a:t>
+              <a:t>2026/4/20</a:t>
             </a:fld>
             <a:endParaRPr kumimoji="1" lang="ja-JP" altLang="en-US"/>
           </a:p>
@@ -3262,10 +3262,10 @@
           <a:lstStyle/>
           <a:p>
             <a:r>
-              <a:rPr lang="en-US" altLang="ja-JP" dirty="0" err="1"/>
+              <a:rPr lang="en-US" altLang="ja-JP" b="1" dirty="0" err="1"/>
               <a:t>FarmLife</a:t>
             </a:r>
-            <a:endParaRPr kumimoji="1" lang="ja-JP" altLang="en-US" dirty="0"/>
+            <a:endParaRPr kumimoji="1" lang="ja-JP" altLang="en-US" b="1" dirty="0"/>
           </a:p>
         </p:txBody>
       </p:sp>
@@ -3290,12 +3290,20 @@
           <a:lstStyle/>
           <a:p>
             <a:r>
-              <a:rPr kumimoji="1" lang="en-US" altLang="ja-JP" dirty="0" err="1"/>
+              <a:rPr lang="ja-JP" altLang="en-US" dirty="0" smtClean="0"/>
+              <a:t>作成環境　</a:t>
+            </a:r>
+            <a:r>
+              <a:rPr kumimoji="1" lang="en-US" altLang="ja-JP" dirty="0" err="1" smtClean="0"/>
               <a:t>UnrealEngin</a:t>
             </a:r>
             <a:r>
+              <a:rPr kumimoji="1" lang="en-US" altLang="ja-JP" dirty="0" smtClean="0"/>
+              <a:t> </a:t>
+            </a:r>
+            <a:r>
               <a:rPr kumimoji="1" lang="en-US" altLang="ja-JP" dirty="0"/>
-              <a:t> 5.5.4</a:t>
+              <a:t>5.5.4</a:t>
             </a:r>
           </a:p>
           <a:p>
@@ -3355,6 +3363,13 @@
   <p:clrMapOvr>
     <a:masterClrMapping/>
   </p:clrMapOvr>
+  <p:timing>
+    <p:tnLst>
+      <p:par>
+        <p:cTn id="1" dur="indefinite" restart="never" nodeType="tmRoot"/>
+      </p:par>
+    </p:tnLst>
+  </p:timing>
 </p:sld>
 </file>
 
@@ -3385,13 +3400,18 @@
             <p:ph type="title"/>
           </p:nvPr>
         </p:nvSpPr>
-        <p:spPr/>
-        <p:txBody>
-          <a:bodyPr/>
-          <a:lstStyle/>
-          <a:p>
-            <a:r>
-              <a:rPr kumimoji="1" lang="ja-JP" altLang="en-US" dirty="0"/>
+        <p:spPr>
+          <a:xfrm>
+            <a:off x="838200" y="365125"/>
+            <a:ext cx="3835400" cy="1325563"/>
+          </a:xfrm>
+        </p:spPr>
+        <p:txBody>
+          <a:bodyPr/>
+          <a:lstStyle/>
+          <a:p>
+            <a:r>
+              <a:rPr kumimoji="1" lang="ja-JP" altLang="en-US" b="1" dirty="0"/>
               <a:t>ゲームの目的</a:t>
             </a:r>
           </a:p>
@@ -3415,17 +3435,51 @@
         </p:spPr>
         <p:txBody>
           <a:bodyPr>
-            <a:normAutofit/>
+            <a:normAutofit fontScale="92500" lnSpcReduction="10000"/>
           </a:bodyPr>
           <a:lstStyle/>
           <a:p>
             <a:r>
               <a:rPr kumimoji="1" lang="ja-JP" altLang="en-US" dirty="0"/>
-              <a:t>畑に生成される作物を採取し、得たお金で自身を強化することでより稼ぎやすくする</a:t>
-            </a:r>
+              <a:t>畑に生成される作物を採取し、得たお金で自身を</a:t>
+            </a:r>
+            <a:r>
+              <a:rPr kumimoji="1" lang="ja-JP" altLang="en-US" dirty="0" smtClean="0"/>
+              <a:t>強化し、</a:t>
+            </a:r>
+            <a:endParaRPr kumimoji="1" lang="en-US" altLang="ja-JP" dirty="0" smtClean="0"/>
+          </a:p>
+          <a:p>
+            <a:pPr marL="0" indent="0">
+              <a:buNone/>
+            </a:pPr>
             <a:r>
               <a:rPr lang="ja-JP" altLang="en-US" dirty="0"/>
-              <a:t>。</a:t>
+              <a:t>　</a:t>
+            </a:r>
+            <a:r>
+              <a:rPr kumimoji="1" lang="ja-JP" altLang="en-US" dirty="0" smtClean="0"/>
+              <a:t>より</a:t>
+            </a:r>
+            <a:r>
+              <a:rPr kumimoji="1" lang="ja-JP" altLang="en-US" dirty="0" smtClean="0"/>
+              <a:t>稼ぎやすく</a:t>
+            </a:r>
+            <a:r>
+              <a:rPr lang="ja-JP" altLang="en-US" dirty="0" smtClean="0"/>
+              <a:t>して目標</a:t>
+            </a:r>
+            <a:r>
+              <a:rPr lang="ja-JP" altLang="en-US" dirty="0" smtClean="0"/>
+              <a:t>金額</a:t>
+            </a:r>
+            <a:r>
+              <a:rPr lang="ja-JP" altLang="en-US" dirty="0" smtClean="0"/>
+              <a:t>まで早く到達</a:t>
+            </a:r>
+            <a:r>
+              <a:rPr lang="ja-JP" altLang="en-US" dirty="0" smtClean="0"/>
+              <a:t>すること。</a:t>
             </a:r>
             <a:endParaRPr lang="en-US" altLang="ja-JP" dirty="0"/>
           </a:p>
@@ -3434,30 +3488,79 @@
           </a:p>
           <a:p>
             <a:r>
+              <a:rPr lang="ja-JP" altLang="en-US" b="1" dirty="0"/>
+              <a:t>クリア目標</a:t>
+            </a:r>
+            <a:endParaRPr lang="en-US" altLang="ja-JP" b="1" dirty="0"/>
+          </a:p>
+          <a:p>
+            <a:r>
+              <a:rPr lang="ja-JP" altLang="en-US" dirty="0" smtClean="0"/>
+              <a:t>ステージ毎の目標ゴールド</a:t>
+            </a:r>
+            <a:r>
               <a:rPr lang="ja-JP" altLang="en-US" dirty="0"/>
-              <a:t>クリア目標</a:t>
-            </a:r>
+              <a:t>稼ぐことで</a:t>
+            </a:r>
+            <a:r>
+              <a:rPr lang="ja-JP" altLang="en-US" dirty="0" smtClean="0"/>
+              <a:t>クリア</a:t>
+            </a:r>
+            <a:endParaRPr lang="en-US" altLang="ja-JP" dirty="0" smtClean="0"/>
+          </a:p>
+          <a:p>
             <a:endParaRPr lang="en-US" altLang="ja-JP" dirty="0"/>
           </a:p>
           <a:p>
             <a:r>
-              <a:rPr lang="en-US" altLang="ja-JP" dirty="0"/>
-              <a:t>10000</a:t>
+              <a:rPr lang="ja-JP" altLang="en-US" b="1" u="sng" dirty="0"/>
+              <a:t>クリア時点の経過時間、採取した作物の合計個数</a:t>
+            </a:r>
+            <a:r>
+              <a:rPr lang="ja-JP" altLang="en-US" dirty="0" smtClean="0"/>
+              <a:t>でスコア</a:t>
             </a:r>
             <a:r>
               <a:rPr lang="ja-JP" altLang="en-US" dirty="0"/>
-              <a:t>ゴールド稼ぐことでクリア</a:t>
-            </a:r>
-            <a:endParaRPr lang="en-US" altLang="ja-JP" dirty="0"/>
-          </a:p>
-          <a:p>
+              <a:t>が決まりランク付けされる</a:t>
+            </a:r>
+            <a:r>
+              <a:rPr lang="ja-JP" altLang="en-US" dirty="0" smtClean="0"/>
+              <a:t>。（Ｓ、Ａ、Ｂ、Ｃ）</a:t>
+            </a:r>
+            <a:endParaRPr lang="en-US" altLang="ja-JP" dirty="0" smtClean="0"/>
+          </a:p>
+          <a:p>
+            <a:r>
+              <a:rPr lang="ja-JP" altLang="en-US" dirty="0" smtClean="0"/>
+              <a:t>早く</a:t>
+            </a:r>
             <a:r>
               <a:rPr lang="ja-JP" altLang="en-US" dirty="0"/>
-              <a:t>クリア時点の経過時間、採取した作物の合計個数でスコアが決まりランク付けされる。早く、少ない個数でクリアするほど高得点</a:t>
-            </a:r>
-            <a:r>
-              <a:rPr lang="ja-JP" altLang="en-US"/>
-              <a:t>を得れる</a:t>
+              <a:t>、少ない個数でクリアするほど高得点を</a:t>
+            </a:r>
+            <a:r>
+              <a:rPr lang="ja-JP" altLang="en-US" dirty="0" smtClean="0"/>
+              <a:t>得れる</a:t>
+            </a:r>
+            <a:endParaRPr lang="en-US" altLang="ja-JP" dirty="0" smtClean="0"/>
+          </a:p>
+          <a:p>
+            <a:r>
+              <a:rPr lang="en-US" altLang="ja-JP" dirty="0" smtClean="0"/>
+              <a:t>S</a:t>
+            </a:r>
+            <a:r>
+              <a:rPr lang="ja-JP" altLang="en-US" dirty="0" smtClean="0"/>
+              <a:t>ランクを取得できたらタイトル</a:t>
+            </a:r>
+            <a:r>
+              <a:rPr lang="ja-JP" altLang="en-US" dirty="0" smtClean="0"/>
+              <a:t>にトロフィー</a:t>
+            </a:r>
+            <a:r>
+              <a:rPr lang="ja-JP" altLang="en-US" dirty="0" smtClean="0"/>
+              <a:t>が置かれる</a:t>
             </a:r>
             <a:endParaRPr lang="en-US" altLang="ja-JP" dirty="0"/>
           </a:p>
@@ -3473,6 +3576,13 @@
   <p:clrMapOvr>
     <a:masterClrMapping/>
   </p:clrMapOvr>
+  <p:timing>
+    <p:tnLst>
+      <p:par>
+        <p:cTn id="1" dur="indefinite" restart="never" nodeType="tmRoot"/>
+      </p:par>
+    </p:tnLst>
+  </p:timing>
 </p:sld>
 </file>
 
@@ -3509,7 +3619,7 @@
           <a:lstStyle/>
           <a:p>
             <a:r>
-              <a:rPr kumimoji="1" lang="ja-JP" altLang="en-US" dirty="0"/>
+              <a:rPr kumimoji="1" lang="ja-JP" altLang="en-US" b="1" dirty="0"/>
               <a:t>ゲームの大まかな動き</a:t>
             </a:r>
           </a:p>
@@ -3550,14 +3660,41 @@
           <a:p>
             <a:r>
               <a:rPr lang="ja-JP" altLang="en-US" dirty="0"/>
-              <a:t>採取する鍬の耐久値がなくなったらお金を消費して新しく買わなければならない</a:t>
+              <a:t>採取する鍬の耐久値がなくなったらお金を消費して新しく買わなければ</a:t>
+            </a:r>
+            <a:r>
+              <a:rPr lang="ja-JP" altLang="en-US" dirty="0" smtClean="0"/>
+              <a:t>ならない</a:t>
             </a:r>
             <a:endParaRPr lang="en-US" altLang="ja-JP" dirty="0"/>
           </a:p>
           <a:p>
             <a:r>
+              <a:rPr lang="ja-JP" altLang="en-US" smtClean="0"/>
+              <a:t>鍬がない状態で鍬</a:t>
+            </a:r>
+            <a:r>
               <a:rPr lang="ja-JP" altLang="en-US" dirty="0"/>
-              <a:t>鍬が壊れている状態で新しい鍬が買えない場合ゲームオーバーになる。</a:t>
+              <a:t>を</a:t>
+            </a:r>
+            <a:r>
+              <a:rPr lang="ja-JP" altLang="en-US" dirty="0" smtClean="0"/>
+              <a:t>買えなく</a:t>
+            </a:r>
+            <a:r>
+              <a:rPr lang="ja-JP" altLang="en-US" dirty="0" smtClean="0"/>
+              <a:t>なったら</a:t>
+            </a:r>
+            <a:r>
+              <a:rPr lang="ja-JP" altLang="en-US" dirty="0" smtClean="0"/>
+              <a:t>ゲームオーバー</a:t>
+            </a:r>
+            <a:endParaRPr lang="en-US" altLang="ja-JP" dirty="0" smtClean="0"/>
+          </a:p>
+          <a:p>
+            <a:r>
+              <a:rPr kumimoji="1" lang="ja-JP" altLang="en-US" dirty="0" smtClean="0"/>
+              <a:t>自身のお金を管理しながら進めないといけない</a:t>
             </a:r>
             <a:endParaRPr kumimoji="1" lang="en-US" altLang="ja-JP" dirty="0"/>
           </a:p>
@@ -3566,253 +3703,298 @@
           </a:p>
         </p:txBody>
       </p:sp>
-      <p:sp>
-        <p:nvSpPr>
-          <p:cNvPr id="4" name="正方形/長方形 3">
-            <a:extLst>
-              <a:ext uri="{FF2B5EF4-FFF2-40B4-BE49-F238E27FC236}">
-                <a16:creationId xmlns:a16="http://schemas.microsoft.com/office/drawing/2014/main" id="{1B9A147A-8F59-CEFA-CC2A-93699956386C}"/>
-              </a:ext>
-            </a:extLst>
-          </p:cNvPr>
-          <p:cNvSpPr/>
+      <p:grpSp>
+        <p:nvGrpSpPr>
+          <p:cNvPr id="5" name="グループ化 4"/>
+          <p:cNvGrpSpPr/>
           <p:nvPr/>
-        </p:nvSpPr>
-        <p:spPr>
+        </p:nvGrpSpPr>
+        <p:grpSpPr>
           <a:xfrm>
-            <a:off x="995881" y="4874005"/>
-            <a:ext cx="2109458" cy="1689757"/>
+            <a:off x="1414981" y="4437740"/>
+            <a:ext cx="8965950" cy="1689757"/>
+            <a:chOff x="1529281" y="4412340"/>
+            <a:chExt cx="8965950" cy="1689757"/>
           </a:xfrm>
-          <a:prstGeom prst="rect">
-            <a:avLst/>
-          </a:prstGeom>
-          <a:solidFill>
-            <a:srgbClr val="92D050"/>
-          </a:solidFill>
-        </p:spPr>
-        <p:style>
-          <a:lnRef idx="2">
-            <a:schemeClr val="accent1">
-              <a:shade val="15000"/>
-            </a:schemeClr>
-          </a:lnRef>
-          <a:fillRef idx="1">
-            <a:schemeClr val="accent1"/>
-          </a:fillRef>
-          <a:effectRef idx="0">
-            <a:schemeClr val="accent1"/>
-          </a:effectRef>
-          <a:fontRef idx="minor">
-            <a:schemeClr val="lt1"/>
-          </a:fontRef>
-        </p:style>
-        <p:txBody>
-          <a:bodyPr rtlCol="0" anchor="ctr"/>
-          <a:lstStyle/>
-          <a:p>
-            <a:pPr algn="ctr"/>
-            <a:r>
-              <a:rPr kumimoji="1" lang="ja-JP" altLang="en-US" sz="2400" dirty="0"/>
-              <a:t>採取パート</a:t>
-            </a:r>
-          </a:p>
-        </p:txBody>
-      </p:sp>
-      <p:sp>
-        <p:nvSpPr>
-          <p:cNvPr id="9" name="正方形/長方形 8">
-            <a:extLst>
-              <a:ext uri="{FF2B5EF4-FFF2-40B4-BE49-F238E27FC236}">
-                <a16:creationId xmlns:a16="http://schemas.microsoft.com/office/drawing/2014/main" id="{A7333689-DC3C-3E7F-DA67-4749C70D7186}"/>
-              </a:ext>
-            </a:extLst>
-          </p:cNvPr>
-          <p:cNvSpPr/>
-          <p:nvPr/>
-        </p:nvSpPr>
-        <p:spPr>
-          <a:xfrm>
-            <a:off x="7852373" y="4874005"/>
-            <a:ext cx="2109458" cy="1689757"/>
-          </a:xfrm>
-          <a:prstGeom prst="rect">
-            <a:avLst/>
-          </a:prstGeom>
-          <a:solidFill>
-            <a:srgbClr val="FF0000"/>
-          </a:solidFill>
-        </p:spPr>
-        <p:style>
-          <a:lnRef idx="2">
-            <a:schemeClr val="accent1">
-              <a:shade val="15000"/>
-            </a:schemeClr>
-          </a:lnRef>
-          <a:fillRef idx="1">
-            <a:schemeClr val="accent1"/>
-          </a:fillRef>
-          <a:effectRef idx="0">
-            <a:schemeClr val="accent1"/>
-          </a:effectRef>
-          <a:fontRef idx="minor">
-            <a:schemeClr val="lt1"/>
-          </a:fontRef>
-        </p:style>
-        <p:txBody>
-          <a:bodyPr rtlCol="0" anchor="ctr"/>
-          <a:lstStyle/>
-          <a:p>
-            <a:pPr algn="ctr"/>
-            <a:r>
-              <a:rPr lang="ja-JP" altLang="en-US" sz="2400" dirty="0"/>
-              <a:t>購入</a:t>
-            </a:r>
-            <a:r>
-              <a:rPr kumimoji="1" lang="ja-JP" altLang="en-US" sz="2400" dirty="0"/>
-              <a:t>パート</a:t>
-            </a:r>
-          </a:p>
-        </p:txBody>
-      </p:sp>
-      <p:cxnSp>
-        <p:nvCxnSpPr>
-          <p:cNvPr id="14" name="直線矢印コネクタ 13">
-            <a:extLst>
-              <a:ext uri="{FF2B5EF4-FFF2-40B4-BE49-F238E27FC236}">
-                <a16:creationId xmlns:a16="http://schemas.microsoft.com/office/drawing/2014/main" id="{78FF2947-0A4E-7296-C9B9-C2CF2B649433}"/>
-              </a:ext>
-            </a:extLst>
-          </p:cNvPr>
-          <p:cNvCxnSpPr>
-            <a:cxnSpLocks/>
-          </p:cNvCxnSpPr>
-          <p:nvPr/>
-        </p:nvCxnSpPr>
-        <p:spPr>
-          <a:xfrm>
-            <a:off x="3105339" y="6138250"/>
-            <a:ext cx="4747034" cy="0"/>
-          </a:xfrm>
-          <a:prstGeom prst="straightConnector1">
-            <a:avLst/>
-          </a:prstGeom>
-          <a:ln w="38100">
+        </p:grpSpPr>
+        <p:sp>
+          <p:nvSpPr>
+            <p:cNvPr id="4" name="正方形/長方形 3">
+              <a:extLst>
+                <a:ext uri="{FF2B5EF4-FFF2-40B4-BE49-F238E27FC236}">
+                  <a16:creationId xmlns:a16="http://schemas.microsoft.com/office/drawing/2014/main" id="{1B9A147A-8F59-CEFA-CC2A-93699956386C}"/>
+                </a:ext>
+              </a:extLst>
+            </p:cNvPr>
+            <p:cNvSpPr/>
+            <p:nvPr/>
+          </p:nvSpPr>
+          <p:spPr>
+            <a:xfrm>
+              <a:off x="1529281" y="4412340"/>
+              <a:ext cx="2109458" cy="1689757"/>
+            </a:xfrm>
+            <a:prstGeom prst="rect">
+              <a:avLst/>
+            </a:prstGeom>
+            <a:solidFill>
+              <a:schemeClr val="accent6">
+                <a:lumMod val="75000"/>
+              </a:schemeClr>
+            </a:solidFill>
+          </p:spPr>
+          <p:style>
+            <a:lnRef idx="2">
+              <a:schemeClr val="accent1">
+                <a:shade val="15000"/>
+              </a:schemeClr>
+            </a:lnRef>
+            <a:fillRef idx="1">
+              <a:schemeClr val="accent1"/>
+            </a:fillRef>
+            <a:effectRef idx="0">
+              <a:schemeClr val="accent1"/>
+            </a:effectRef>
+            <a:fontRef idx="minor">
+              <a:schemeClr val="lt1"/>
+            </a:fontRef>
+          </p:style>
+          <p:txBody>
+            <a:bodyPr rtlCol="0" anchor="ctr"/>
+            <a:lstStyle/>
+            <a:p>
+              <a:pPr algn="ctr"/>
+              <a:r>
+                <a:rPr kumimoji="1" lang="ja-JP" altLang="en-US" sz="2400" b="1" dirty="0"/>
+                <a:t>採取パート</a:t>
+              </a:r>
+            </a:p>
+          </p:txBody>
+        </p:sp>
+        <p:sp>
+          <p:nvSpPr>
+            <p:cNvPr id="9" name="正方形/長方形 8">
+              <a:extLst>
+                <a:ext uri="{FF2B5EF4-FFF2-40B4-BE49-F238E27FC236}">
+                  <a16:creationId xmlns:a16="http://schemas.microsoft.com/office/drawing/2014/main" id="{A7333689-DC3C-3E7F-DA67-4749C70D7186}"/>
+                </a:ext>
+              </a:extLst>
+            </p:cNvPr>
+            <p:cNvSpPr/>
+            <p:nvPr/>
+          </p:nvSpPr>
+          <p:spPr>
+            <a:xfrm>
+              <a:off x="8385773" y="4412340"/>
+              <a:ext cx="2109458" cy="1689757"/>
+            </a:xfrm>
+            <a:prstGeom prst="rect">
+              <a:avLst/>
+            </a:prstGeom>
+            <a:solidFill>
+              <a:schemeClr val="accent1">
+                <a:lumMod val="50000"/>
+              </a:schemeClr>
+            </a:solidFill>
+          </p:spPr>
+          <p:style>
+            <a:lnRef idx="2">
+              <a:schemeClr val="accent1">
+                <a:shade val="15000"/>
+              </a:schemeClr>
+            </a:lnRef>
+            <a:fillRef idx="1">
+              <a:schemeClr val="accent1"/>
+            </a:fillRef>
+            <a:effectRef idx="0">
+              <a:schemeClr val="accent1"/>
+            </a:effectRef>
+            <a:fontRef idx="minor">
+              <a:schemeClr val="lt1"/>
+            </a:fontRef>
+          </p:style>
+          <p:txBody>
+            <a:bodyPr rtlCol="0" anchor="ctr"/>
+            <a:lstStyle/>
+            <a:p>
+              <a:pPr algn="ctr"/>
+              <a:r>
+                <a:rPr lang="ja-JP" altLang="en-US" sz="2400" b="1" dirty="0"/>
+                <a:t>購入</a:t>
+              </a:r>
+              <a:r>
+                <a:rPr kumimoji="1" lang="ja-JP" altLang="en-US" sz="2400" b="1" dirty="0"/>
+                <a:t>パート</a:t>
+              </a:r>
+            </a:p>
+          </p:txBody>
+        </p:sp>
+        <p:cxnSp>
+          <p:nvCxnSpPr>
+            <p:cNvPr id="14" name="直線矢印コネクタ 13">
+              <a:extLst>
+                <a:ext uri="{FF2B5EF4-FFF2-40B4-BE49-F238E27FC236}">
+                  <a16:creationId xmlns:a16="http://schemas.microsoft.com/office/drawing/2014/main" id="{78FF2947-0A4E-7296-C9B9-C2CF2B649433}"/>
+                </a:ext>
+              </a:extLst>
+            </p:cNvPr>
+            <p:cNvCxnSpPr>
+              <a:cxnSpLocks/>
+            </p:cNvCxnSpPr>
+            <p:nvPr/>
+          </p:nvCxnSpPr>
+          <p:spPr>
+            <a:xfrm>
+              <a:off x="3638739" y="5676585"/>
+              <a:ext cx="4747034" cy="0"/>
+            </a:xfrm>
+            <a:prstGeom prst="straightConnector1">
+              <a:avLst/>
+            </a:prstGeom>
+            <a:ln w="38100">
+              <a:solidFill>
+                <a:schemeClr val="tx1">
+                  <a:lumMod val="95000"/>
+                  <a:lumOff val="5000"/>
+                </a:schemeClr>
+              </a:solidFill>
+              <a:headEnd type="triangle"/>
+              <a:tailEnd type="triangle"/>
+            </a:ln>
+          </p:spPr>
+          <p:style>
+            <a:lnRef idx="1">
+              <a:schemeClr val="accent1"/>
+            </a:lnRef>
+            <a:fillRef idx="0">
+              <a:schemeClr val="accent1"/>
+            </a:fillRef>
+            <a:effectRef idx="0">
+              <a:schemeClr val="accent1"/>
+            </a:effectRef>
+            <a:fontRef idx="minor">
+              <a:schemeClr val="tx1"/>
+            </a:fontRef>
+          </p:style>
+        </p:cxnSp>
+        <p:sp>
+          <p:nvSpPr>
+            <p:cNvPr id="16" name="矢印: 左カーブ 15">
+              <a:extLst>
+                <a:ext uri="{FF2B5EF4-FFF2-40B4-BE49-F238E27FC236}">
+                  <a16:creationId xmlns:a16="http://schemas.microsoft.com/office/drawing/2014/main" id="{EBA0A7A7-1218-CB5C-57A6-30D1E77A40B0}"/>
+                </a:ext>
+              </a:extLst>
+            </p:cNvPr>
+            <p:cNvSpPr/>
+            <p:nvPr/>
+          </p:nvSpPr>
+          <p:spPr>
+            <a:xfrm>
+              <a:off x="3638739" y="4755912"/>
+              <a:ext cx="660903" cy="334204"/>
+            </a:xfrm>
+            <a:prstGeom prst="curvedLeftArrow">
+              <a:avLst/>
+            </a:prstGeom>
             <a:solidFill>
               <a:schemeClr val="tx1">
                 <a:lumMod val="95000"/>
                 <a:lumOff val="5000"/>
               </a:schemeClr>
             </a:solidFill>
-            <a:headEnd type="triangle"/>
-            <a:tailEnd type="triangle"/>
-          </a:ln>
-        </p:spPr>
-        <p:style>
-          <a:lnRef idx="1">
-            <a:schemeClr val="accent1"/>
-          </a:lnRef>
-          <a:fillRef idx="0">
-            <a:schemeClr val="accent1"/>
-          </a:fillRef>
-          <a:effectRef idx="0">
-            <a:schemeClr val="accent1"/>
-          </a:effectRef>
-          <a:fontRef idx="minor">
-            <a:schemeClr val="tx1"/>
-          </a:fontRef>
-        </p:style>
-      </p:cxnSp>
-      <p:sp>
-        <p:nvSpPr>
-          <p:cNvPr id="16" name="矢印: 左カーブ 15">
-            <a:extLst>
-              <a:ext uri="{FF2B5EF4-FFF2-40B4-BE49-F238E27FC236}">
-                <a16:creationId xmlns:a16="http://schemas.microsoft.com/office/drawing/2014/main" id="{EBA0A7A7-1218-CB5C-57A6-30D1E77A40B0}"/>
-              </a:ext>
-            </a:extLst>
-          </p:cNvPr>
-          <p:cNvSpPr/>
-          <p:nvPr/>
-        </p:nvSpPr>
-        <p:spPr>
-          <a:xfrm>
-            <a:off x="3105339" y="5217577"/>
-            <a:ext cx="660903" cy="334204"/>
-          </a:xfrm>
-          <a:prstGeom prst="curvedLeftArrow">
-            <a:avLst/>
-          </a:prstGeom>
-          <a:solidFill>
-            <a:schemeClr val="tx1">
-              <a:lumMod val="95000"/>
-              <a:lumOff val="5000"/>
-            </a:schemeClr>
-          </a:solidFill>
-        </p:spPr>
-        <p:style>
-          <a:lnRef idx="2">
-            <a:schemeClr val="accent1">
-              <a:shade val="15000"/>
-            </a:schemeClr>
-          </a:lnRef>
-          <a:fillRef idx="1">
-            <a:schemeClr val="accent1"/>
-          </a:fillRef>
-          <a:effectRef idx="0">
-            <a:schemeClr val="accent1"/>
-          </a:effectRef>
-          <a:fontRef idx="minor">
-            <a:schemeClr val="lt1"/>
-          </a:fontRef>
-        </p:style>
-        <p:txBody>
-          <a:bodyPr rtlCol="0" anchor="ctr"/>
-          <a:lstStyle/>
-          <a:p>
-            <a:pPr algn="ctr"/>
-            <a:endParaRPr kumimoji="1" lang="ja-JP" altLang="en-US">
+          </p:spPr>
+          <p:style>
+            <a:lnRef idx="2">
+              <a:schemeClr val="accent1">
+                <a:shade val="15000"/>
+              </a:schemeClr>
+            </a:lnRef>
+            <a:fillRef idx="1">
+              <a:schemeClr val="accent1"/>
+            </a:fillRef>
+            <a:effectRef idx="0">
+              <a:schemeClr val="accent1"/>
+            </a:effectRef>
+            <a:fontRef idx="minor">
+              <a:schemeClr val="lt1"/>
+            </a:fontRef>
+          </p:style>
+          <p:txBody>
+            <a:bodyPr rtlCol="0" anchor="ctr"/>
+            <a:lstStyle/>
+            <a:p>
+              <a:pPr algn="ctr"/>
+              <a:endParaRPr kumimoji="1" lang="ja-JP" altLang="en-US">
+                <a:solidFill>
+                  <a:schemeClr val="tx1"/>
+                </a:solidFill>
+              </a:endParaRPr>
+            </a:p>
+          </p:txBody>
+        </p:sp>
+        <p:sp>
+          <p:nvSpPr>
+            <p:cNvPr id="17" name="テキスト ボックス 16">
+              <a:extLst>
+                <a:ext uri="{FF2B5EF4-FFF2-40B4-BE49-F238E27FC236}">
+                  <a16:creationId xmlns:a16="http://schemas.microsoft.com/office/drawing/2014/main" id="{DD299686-EA69-FFF5-ABA1-813111544455}"/>
+                </a:ext>
+              </a:extLst>
+            </p:cNvPr>
+            <p:cNvSpPr txBox="1"/>
+            <p:nvPr/>
+          </p:nvSpPr>
+          <p:spPr>
+            <a:xfrm>
+              <a:off x="4381123" y="4412340"/>
+              <a:ext cx="3111877" cy="923330"/>
+            </a:xfrm>
+            <a:prstGeom prst="rect">
+              <a:avLst/>
+            </a:prstGeom>
+            <a:solidFill>
+              <a:schemeClr val="accent3">
+                <a:lumMod val="20000"/>
+                <a:lumOff val="80000"/>
+              </a:schemeClr>
+            </a:solidFill>
+            <a:ln w="28575">
               <a:solidFill>
-                <a:schemeClr val="tx1"/>
+                <a:srgbClr val="FF0000"/>
               </a:solidFill>
-            </a:endParaRPr>
-          </a:p>
-        </p:txBody>
-      </p:sp>
-      <p:sp>
-        <p:nvSpPr>
-          <p:cNvPr id="17" name="テキスト ボックス 16">
-            <a:extLst>
-              <a:ext uri="{FF2B5EF4-FFF2-40B4-BE49-F238E27FC236}">
-                <a16:creationId xmlns:a16="http://schemas.microsoft.com/office/drawing/2014/main" id="{DD299686-EA69-FFF5-ABA1-813111544455}"/>
-              </a:ext>
-            </a:extLst>
-          </p:cNvPr>
-          <p:cNvSpPr txBox="1"/>
-          <p:nvPr/>
-        </p:nvSpPr>
-        <p:spPr>
-          <a:xfrm>
-            <a:off x="3847723" y="4874005"/>
-            <a:ext cx="2248277" cy="923330"/>
-          </a:xfrm>
-          <a:prstGeom prst="rect">
-            <a:avLst/>
-          </a:prstGeom>
-          <a:noFill/>
-        </p:spPr>
-        <p:txBody>
-          <a:bodyPr wrap="square" rtlCol="0">
-            <a:spAutoFit/>
-          </a:bodyPr>
-          <a:lstStyle/>
-          <a:p>
-            <a:r>
-              <a:rPr kumimoji="1" lang="ja-JP" altLang="en-US" dirty="0"/>
-              <a:t>鍬があるならそのまま採取を続行することもできる。</a:t>
-            </a:r>
-          </a:p>
-        </p:txBody>
-      </p:sp>
+            </a:ln>
+          </p:spPr>
+          <p:txBody>
+            <a:bodyPr wrap="square" rtlCol="0">
+              <a:spAutoFit/>
+            </a:bodyPr>
+            <a:lstStyle/>
+            <a:p>
+              <a:r>
+                <a:rPr kumimoji="1" lang="ja-JP" altLang="en-US" dirty="0"/>
+                <a:t>鍬があるならそのまま</a:t>
+              </a:r>
+              <a:r>
+                <a:rPr kumimoji="1" lang="ja-JP" altLang="en-US" dirty="0" smtClean="0"/>
+                <a:t>採取</a:t>
+              </a:r>
+              <a:r>
+                <a:rPr lang="ja-JP" altLang="en-US" dirty="0"/>
+                <a:t>パート</a:t>
+              </a:r>
+              <a:r>
+                <a:rPr kumimoji="1" lang="ja-JP" altLang="en-US" dirty="0" smtClean="0"/>
+                <a:t>を</a:t>
+              </a:r>
+              <a:r>
+                <a:rPr kumimoji="1" lang="ja-JP" altLang="en-US" dirty="0"/>
+                <a:t>続行することもできる。</a:t>
+              </a:r>
+            </a:p>
+          </p:txBody>
+        </p:sp>
+      </p:grpSp>
     </p:spTree>
     <p:extLst>
       <p:ext uri="{BB962C8B-B14F-4D97-AF65-F5344CB8AC3E}">
@@ -3823,6 +4005,13 @@
   <p:clrMapOvr>
     <a:masterClrMapping/>
   </p:clrMapOvr>
+  <p:timing>
+    <p:tnLst>
+      <p:par>
+        <p:cTn id="1" dur="indefinite" restart="never" nodeType="tmRoot"/>
+      </p:par>
+    </p:tnLst>
+  </p:timing>
 </p:sld>
 </file>
 
@@ -3859,7 +4048,7 @@
           <a:lstStyle/>
           <a:p>
             <a:r>
-              <a:rPr kumimoji="1" lang="ja-JP" altLang="en-US" dirty="0"/>
+              <a:rPr kumimoji="1" lang="ja-JP" altLang="en-US" b="1" dirty="0"/>
               <a:t>採取パート</a:t>
             </a:r>
           </a:p>
@@ -3894,29 +4083,51 @@
           <a:p>
             <a:r>
               <a:rPr lang="ja-JP" altLang="en-US" dirty="0"/>
-              <a:t>作物を採取した時点でお金を入手することができる。</a:t>
+              <a:t>作物を採取した時点でお金を入手することができる</a:t>
+            </a:r>
+            <a:r>
+              <a:rPr lang="ja-JP" altLang="en-US" dirty="0" smtClean="0"/>
+              <a:t>。</a:t>
             </a:r>
             <a:endParaRPr lang="en-US" altLang="ja-JP" dirty="0"/>
           </a:p>
           <a:p>
             <a:r>
               <a:rPr lang="ja-JP" altLang="en-US" dirty="0"/>
-              <a:t>作物にも種類があり、通常の作物、悪い色の作物、爆発する作物など</a:t>
+              <a:t>作物の出現時間を過ぎると畑の作物がすべて消える</a:t>
+            </a:r>
+            <a:r>
+              <a:rPr lang="ja-JP" altLang="en-US" dirty="0" smtClean="0"/>
+              <a:t>。</a:t>
             </a:r>
             <a:endParaRPr lang="en-US" altLang="ja-JP" dirty="0"/>
           </a:p>
           <a:p>
             <a:r>
-              <a:rPr lang="ja-JP" altLang="en-US" dirty="0"/>
-              <a:t>作物の出現時間を過ぎると畑の作物がすべて消える。出現時間</a:t>
-            </a:r>
-            <a:endParaRPr lang="en-US" altLang="ja-JP" dirty="0"/>
-          </a:p>
-          <a:p>
+              <a:rPr lang="ja-JP" altLang="en-US" dirty="0" smtClean="0"/>
+              <a:t>出現時間</a:t>
+            </a:r>
+            <a:r>
+              <a:rPr kumimoji="1" lang="ja-JP" altLang="en-US" dirty="0" smtClean="0"/>
+              <a:t>が</a:t>
+            </a:r>
             <a:r>
               <a:rPr kumimoji="1" lang="ja-JP" altLang="en-US" dirty="0"/>
-              <a:t>が余っていても、畑の外にでることはできる。</a:t>
-            </a:r>
+              <a:t>余っていても、畑の外</a:t>
+            </a:r>
+            <a:r>
+              <a:rPr kumimoji="1" lang="ja-JP" altLang="en-US" dirty="0" smtClean="0"/>
+              <a:t>に</a:t>
+            </a:r>
+            <a:r>
+              <a:rPr lang="ja-JP" altLang="en-US" dirty="0" smtClean="0"/>
+              <a:t>出れるが作物は消える</a:t>
+            </a:r>
+            <a:r>
+              <a:rPr kumimoji="1" lang="ja-JP" altLang="en-US" dirty="0" smtClean="0"/>
+              <a:t>。</a:t>
+            </a:r>
+            <a:endParaRPr kumimoji="1" lang="ja-JP" altLang="en-US" dirty="0"/>
           </a:p>
         </p:txBody>
       </p:sp>
@@ -3928,8 +4139,8 @@
         </p:nvSpPr>
         <p:spPr>
           <a:xfrm>
-            <a:off x="838200" y="4719769"/>
-            <a:ext cx="5980804" cy="1477328"/>
+            <a:off x="838200" y="4260521"/>
+            <a:ext cx="7010400" cy="1631216"/>
           </a:xfrm>
           <a:prstGeom prst="rect">
             <a:avLst/>
@@ -3943,90 +4154,90 @@
           <a:lstStyle/>
           <a:p>
             <a:r>
-              <a:rPr kumimoji="1" lang="ja-JP" altLang="en-US" dirty="0"/>
+              <a:rPr kumimoji="1" lang="ja-JP" altLang="en-US" sz="2000" dirty="0"/>
               <a:t>初期の畑のステータス（仮）</a:t>
             </a:r>
-            <a:endParaRPr kumimoji="1" lang="en-US" altLang="ja-JP" dirty="0"/>
-          </a:p>
-          <a:p>
-            <a:r>
-              <a:rPr lang="ja-JP" altLang="en-US" dirty="0"/>
+            <a:endParaRPr kumimoji="1" lang="en-US" altLang="ja-JP" sz="2000" dirty="0"/>
+          </a:p>
+          <a:p>
+            <a:r>
+              <a:rPr lang="ja-JP" altLang="en-US" sz="2000" dirty="0"/>
               <a:t>・出現時間　  </a:t>
             </a:r>
             <a:r>
-              <a:rPr lang="en-US" altLang="ja-JP" dirty="0"/>
+              <a:rPr lang="en-US" altLang="ja-JP" sz="2000" dirty="0"/>
               <a:t>5</a:t>
             </a:r>
             <a:r>
-              <a:rPr lang="ja-JP" altLang="en-US" dirty="0"/>
+              <a:rPr lang="ja-JP" altLang="en-US" sz="2000" dirty="0"/>
               <a:t>秒</a:t>
             </a:r>
-            <a:endParaRPr lang="en-US" altLang="ja-JP" dirty="0"/>
-          </a:p>
-          <a:p>
-            <a:r>
-              <a:rPr lang="ja-JP" altLang="en-US" dirty="0"/>
+            <a:endParaRPr lang="en-US" altLang="ja-JP" sz="2000" dirty="0"/>
+          </a:p>
+          <a:p>
+            <a:r>
+              <a:rPr lang="ja-JP" altLang="en-US" sz="2000" dirty="0"/>
               <a:t>・最大個数　</a:t>
             </a:r>
             <a:r>
-              <a:rPr lang="en-US" altLang="ja-JP" dirty="0"/>
+              <a:rPr lang="en-US" altLang="ja-JP" sz="2000" dirty="0"/>
               <a:t>10</a:t>
             </a:r>
             <a:r>
-              <a:rPr lang="ja-JP" altLang="en-US" dirty="0"/>
+              <a:rPr lang="ja-JP" altLang="en-US" sz="2000" dirty="0"/>
               <a:t>個</a:t>
             </a:r>
-            <a:endParaRPr lang="en-US" altLang="ja-JP" dirty="0"/>
-          </a:p>
-          <a:p>
-            <a:r>
-              <a:rPr lang="ja-JP" altLang="en-US" dirty="0"/>
+            <a:endParaRPr lang="en-US" altLang="ja-JP" sz="2000" dirty="0"/>
+          </a:p>
+          <a:p>
+            <a:r>
+              <a:rPr lang="ja-JP" altLang="en-US" sz="2000" dirty="0"/>
               <a:t>・出現する作物　　通常のカブ</a:t>
             </a:r>
             <a:r>
-              <a:rPr lang="en-US" altLang="ja-JP" dirty="0"/>
+              <a:rPr lang="en-US" altLang="ja-JP" sz="2000" dirty="0"/>
               <a:t>(</a:t>
             </a:r>
             <a:r>
-              <a:rPr lang="ja-JP" altLang="en-US" dirty="0"/>
+              <a:rPr lang="ja-JP" altLang="en-US" sz="2000" dirty="0"/>
               <a:t>価値 </a:t>
             </a:r>
             <a:r>
-              <a:rPr lang="en-US" altLang="ja-JP" dirty="0"/>
+              <a:rPr lang="en-US" altLang="ja-JP" sz="2000" dirty="0"/>
               <a:t>:  2G,</a:t>
             </a:r>
             <a:r>
-              <a:rPr lang="ja-JP" altLang="en-US" dirty="0"/>
+              <a:rPr lang="ja-JP" altLang="en-US" sz="2000" dirty="0"/>
               <a:t>作物体力 </a:t>
             </a:r>
             <a:r>
-              <a:rPr lang="en-US" altLang="ja-JP" dirty="0"/>
+              <a:rPr lang="en-US" altLang="ja-JP" sz="2000" dirty="0"/>
               <a:t>: 3)</a:t>
             </a:r>
           </a:p>
           <a:p>
             <a:r>
-              <a:rPr lang="ja-JP" altLang="en-US" dirty="0"/>
+              <a:rPr lang="ja-JP" altLang="en-US" sz="2000" dirty="0"/>
               <a:t>　　　　　　　　悪い色のカブ</a:t>
             </a:r>
             <a:r>
-              <a:rPr lang="en-US" altLang="ja-JP" dirty="0"/>
+              <a:rPr lang="en-US" altLang="ja-JP" sz="2000" dirty="0"/>
               <a:t>(</a:t>
             </a:r>
             <a:r>
-              <a:rPr lang="ja-JP" altLang="en-US" dirty="0"/>
+              <a:rPr lang="ja-JP" altLang="en-US" sz="2000" dirty="0"/>
               <a:t>価値 </a:t>
             </a:r>
             <a:r>
-              <a:rPr lang="en-US" altLang="ja-JP" dirty="0"/>
+              <a:rPr lang="en-US" altLang="ja-JP" sz="2000" dirty="0"/>
               <a:t>: -1G,</a:t>
             </a:r>
             <a:r>
-              <a:rPr lang="ja-JP" altLang="en-US" dirty="0"/>
+              <a:rPr lang="ja-JP" altLang="en-US" sz="2000" dirty="0"/>
               <a:t>作物体力 </a:t>
             </a:r>
             <a:r>
-              <a:rPr lang="en-US" altLang="ja-JP" dirty="0"/>
+              <a:rPr lang="en-US" altLang="ja-JP" sz="2000" dirty="0"/>
               <a:t>: 2)</a:t>
             </a:r>
           </a:p>
@@ -4042,6 +4253,13 @@
   <p:clrMapOvr>
     <a:masterClrMapping/>
   </p:clrMapOvr>
+  <p:timing>
+    <p:tnLst>
+      <p:par>
+        <p:cTn id="1" dur="indefinite" restart="never" nodeType="tmRoot"/>
+      </p:par>
+    </p:tnLst>
+  </p:timing>
 </p:sld>
 </file>
 
@@ -4078,7 +4296,7 @@
           <a:lstStyle/>
           <a:p>
             <a:r>
-              <a:rPr kumimoji="1" lang="ja-JP" altLang="en-US" dirty="0"/>
+              <a:rPr kumimoji="1" lang="ja-JP" altLang="en-US" b="1" dirty="0"/>
               <a:t>作物の種類</a:t>
             </a:r>
           </a:p>
@@ -4102,13 +4320,21 @@
         </p:spPr>
         <p:txBody>
           <a:bodyPr>
-            <a:normAutofit fontScale="92500"/>
+            <a:normAutofit fontScale="92500" lnSpcReduction="10000"/>
           </a:bodyPr>
           <a:lstStyle/>
           <a:p>
             <a:r>
               <a:rPr kumimoji="1" lang="ja-JP" altLang="en-US" dirty="0"/>
-              <a:t>通常の作物・・・普通の作物で、どの鍬でも採取可能</a:t>
+              <a:t>通常の作物・・・普通の作物で</a:t>
+            </a:r>
+            <a:r>
+              <a:rPr kumimoji="1" lang="ja-JP" altLang="en-US" dirty="0" smtClean="0"/>
+              <a:t>、</a:t>
+            </a:r>
+            <a:r>
+              <a:rPr lang="ja-JP" altLang="en-US" dirty="0" smtClean="0"/>
+              <a:t>採取した時点でお金を得ることができる</a:t>
             </a:r>
             <a:endParaRPr kumimoji="1" lang="en-US" altLang="ja-JP" dirty="0"/>
           </a:p>
@@ -4121,7 +4347,19 @@
           <a:p>
             <a:r>
               <a:rPr lang="ja-JP" altLang="en-US" dirty="0"/>
-              <a:t>悪い色の作物・・・色の暗い作物で、黒い鍬以外ではお金が減る</a:t>
+              <a:t>悪い色の作物・・・色</a:t>
+            </a:r>
+            <a:r>
+              <a:rPr lang="ja-JP" altLang="en-US" dirty="0" smtClean="0"/>
+              <a:t>の</a:t>
+            </a:r>
+            <a:r>
+              <a:rPr lang="ja-JP" altLang="en-US" dirty="0"/>
+              <a:t>悪い</a:t>
+            </a:r>
+            <a:r>
+              <a:rPr lang="ja-JP" altLang="en-US" dirty="0" smtClean="0"/>
+              <a:t>作物で採取してしまうとお金を取られてしまう</a:t>
             </a:r>
             <a:endParaRPr lang="en-US" altLang="ja-JP" dirty="0"/>
           </a:p>
@@ -4142,120 +4380,183 @@
             </a:r>
             <a:r>
               <a:rPr kumimoji="1" lang="ja-JP" altLang="en-US" dirty="0"/>
-              <a:t>葉など一部の形状が違う、鋼の鍬でのみ安全に採取できる、それ以外では吹き飛ばされる</a:t>
+              <a:t>葉など一部の形状が</a:t>
+            </a:r>
+            <a:r>
+              <a:rPr kumimoji="1" lang="ja-JP" altLang="en-US" dirty="0" smtClean="0"/>
+              <a:t>違う</a:t>
             </a:r>
             <a:endParaRPr kumimoji="1" lang="en-US" altLang="ja-JP" dirty="0"/>
           </a:p>
         </p:txBody>
       </p:sp>
-      <p:pic>
-        <p:nvPicPr>
-          <p:cNvPr id="5" name="グラフィックス 4" descr="りんご 単色塗りつぶし">
-            <a:extLst>
-              <a:ext uri="{FF2B5EF4-FFF2-40B4-BE49-F238E27FC236}">
-                <a16:creationId xmlns:a16="http://schemas.microsoft.com/office/drawing/2014/main" id="{92730AF3-7E0E-C3F4-6133-08A5A515B711}"/>
-              </a:ext>
-            </a:extLst>
-          </p:cNvPr>
-          <p:cNvPicPr>
-            <a:picLocks noChangeAspect="1"/>
-          </p:cNvPicPr>
+      <p:sp>
+        <p:nvSpPr>
+          <p:cNvPr id="4" name="テキスト ボックス 3"/>
+          <p:cNvSpPr txBox="1"/>
           <p:nvPr/>
-        </p:nvPicPr>
-        <p:blipFill>
-          <a:blip>
-            <a:extLst>
-              <a:ext uri="{96DAC541-7B7A-43D3-8B79-37D633B846F1}">
-                <asvg:svgBlip xmlns:asvg="http://schemas.microsoft.com/office/drawing/2016/SVG/main" r:embed="rId2"/>
-              </a:ext>
-            </a:extLst>
-          </a:blip>
-          <a:stretch>
-            <a:fillRect/>
-          </a:stretch>
-        </p:blipFill>
+        </p:nvSpPr>
         <p:spPr>
           <a:xfrm>
-            <a:off x="1082644" y="4876190"/>
-            <a:ext cx="1569269" cy="1569269"/>
+            <a:off x="1473200" y="4991100"/>
+            <a:ext cx="812800" cy="1446550"/>
           </a:xfrm>
           <a:prstGeom prst="rect">
             <a:avLst/>
           </a:prstGeom>
+          <a:noFill/>
         </p:spPr>
-      </p:pic>
-      <p:pic>
-        <p:nvPicPr>
-          <p:cNvPr id="6" name="グラフィックス 5" descr="りんご 単色塗りつぶし">
-            <a:extLst>
-              <a:ext uri="{FF2B5EF4-FFF2-40B4-BE49-F238E27FC236}">
-                <a16:creationId xmlns:a16="http://schemas.microsoft.com/office/drawing/2014/main" id="{DCA9F694-667F-B247-0477-1B9D03C5C0AF}"/>
-              </a:ext>
-            </a:extLst>
-          </p:cNvPr>
-          <p:cNvPicPr>
-            <a:picLocks noChangeAspect="1"/>
-          </p:cNvPicPr>
+        <p:txBody>
+          <a:bodyPr wrap="square" rtlCol="0">
+            <a:spAutoFit/>
+          </a:bodyPr>
+          <a:lstStyle/>
+          <a:p>
+            <a:r>
+              <a:rPr lang="ja-JP" altLang="en-US" sz="8800" dirty="0" smtClean="0">
+                <a:solidFill>
+                  <a:srgbClr val="FF0000"/>
+                </a:solidFill>
+              </a:rPr>
+              <a:t>🍎</a:t>
+            </a:r>
+            <a:endParaRPr kumimoji="1" lang="ja-JP" altLang="en-US" sz="8800" dirty="0">
+              <a:solidFill>
+                <a:srgbClr val="FF0000"/>
+              </a:solidFill>
+            </a:endParaRPr>
+          </a:p>
+        </p:txBody>
+      </p:sp>
+      <p:sp>
+        <p:nvSpPr>
+          <p:cNvPr id="8" name="テキスト ボックス 7"/>
+          <p:cNvSpPr txBox="1"/>
           <p:nvPr/>
-        </p:nvPicPr>
-        <p:blipFill>
-          <a:blip>
-            <a:extLst>
-              <a:ext uri="{96DAC541-7B7A-43D3-8B79-37D633B846F1}">
-                <asvg:svgBlip xmlns:asvg="http://schemas.microsoft.com/office/drawing/2016/SVG/main" r:embed="rId3"/>
-              </a:ext>
-            </a:extLst>
-          </a:blip>
-          <a:stretch>
-            <a:fillRect/>
-          </a:stretch>
-        </p:blipFill>
+        </p:nvSpPr>
         <p:spPr>
           <a:xfrm>
-            <a:off x="4898300" y="4882110"/>
-            <a:ext cx="1569269" cy="1569269"/>
+            <a:off x="5089556" y="4991100"/>
+            <a:ext cx="1524000" cy="1446550"/>
           </a:xfrm>
           <a:prstGeom prst="rect">
             <a:avLst/>
           </a:prstGeom>
+          <a:noFill/>
         </p:spPr>
-      </p:pic>
-      <p:pic>
-        <p:nvPicPr>
-          <p:cNvPr id="7" name="グラフィックス 6" descr="りんご 単色塗りつぶし">
-            <a:extLst>
-              <a:ext uri="{FF2B5EF4-FFF2-40B4-BE49-F238E27FC236}">
-                <a16:creationId xmlns:a16="http://schemas.microsoft.com/office/drawing/2014/main" id="{C05A9474-4B00-52AA-A0AE-9A737C1B1A9B}"/>
-              </a:ext>
-            </a:extLst>
-          </p:cNvPr>
-          <p:cNvPicPr>
-            <a:picLocks noChangeAspect="1"/>
-          </p:cNvPicPr>
+        <p:txBody>
+          <a:bodyPr wrap="square" rtlCol="0">
+            <a:spAutoFit/>
+          </a:bodyPr>
+          <a:lstStyle/>
+          <a:p>
+            <a:r>
+              <a:rPr lang="ja-JP" altLang="en-US" sz="8800" dirty="0" smtClean="0">
+                <a:solidFill>
+                  <a:srgbClr val="C00000"/>
+                </a:solidFill>
+              </a:rPr>
+              <a:t>🍎</a:t>
+            </a:r>
+            <a:endParaRPr kumimoji="1" lang="ja-JP" altLang="en-US" sz="8800" dirty="0">
+              <a:solidFill>
+                <a:srgbClr val="C00000"/>
+              </a:solidFill>
+            </a:endParaRPr>
+          </a:p>
+        </p:txBody>
+      </p:sp>
+      <p:grpSp>
+        <p:nvGrpSpPr>
+          <p:cNvPr id="11" name="グループ化 10"/>
+          <p:cNvGrpSpPr/>
           <p:nvPr/>
-        </p:nvPicPr>
-        <p:blipFill>
-          <a:blip>
-            <a:extLst>
-              <a:ext uri="{96DAC541-7B7A-43D3-8B79-37D633B846F1}">
-                <asvg:svgBlip xmlns:asvg="http://schemas.microsoft.com/office/drawing/2016/SVG/main" r:embed="rId4"/>
-              </a:ext>
-            </a:extLst>
-          </a:blip>
-          <a:stretch>
-            <a:fillRect/>
-          </a:stretch>
-        </p:blipFill>
-        <p:spPr>
+        </p:nvGrpSpPr>
+        <p:grpSpPr>
           <a:xfrm>
-            <a:off x="8592490" y="4876190"/>
-            <a:ext cx="1569269" cy="1569269"/>
+            <a:off x="8617012" y="4937239"/>
+            <a:ext cx="1600200" cy="1554272"/>
+            <a:chOff x="8013700" y="4937239"/>
+            <a:chExt cx="1600200" cy="1554272"/>
           </a:xfrm>
-          <a:prstGeom prst="rect">
-            <a:avLst/>
-          </a:prstGeom>
-        </p:spPr>
-      </p:pic>
+        </p:grpSpPr>
+        <p:sp>
+          <p:nvSpPr>
+            <p:cNvPr id="9" name="テキスト ボックス 8"/>
+            <p:cNvSpPr txBox="1"/>
+            <p:nvPr/>
+          </p:nvSpPr>
+          <p:spPr>
+            <a:xfrm>
+              <a:off x="8013700" y="4937239"/>
+              <a:ext cx="1600200" cy="1554272"/>
+            </a:xfrm>
+            <a:prstGeom prst="rect">
+              <a:avLst/>
+            </a:prstGeom>
+            <a:noFill/>
+          </p:spPr>
+          <p:txBody>
+            <a:bodyPr wrap="square" rtlCol="0">
+              <a:spAutoFit/>
+            </a:bodyPr>
+            <a:lstStyle/>
+            <a:p>
+              <a:r>
+                <a:rPr lang="ja-JP" altLang="en-US" sz="9500" dirty="0" smtClean="0">
+                  <a:solidFill>
+                    <a:srgbClr val="FFC000"/>
+                  </a:solidFill>
+                </a:rPr>
+                <a:t>🍎</a:t>
+              </a:r>
+              <a:endParaRPr kumimoji="1" lang="ja-JP" altLang="en-US" sz="9500" dirty="0">
+                <a:solidFill>
+                  <a:srgbClr val="FFC000"/>
+                </a:solidFill>
+              </a:endParaRPr>
+            </a:p>
+          </p:txBody>
+        </p:sp>
+        <p:sp>
+          <p:nvSpPr>
+            <p:cNvPr id="10" name="テキスト ボックス 9"/>
+            <p:cNvSpPr txBox="1"/>
+            <p:nvPr/>
+          </p:nvSpPr>
+          <p:spPr>
+            <a:xfrm>
+              <a:off x="8102600" y="5052655"/>
+              <a:ext cx="812800" cy="1323439"/>
+            </a:xfrm>
+            <a:prstGeom prst="rect">
+              <a:avLst/>
+            </a:prstGeom>
+            <a:noFill/>
+          </p:spPr>
+          <p:txBody>
+            <a:bodyPr wrap="square" rtlCol="0">
+              <a:spAutoFit/>
+            </a:bodyPr>
+            <a:lstStyle/>
+            <a:p>
+              <a:r>
+                <a:rPr lang="ja-JP" altLang="en-US" sz="8000" dirty="0" smtClean="0">
+                  <a:solidFill>
+                    <a:srgbClr val="FF0000"/>
+                  </a:solidFill>
+                </a:rPr>
+                <a:t>🍎</a:t>
+              </a:r>
+              <a:endParaRPr kumimoji="1" lang="ja-JP" altLang="en-US" sz="8000" dirty="0">
+                <a:solidFill>
+                  <a:srgbClr val="FF0000"/>
+                </a:solidFill>
+              </a:endParaRPr>
+            </a:p>
+          </p:txBody>
+        </p:sp>
+      </p:grpSp>
     </p:spTree>
     <p:extLst>
       <p:ext uri="{BB962C8B-B14F-4D97-AF65-F5344CB8AC3E}">
@@ -4266,6 +4567,13 @@
   <p:clrMapOvr>
     <a:masterClrMapping/>
   </p:clrMapOvr>
+  <p:timing>
+    <p:tnLst>
+      <p:par>
+        <p:cTn id="1" dur="indefinite" restart="never" nodeType="tmRoot"/>
+      </p:par>
+    </p:tnLst>
+  </p:timing>
 </p:sld>
 </file>
 
@@ -4302,11 +4610,11 @@
           <a:lstStyle/>
           <a:p>
             <a:r>
-              <a:rPr lang="ja-JP" altLang="en-US" dirty="0"/>
+              <a:rPr lang="ja-JP" altLang="en-US" b="1" dirty="0"/>
               <a:t>購入</a:t>
             </a:r>
             <a:r>
-              <a:rPr kumimoji="1" lang="ja-JP" altLang="en-US" dirty="0"/>
+              <a:rPr kumimoji="1" lang="ja-JP" altLang="en-US" b="1" dirty="0"/>
               <a:t>パート</a:t>
             </a:r>
           </a:p>
@@ -4336,22 +4644,11 @@
           <a:p>
             <a:r>
               <a:rPr kumimoji="1" lang="ja-JP" altLang="en-US" dirty="0"/>
-              <a:t>採取パートで得たお金を使ってパークや鍬を購入することができる</a:t>
-            </a:r>
-            <a:endParaRPr lang="en-US" altLang="ja-JP" dirty="0"/>
-          </a:p>
-          <a:p>
-            <a:r>
-              <a:rPr lang="ja-JP" altLang="en-US" dirty="0"/>
-              <a:t>より価値のある作物や、作物の価値を</a:t>
-            </a:r>
-            <a:r>
-              <a:rPr lang="en-US" altLang="ja-JP" dirty="0"/>
-              <a:t>2</a:t>
-            </a:r>
-            <a:r>
-              <a:rPr lang="ja-JP" altLang="en-US" dirty="0"/>
-              <a:t>倍にするなど、さまざまなパークがある</a:t>
+              <a:t>採取パートで得たお金を使ってパークや鍬を購入することが</a:t>
+            </a:r>
+            <a:r>
+              <a:rPr kumimoji="1" lang="ja-JP" altLang="en-US" dirty="0" smtClean="0"/>
+              <a:t>できる</a:t>
             </a:r>
             <a:endParaRPr lang="en-US" altLang="ja-JP" dirty="0"/>
           </a:p>
@@ -4372,15 +4669,15 @@
         </p:nvSpPr>
         <p:spPr>
           <a:xfrm>
-            <a:off x="992697" y="4460413"/>
-            <a:ext cx="6096000" cy="1938992"/>
+            <a:off x="838200" y="4091081"/>
+            <a:ext cx="5410200" cy="1938992"/>
           </a:xfrm>
           <a:prstGeom prst="rect">
             <a:avLst/>
           </a:prstGeom>
         </p:spPr>
         <p:txBody>
-          <a:bodyPr>
+          <a:bodyPr wrap="square">
             <a:spAutoFit/>
           </a:bodyPr>
           <a:lstStyle/>
@@ -4435,6 +4732,68 @@
             <a:r>
               <a:rPr lang="ja-JP" altLang="en-US" sz="2400" dirty="0"/>
               <a:t>　　など</a:t>
+            </a:r>
+            <a:endParaRPr lang="en-US" altLang="ja-JP" sz="2400" dirty="0"/>
+          </a:p>
+        </p:txBody>
+      </p:sp>
+      <p:sp>
+        <p:nvSpPr>
+          <p:cNvPr id="5" name="正方形/長方形 4"/>
+          <p:cNvSpPr/>
+          <p:nvPr/>
+        </p:nvSpPr>
+        <p:spPr>
+          <a:xfrm>
+            <a:off x="7467600" y="4091081"/>
+            <a:ext cx="4241800" cy="1200329"/>
+          </a:xfrm>
+          <a:prstGeom prst="rect">
+            <a:avLst/>
+          </a:prstGeom>
+        </p:spPr>
+        <p:txBody>
+          <a:bodyPr wrap="square">
+            <a:spAutoFit/>
+          </a:bodyPr>
+          <a:lstStyle/>
+          <a:p>
+            <a:r>
+              <a:rPr lang="ja-JP" altLang="en-US" sz="2400" dirty="0" smtClean="0"/>
+              <a:t>鍬の初期ステータス</a:t>
+            </a:r>
+            <a:endParaRPr lang="en-US" altLang="ja-JP" sz="2400" dirty="0" smtClean="0"/>
+          </a:p>
+          <a:p>
+            <a:r>
+              <a:rPr lang="ja-JP" altLang="en-US" sz="2400" dirty="0" smtClean="0"/>
+              <a:t>耐久値　  </a:t>
+            </a:r>
+            <a:r>
+              <a:rPr lang="en-US" altLang="ja-JP" sz="2400" dirty="0" smtClean="0"/>
+              <a:t>20</a:t>
+            </a:r>
+          </a:p>
+          <a:p>
+            <a:r>
+              <a:rPr lang="ja-JP" altLang="en-US" sz="2400" dirty="0" smtClean="0"/>
+              <a:t>購入金額    </a:t>
+            </a:r>
+            <a:r>
+              <a:rPr lang="en-US" altLang="ja-JP" sz="2400" dirty="0" smtClean="0"/>
+              <a:t>3</a:t>
+            </a:r>
+            <a:r>
+              <a:rPr lang="ja-JP" altLang="en-US" sz="2400" dirty="0" smtClean="0"/>
+              <a:t>（カブ</a:t>
+            </a:r>
+            <a:r>
+              <a:rPr lang="en-US" altLang="ja-JP" sz="2400" dirty="0" smtClean="0"/>
+              <a:t>2</a:t>
+            </a:r>
+            <a:r>
+              <a:rPr lang="ja-JP" altLang="en-US" sz="2400" dirty="0" smtClean="0"/>
+              <a:t>個分）</a:t>
             </a:r>
             <a:endParaRPr lang="en-US" altLang="ja-JP" sz="2400" dirty="0"/>
           </a:p>
